--- a/docs/鹭见SiteSight_项目介绍_v1.0.pptx
+++ b/docs/鹭见SiteSight_项目介绍_v1.0.pptx
@@ -1,31 +1,126 @@
 
 <file path=ppt/presentation.xml><?xml version="1.0" encoding="utf-8"?>
-<p:presentation xmlns:p="http://schemas.openxmlformats.org/presentationml/2006/main">
+<p:presentation xmlns:a="http://schemas.openxmlformats.org/drawingml/2006/main" xmlns:r="http://schemas.openxmlformats.org/officeDocument/2006/relationships" xmlns:p="http://schemas.openxmlformats.org/presentationml/2006/main">
   <p:sldMasterIdLst>
-    <p:sldMasterId xmlns:r="http://schemas.openxmlformats.org/officeDocument/2006/relationships" id="2147483648" r:id="R85fca15201dc4fff"/>
+    <p:sldMasterId id="2147483648" r:id="rId1"/>
   </p:sldMasterIdLst>
   <p:notesMasterIdLst>
-    <p:notesMasterId xmlns:r="http://schemas.openxmlformats.org/officeDocument/2006/relationships" r:id="R63b262b3c6814eb6"/>
+    <p:notesMasterId r:id="rId8"/>
   </p:notesMasterIdLst>
   <p:sldIdLst>
-    <p:sldId xmlns:r="http://schemas.openxmlformats.org/officeDocument/2006/relationships" id="256" r:id="R76d68e7dbb6640e7"/>
-    <p:sldId xmlns:r="http://schemas.openxmlformats.org/officeDocument/2006/relationships" id="257" r:id="R0b662c40d8e14a9b"/>
-    <p:sldId xmlns:r="http://schemas.openxmlformats.org/officeDocument/2006/relationships" id="258" r:id="Rf02851f9cc364aff"/>
-    <p:sldId xmlns:r="http://schemas.openxmlformats.org/officeDocument/2006/relationships" id="259" r:id="R6f64f9e8e92945cd"/>
-    <p:sldId xmlns:r="http://schemas.openxmlformats.org/officeDocument/2006/relationships" id="260" r:id="Rc3a89c2e98734346"/>
-    <p:sldId xmlns:r="http://schemas.openxmlformats.org/officeDocument/2006/relationships" id="261" r:id="R30040f850a3743bf"/>
+    <p:sldId id="256" r:id="rId2"/>
+    <p:sldId id="257" r:id="rId3"/>
+    <p:sldId id="258" r:id="rId4"/>
+    <p:sldId id="259" r:id="rId5"/>
+    <p:sldId id="260" r:id="rId6"/>
+    <p:sldId id="261" r:id="rId7"/>
   </p:sldIdLst>
   <p:sldSz cx="12192000" cy="6858000"/>
   <p:notesSz cx="6858000" cy="9144000"/>
+  <p:defaultTextStyle>
+    <a:defPPr>
+      <a:defRPr lang="zh-CN"/>
+    </a:defPPr>
+    <a:lvl1pPr marL="0" algn="l" defTabSz="914400" rtl="0" eaLnBrk="1" latinLnBrk="0" hangingPunct="1">
+      <a:defRPr sz="1800" kern="1200">
+        <a:solidFill>
+          <a:schemeClr val="tx1"/>
+        </a:solidFill>
+        <a:latin typeface="+mn-lt"/>
+        <a:ea typeface="+mn-ea"/>
+        <a:cs typeface="+mn-cs"/>
+      </a:defRPr>
+    </a:lvl1pPr>
+    <a:lvl2pPr marL="457200" algn="l" defTabSz="914400" rtl="0" eaLnBrk="1" latinLnBrk="0" hangingPunct="1">
+      <a:defRPr sz="1800" kern="1200">
+        <a:solidFill>
+          <a:schemeClr val="tx1"/>
+        </a:solidFill>
+        <a:latin typeface="+mn-lt"/>
+        <a:ea typeface="+mn-ea"/>
+        <a:cs typeface="+mn-cs"/>
+      </a:defRPr>
+    </a:lvl2pPr>
+    <a:lvl3pPr marL="914400" algn="l" defTabSz="914400" rtl="0" eaLnBrk="1" latinLnBrk="0" hangingPunct="1">
+      <a:defRPr sz="1800" kern="1200">
+        <a:solidFill>
+          <a:schemeClr val="tx1"/>
+        </a:solidFill>
+        <a:latin typeface="+mn-lt"/>
+        <a:ea typeface="+mn-ea"/>
+        <a:cs typeface="+mn-cs"/>
+      </a:defRPr>
+    </a:lvl3pPr>
+    <a:lvl4pPr marL="1371600" algn="l" defTabSz="914400" rtl="0" eaLnBrk="1" latinLnBrk="0" hangingPunct="1">
+      <a:defRPr sz="1800" kern="1200">
+        <a:solidFill>
+          <a:schemeClr val="tx1"/>
+        </a:solidFill>
+        <a:latin typeface="+mn-lt"/>
+        <a:ea typeface="+mn-ea"/>
+        <a:cs typeface="+mn-cs"/>
+      </a:defRPr>
+    </a:lvl4pPr>
+    <a:lvl5pPr marL="1828800" algn="l" defTabSz="914400" rtl="0" eaLnBrk="1" latinLnBrk="0" hangingPunct="1">
+      <a:defRPr sz="1800" kern="1200">
+        <a:solidFill>
+          <a:schemeClr val="tx1"/>
+        </a:solidFill>
+        <a:latin typeface="+mn-lt"/>
+        <a:ea typeface="+mn-ea"/>
+        <a:cs typeface="+mn-cs"/>
+      </a:defRPr>
+    </a:lvl5pPr>
+    <a:lvl6pPr marL="2286000" algn="l" defTabSz="914400" rtl="0" eaLnBrk="1" latinLnBrk="0" hangingPunct="1">
+      <a:defRPr sz="1800" kern="1200">
+        <a:solidFill>
+          <a:schemeClr val="tx1"/>
+        </a:solidFill>
+        <a:latin typeface="+mn-lt"/>
+        <a:ea typeface="+mn-ea"/>
+        <a:cs typeface="+mn-cs"/>
+      </a:defRPr>
+    </a:lvl6pPr>
+    <a:lvl7pPr marL="2743200" algn="l" defTabSz="914400" rtl="0" eaLnBrk="1" latinLnBrk="0" hangingPunct="1">
+      <a:defRPr sz="1800" kern="1200">
+        <a:solidFill>
+          <a:schemeClr val="tx1"/>
+        </a:solidFill>
+        <a:latin typeface="+mn-lt"/>
+        <a:ea typeface="+mn-ea"/>
+        <a:cs typeface="+mn-cs"/>
+      </a:defRPr>
+    </a:lvl7pPr>
+    <a:lvl8pPr marL="3200400" algn="l" defTabSz="914400" rtl="0" eaLnBrk="1" latinLnBrk="0" hangingPunct="1">
+      <a:defRPr sz="1800" kern="1200">
+        <a:solidFill>
+          <a:schemeClr val="tx1"/>
+        </a:solidFill>
+        <a:latin typeface="+mn-lt"/>
+        <a:ea typeface="+mn-ea"/>
+        <a:cs typeface="+mn-cs"/>
+      </a:defRPr>
+    </a:lvl8pPr>
+    <a:lvl9pPr marL="3657600" algn="l" defTabSz="914400" rtl="0" eaLnBrk="1" latinLnBrk="0" hangingPunct="1">
+      <a:defRPr sz="1800" kern="1200">
+        <a:solidFill>
+          <a:schemeClr val="tx1"/>
+        </a:solidFill>
+        <a:latin typeface="+mn-lt"/>
+        <a:ea typeface="+mn-ea"/>
+        <a:cs typeface="+mn-cs"/>
+      </a:defRPr>
+    </a:lvl9pPr>
+  </p:defaultTextStyle>
 </p:presentation>
 </file>
 
 <file path=ppt/notesMasters/notesMaster1.xml><?xml version="1.0" encoding="utf-8"?>
-<p:notesMaster xmlns:p="http://schemas.openxmlformats.org/presentationml/2006/main">
+<p:notesMaster xmlns:a="http://schemas.openxmlformats.org/drawingml/2006/main" xmlns:r="http://schemas.openxmlformats.org/officeDocument/2006/relationships" xmlns:p="http://schemas.openxmlformats.org/presentationml/2006/main">
   <p:cSld>
     <p:bg>
       <p:bgRef idx="1001">
-        <a:schemeClr xmlns:a="http://schemas.openxmlformats.org/drawingml/2006/main" val="bg1"/>
+        <a:schemeClr val="bg1"/>
       </p:bgRef>
     </p:bg>
     <p:spTree>
@@ -35,380 +130,164 @@
         <p:nvPr/>
       </p:nvGrpSpPr>
       <p:grpSpPr>
-        <a:xfrm xmlns:a="http://schemas.openxmlformats.org/drawingml/2006/main"/>
+        <a:xfrm>
+          <a:off x="0" y="0"/>
+          <a:ext cx="0" cy="0"/>
+          <a:chOff x="0" y="0"/>
+          <a:chExt cx="0" cy="0"/>
+        </a:xfrm>
       </p:grpSpPr>
       <p:sp>
         <p:nvSpPr>
           <p:cNvPr id="2" name="Header Placeholder"/>
-          <p:cNvSpPr/>
+          <p:cNvSpPr>
+            <a:spLocks noGrp="1"/>
+          </p:cNvSpPr>
           <p:nvPr>
             <p:ph type="hdr" sz="quarter"/>
           </p:nvPr>
         </p:nvSpPr>
         <p:spPr>
-          <a:prstGeom xmlns:a="http://schemas.openxmlformats.org/drawingml/2006/main" prst="rect">
-            <a:avLst/>
-          </a:prstGeom>
-        </p:spPr>
-        <p:txBody>
-          <a:bodyPr xmlns:a="http://schemas.openxmlformats.org/drawingml/2006/main"/>
-          <a:lstStyle xmlns:a="http://schemas.openxmlformats.org/drawingml/2006/main"/>
-          <a:p xmlns:a="http://schemas.openxmlformats.org/drawingml/2006/main"/>
+          <a:prstGeom prst="rect">
+            <a:avLst/>
+          </a:prstGeom>
+        </p:spPr>
+        <p:txBody>
+          <a:bodyPr/>
+          <a:lstStyle/>
+          <a:p>
+            <a:endParaRPr/>
+          </a:p>
         </p:txBody>
       </p:sp>
       <p:sp>
         <p:nvSpPr>
           <p:cNvPr id="3" name="Date Placeholder"/>
-          <p:cNvSpPr/>
+          <p:cNvSpPr>
+            <a:spLocks noGrp="1"/>
+          </p:cNvSpPr>
           <p:nvPr>
             <p:ph type="dt" sz="quarter" idx="1"/>
           </p:nvPr>
         </p:nvSpPr>
         <p:spPr>
-          <a:prstGeom xmlns:a="http://schemas.openxmlformats.org/drawingml/2006/main" prst="rect">
-            <a:avLst/>
-          </a:prstGeom>
-        </p:spPr>
-        <p:txBody>
-          <a:bodyPr xmlns:a="http://schemas.openxmlformats.org/drawingml/2006/main"/>
-          <a:lstStyle xmlns:a="http://schemas.openxmlformats.org/drawingml/2006/main"/>
-          <a:p xmlns:a="http://schemas.openxmlformats.org/drawingml/2006/main"/>
+          <a:prstGeom prst="rect">
+            <a:avLst/>
+          </a:prstGeom>
+        </p:spPr>
+        <p:txBody>
+          <a:bodyPr/>
+          <a:lstStyle/>
+          <a:p>
+            <a:endParaRPr/>
+          </a:p>
         </p:txBody>
       </p:sp>
       <p:sp>
         <p:nvSpPr>
           <p:cNvPr id="4" name="Slide Image Placeholder"/>
-          <p:cNvSpPr/>
+          <p:cNvSpPr>
+            <a:spLocks noGrp="1" noRot="1" noChangeAspect="1"/>
+          </p:cNvSpPr>
           <p:nvPr>
             <p:ph type="sldImg" idx="2"/>
           </p:nvPr>
         </p:nvSpPr>
         <p:spPr>
-          <a:prstGeom xmlns:a="http://schemas.openxmlformats.org/drawingml/2006/main" prst="rect">
-            <a:avLst/>
-          </a:prstGeom>
-        </p:spPr>
-        <p:txBody>
-          <a:bodyPr xmlns:a="http://schemas.openxmlformats.org/drawingml/2006/main"/>
-          <a:lstStyle xmlns:a="http://schemas.openxmlformats.org/drawingml/2006/main"/>
-          <a:p xmlns:a="http://schemas.openxmlformats.org/drawingml/2006/main"/>
+          <a:prstGeom prst="rect">
+            <a:avLst/>
+          </a:prstGeom>
+        </p:spPr>
+        <p:txBody>
+          <a:bodyPr/>
+          <a:lstStyle/>
+          <a:p>
+            <a:endParaRPr/>
+          </a:p>
         </p:txBody>
       </p:sp>
       <p:sp>
         <p:nvSpPr>
           <p:cNvPr id="5" name="Notes Placeholder"/>
-          <p:cNvSpPr/>
+          <p:cNvSpPr>
+            <a:spLocks noGrp="1"/>
+          </p:cNvSpPr>
           <p:nvPr>
             <p:ph type="body" sz="quarter" idx="3"/>
           </p:nvPr>
         </p:nvSpPr>
         <p:spPr>
-          <a:prstGeom xmlns:a="http://schemas.openxmlformats.org/drawingml/2006/main" prst="rect">
-            <a:avLst/>
-          </a:prstGeom>
-        </p:spPr>
-        <p:txBody>
-          <a:bodyPr xmlns:a="http://schemas.openxmlformats.org/drawingml/2006/main"/>
-          <a:lstStyle xmlns:a="http://schemas.openxmlformats.org/drawingml/2006/main"/>
-          <a:p xmlns:a="http://schemas.openxmlformats.org/drawingml/2006/main"/>
+          <a:prstGeom prst="rect">
+            <a:avLst/>
+          </a:prstGeom>
+        </p:spPr>
+        <p:txBody>
+          <a:bodyPr/>
+          <a:lstStyle/>
+          <a:p>
+            <a:endParaRPr/>
+          </a:p>
         </p:txBody>
       </p:sp>
       <p:sp>
         <p:nvSpPr>
           <p:cNvPr id="6" name="Footer Placeholder"/>
-          <p:cNvSpPr/>
+          <p:cNvSpPr>
+            <a:spLocks noGrp="1"/>
+          </p:cNvSpPr>
           <p:nvPr>
             <p:ph type="ftr" sz="quarter" idx="4"/>
           </p:nvPr>
         </p:nvSpPr>
         <p:spPr>
-          <a:prstGeom xmlns:a="http://schemas.openxmlformats.org/drawingml/2006/main" prst="rect">
-            <a:avLst/>
-          </a:prstGeom>
-        </p:spPr>
-        <p:txBody>
-          <a:bodyPr xmlns:a="http://schemas.openxmlformats.org/drawingml/2006/main"/>
-          <a:lstStyle xmlns:a="http://schemas.openxmlformats.org/drawingml/2006/main"/>
-          <a:p xmlns:a="http://schemas.openxmlformats.org/drawingml/2006/main"/>
+          <a:prstGeom prst="rect">
+            <a:avLst/>
+          </a:prstGeom>
+        </p:spPr>
+        <p:txBody>
+          <a:bodyPr/>
+          <a:lstStyle/>
+          <a:p>
+            <a:endParaRPr/>
+          </a:p>
         </p:txBody>
       </p:sp>
       <p:sp>
         <p:nvSpPr>
           <p:cNvPr id="7" name="Slide Number Placeholder"/>
-          <p:cNvSpPr/>
+          <p:cNvSpPr>
+            <a:spLocks noGrp="1"/>
+          </p:cNvSpPr>
           <p:nvPr>
             <p:ph type="sldNum" sz="quarter" idx="5"/>
           </p:nvPr>
         </p:nvSpPr>
         <p:spPr>
-          <a:prstGeom xmlns:a="http://schemas.openxmlformats.org/drawingml/2006/main" prst="rect">
-            <a:avLst/>
-          </a:prstGeom>
-        </p:spPr>
-        <p:txBody>
-          <a:bodyPr xmlns:a="http://schemas.openxmlformats.org/drawingml/2006/main"/>
-          <a:lstStyle xmlns:a="http://schemas.openxmlformats.org/drawingml/2006/main"/>
-          <a:p xmlns:a="http://schemas.openxmlformats.org/drawingml/2006/main"/>
+          <a:prstGeom prst="rect">
+            <a:avLst/>
+          </a:prstGeom>
+        </p:spPr>
+        <p:txBody>
+          <a:bodyPr/>
+          <a:lstStyle/>
+          <a:p>
+            <a:endParaRPr/>
+          </a:p>
         </p:txBody>
       </p:sp>
     </p:spTree>
   </p:cSld>
   <p:clrMap bg1="lt1" tx1="dk1" bg2="lt2" tx2="dk2" accent1="accent1" accent2="accent2" accent3="accent3" accent4="accent4" accent5="accent5" accent6="accent6" hlink="hlink" folHlink="folHlink"/>
   <p:notesStyle>
-    <a:lvl1pPr xmlns:a="http://schemas.openxmlformats.org/drawingml/2006/main" marL="0" algn="l" defTabSz="914400" rtl="0" eaLnBrk="1" latinLnBrk="0" hangingPunct="1">
+    <a:lvl1pPr marL="0" algn="l" defTabSz="914400" rtl="0" eaLnBrk="1" latinLnBrk="0" hangingPunct="1">
       <a:defRPr sz="1200" kern="1200"/>
     </a:lvl1pPr>
   </p:notesStyle>
 </p:notesMaster>
 </file>
 
-<file path=ppt/notesMasters/theme/theme3.xml><?xml version="1.0" encoding="utf-8"?>
-<a:theme xmlns:a="http://schemas.openxmlformats.org/drawingml/2006/main" name="ChatGPT">
-  <a:themeElements>
-    <a:clrScheme name="ChatGPT">
-      <a:dk1>
-        <a:srgbClr val="000000"/>
-      </a:dk1>
-      <a:lt1>
-        <a:srgbClr val="FFFFFF"/>
-      </a:lt1>
-      <a:dk2>
-        <a:srgbClr val="0E2841"/>
-      </a:dk2>
-      <a:lt2>
-        <a:srgbClr val="E8E8E8"/>
-      </a:lt2>
-      <a:accent1>
-        <a:srgbClr val="156082"/>
-      </a:accent1>
-      <a:accent2>
-        <a:srgbClr val="E97132"/>
-      </a:accent2>
-      <a:accent3>
-        <a:srgbClr val="196B24"/>
-      </a:accent3>
-      <a:accent4>
-        <a:srgbClr val="0F9ED5"/>
-      </a:accent4>
-      <a:accent5>
-        <a:srgbClr val="A02B93"/>
-      </a:accent5>
-      <a:accent6>
-        <a:srgbClr val="4EA72E"/>
-      </a:accent6>
-      <a:hlink>
-        <a:srgbClr val="467886"/>
-      </a:hlink>
-      <a:folHlink>
-        <a:srgbClr val="96607D"/>
-      </a:folHlink>
-    </a:clrScheme>
-    <a:fontScheme name="Office">
-      <a:majorFont>
-        <a:latin typeface="Calibri Light"/>
-        <a:ea typeface="Calibri Light"/>
-        <a:cs typeface="Calibri Light"/>
-      </a:majorFont>
-      <a:minorFont>
-        <a:latin typeface="Calibri"/>
-        <a:ea typeface="Calibri"/>
-        <a:cs typeface="Calibri"/>
-      </a:minorFont>
-    </a:fontScheme>
-    <a:fmtScheme name="ChatGPT">
-      <a:fillStyleLst>
-        <a:solidFill>
-          <a:schemeClr val="phClr"/>
-        </a:solidFill>
-        <a:gradFill>
-          <a:gsLst>
-            <a:gs pos="0">
-              <a:schemeClr val="phClr">
-                <a:tint val="67000"/>
-                <a:lumMod val="110000"/>
-                <a:satMod val="105000"/>
-              </a:schemeClr>
-            </a:gs>
-            <a:gs pos="50000">
-              <a:schemeClr val="phClr">
-                <a:tint val="73000"/>
-                <a:lumMod val="105000"/>
-                <a:satMod val="103000"/>
-              </a:schemeClr>
-            </a:gs>
-            <a:gs pos="100000">
-              <a:schemeClr val="phClr">
-                <a:tint val="81000"/>
-                <a:lumMod val="105000"/>
-                <a:satMod val="109000"/>
-              </a:schemeClr>
-            </a:gs>
-          </a:gsLst>
-          <a:lin ang="5400000" scaled="0"/>
-        </a:gradFill>
-        <a:gradFill>
-          <a:gsLst>
-            <a:gs pos="0">
-              <a:schemeClr val="phClr">
-                <a:tint val="94000"/>
-                <a:lumMod val="102000"/>
-                <a:satMod val="103000"/>
-              </a:schemeClr>
-            </a:gs>
-            <a:gs pos="50000">
-              <a:schemeClr val="phClr">
-                <a:shade val="100000"/>
-                <a:lumMod val="100000"/>
-                <a:satMod val="110000"/>
-              </a:schemeClr>
-            </a:gs>
-            <a:gs pos="100000">
-              <a:schemeClr val="phClr">
-                <a:shade val="78000"/>
-                <a:lumMod val="99000"/>
-                <a:satMod val="120000"/>
-              </a:schemeClr>
-            </a:gs>
-          </a:gsLst>
-          <a:lin ang="5400000" scaled="0"/>
-        </a:gradFill>
-      </a:fillStyleLst>
-      <a:lnStyleLst>
-        <a:ln w="12700">
-          <a:solidFill>
-            <a:schemeClr val="phClr"/>
-          </a:solidFill>
-          <a:prstDash val="solid"/>
-        </a:ln>
-        <a:ln w="19050">
-          <a:solidFill>
-            <a:schemeClr val="phClr"/>
-          </a:solidFill>
-          <a:prstDash val="solid"/>
-        </a:ln>
-        <a:ln w="25400">
-          <a:solidFill>
-            <a:schemeClr val="phClr"/>
-          </a:solidFill>
-          <a:prstDash val="solid"/>
-        </a:ln>
-      </a:lnStyleLst>
-      <a:effectStyleLst>
-        <a:effectStyle>
-          <a:effectLst/>
-        </a:effectStyle>
-        <a:effectStyle>
-          <a:effectLst/>
-        </a:effectStyle>
-        <a:effectStyle>
-          <a:effectLst>
-            <a:outerShdw blurRad="57150" dist="19050" dir="5400000">
-              <a:srgbClr val="000000">
-                <a:alpha val="16000"/>
-              </a:srgbClr>
-            </a:outerShdw>
-          </a:effectLst>
-        </a:effectStyle>
-        <a:effectStyle>
-          <a:effectLst>
-            <a:outerShdw blurRad="19050" dist="9525" dir="5400000">
-              <a:srgbClr val="000000">
-                <a:alpha val="6000"/>
-              </a:srgbClr>
-            </a:outerShdw>
-          </a:effectLst>
-        </a:effectStyle>
-        <a:effectStyle>
-          <a:effectLst>
-            <a:outerShdw blurRad="28575" dist="9525" dir="5400000">
-              <a:srgbClr val="000000">
-                <a:alpha val="8000"/>
-              </a:srgbClr>
-            </a:outerShdw>
-          </a:effectLst>
-        </a:effectStyle>
-        <a:effectStyle>
-          <a:effectLst>
-            <a:outerShdw blurRad="57150" dist="19050" dir="5400000">
-              <a:srgbClr val="000000">
-                <a:alpha val="10000"/>
-              </a:srgbClr>
-            </a:outerShdw>
-          </a:effectLst>
-        </a:effectStyle>
-        <a:effectStyle>
-          <a:effectLst>
-            <a:outerShdw blurRad="114300" dist="38100" dir="5400000">
-              <a:srgbClr val="000000">
-                <a:alpha val="12000"/>
-              </a:srgbClr>
-            </a:outerShdw>
-          </a:effectLst>
-        </a:effectStyle>
-        <a:effectStyle>
-          <a:effectLst>
-            <a:outerShdw blurRad="171450" dist="57150" dir="5400000">
-              <a:srgbClr val="000000">
-                <a:alpha val="16000"/>
-              </a:srgbClr>
-            </a:outerShdw>
-          </a:effectLst>
-        </a:effectStyle>
-        <a:effectStyle>
-          <a:effectLst>
-            <a:outerShdw blurRad="266700" dist="95250" dir="5400000">
-              <a:srgbClr val="000000">
-                <a:alpha val="24000"/>
-              </a:srgbClr>
-            </a:outerShdw>
-          </a:effectLst>
-        </a:effectStyle>
-      </a:effectStyleLst>
-      <a:bgFillStyleLst>
-        <a:solidFill>
-          <a:schemeClr val="phClr"/>
-        </a:solidFill>
-        <a:solidFill>
-          <a:schemeClr val="phClr">
-            <a:tint val="95000"/>
-            <a:satMod val="170000"/>
-          </a:schemeClr>
-        </a:solidFill>
-        <a:gradFill>
-          <a:gsLst>
-            <a:gs pos="0">
-              <a:schemeClr val="phClr">
-                <a:tint val="93000"/>
-                <a:shade val="98000"/>
-                <a:lumMod val="102000"/>
-                <a:satMod val="150000"/>
-              </a:schemeClr>
-            </a:gs>
-            <a:gs pos="50000">
-              <a:schemeClr val="phClr">
-                <a:tint val="98000"/>
-                <a:shade val="90000"/>
-                <a:lumMod val="103000"/>
-                <a:satMod val="130000"/>
-              </a:schemeClr>
-            </a:gs>
-            <a:gs pos="100000">
-              <a:schemeClr val="phClr">
-                <a:shade val="63000"/>
-                <a:satMod val="120000"/>
-              </a:schemeClr>
-            </a:gs>
-          </a:gsLst>
-          <a:lin ang="5400000" scaled="0"/>
-        </a:gradFill>
-      </a:bgFillStyleLst>
-    </a:fmtScheme>
-  </a:themeElements>
-</a:theme>
-</file>
-
 <file path=ppt/notesSlides/notesSlide1.xml><?xml version="1.0" encoding="utf-8"?>
-<p:notes xmlns:p="http://schemas.openxmlformats.org/presentationml/2006/main">
+<p:notes xmlns:a="http://schemas.openxmlformats.org/drawingml/2006/main" xmlns:r="http://schemas.openxmlformats.org/officeDocument/2006/relationships" xmlns:p="http://schemas.openxmlformats.org/presentationml/2006/main">
   <p:cSld>
     <p:spTree>
       <p:nvGrpSpPr>
@@ -417,16 +296,21 @@
         <p:nvPr/>
       </p:nvGrpSpPr>
       <p:grpSpPr>
-        <a:xfrm xmlns:a="http://schemas.openxmlformats.org/drawingml/2006/main"/>
+        <a:xfrm>
+          <a:off x="0" y="0"/>
+          <a:ext cx="0" cy="0"/>
+          <a:chOff x="0" y="0"/>
+          <a:chExt cx="0" cy="0"/>
+        </a:xfrm>
       </p:grpSpPr>
       <p:sp>
         <p:nvSpPr>
           <p:cNvPr id="2" name="Slide Image Placeholder 1"/>
           <p:cNvSpPr>
-            <a:spLocks xmlns:a="http://schemas.openxmlformats.org/drawingml/2006/main" noGrp="1"/>
+            <a:spLocks noGrp="1" noRot="1" noChangeAspect="1"/>
           </p:cNvSpPr>
           <p:nvPr>
-            <p:ph type="sldImg" idx="0"/>
+            <p:ph type="sldImg"/>
           </p:nvPr>
         </p:nvSpPr>
         <p:spPr/>
@@ -435,7 +319,7 @@
         <p:nvSpPr>
           <p:cNvPr id="3" name="Notes Placeholder 2"/>
           <p:cNvSpPr>
-            <a:spLocks xmlns:a="http://schemas.openxmlformats.org/drawingml/2006/main" noGrp="1"/>
+            <a:spLocks noGrp="1"/>
           </p:cNvSpPr>
           <p:nvPr>
             <p:ph type="body" idx="1"/>
@@ -443,16 +327,18 @@
         </p:nvSpPr>
         <p:spPr/>
         <p:txBody>
-          <a:bodyPr xmlns:a="http://schemas.openxmlformats.org/drawingml/2006/main"/>
-          <a:lstStyle xmlns:a="http://schemas.openxmlformats.org/drawingml/2006/main"/>
-          <a:p xmlns:a="http://schemas.openxmlformats.org/drawingml/2006/main"/>
+          <a:bodyPr/>
+          <a:lstStyle/>
+          <a:p>
+            <a:endParaRPr/>
+          </a:p>
         </p:txBody>
       </p:sp>
       <p:sp>
         <p:nvSpPr>
           <p:cNvPr id="4" name="Slide Number Placeholder 3"/>
           <p:cNvSpPr>
-            <a:spLocks xmlns:a="http://schemas.openxmlformats.org/drawingml/2006/main" noGrp="1"/>
+            <a:spLocks noGrp="1"/>
           </p:cNvSpPr>
           <p:nvPr>
             <p:ph type="sldNum" idx="5"/>
@@ -460,21 +346,23 @@
         </p:nvSpPr>
         <p:spPr/>
         <p:txBody>
-          <a:bodyPr xmlns:a="http://schemas.openxmlformats.org/drawingml/2006/main"/>
-          <a:lstStyle xmlns:a="http://schemas.openxmlformats.org/drawingml/2006/main"/>
-          <a:p xmlns:a="http://schemas.openxmlformats.org/drawingml/2006/main"/>
+          <a:bodyPr/>
+          <a:lstStyle/>
+          <a:p>
+            <a:endParaRPr/>
+          </a:p>
         </p:txBody>
       </p:sp>
     </p:spTree>
   </p:cSld>
   <p:clrMapOvr>
-    <a:masterClrMapping xmlns:a="http://schemas.openxmlformats.org/drawingml/2006/main"/>
+    <a:masterClrMapping/>
   </p:clrMapOvr>
 </p:notes>
 </file>
 
 <file path=ppt/notesSlides/notesSlide2.xml><?xml version="1.0" encoding="utf-8"?>
-<p:notes xmlns:p="http://schemas.openxmlformats.org/presentationml/2006/main">
+<p:notes xmlns:a="http://schemas.openxmlformats.org/drawingml/2006/main" xmlns:r="http://schemas.openxmlformats.org/officeDocument/2006/relationships" xmlns:p="http://schemas.openxmlformats.org/presentationml/2006/main">
   <p:cSld>
     <p:spTree>
       <p:nvGrpSpPr>
@@ -483,16 +371,21 @@
         <p:nvPr/>
       </p:nvGrpSpPr>
       <p:grpSpPr>
-        <a:xfrm xmlns:a="http://schemas.openxmlformats.org/drawingml/2006/main"/>
+        <a:xfrm>
+          <a:off x="0" y="0"/>
+          <a:ext cx="0" cy="0"/>
+          <a:chOff x="0" y="0"/>
+          <a:chExt cx="0" cy="0"/>
+        </a:xfrm>
       </p:grpSpPr>
       <p:sp>
         <p:nvSpPr>
           <p:cNvPr id="2" name="Slide Image Placeholder 1"/>
           <p:cNvSpPr>
-            <a:spLocks xmlns:a="http://schemas.openxmlformats.org/drawingml/2006/main" noGrp="1"/>
+            <a:spLocks noGrp="1" noRot="1" noChangeAspect="1"/>
           </p:cNvSpPr>
           <p:nvPr>
-            <p:ph type="sldImg" idx="0"/>
+            <p:ph type="sldImg"/>
           </p:nvPr>
         </p:nvSpPr>
         <p:spPr/>
@@ -501,7 +394,7 @@
         <p:nvSpPr>
           <p:cNvPr id="3" name="Notes Placeholder 2"/>
           <p:cNvSpPr>
-            <a:spLocks xmlns:a="http://schemas.openxmlformats.org/drawingml/2006/main" noGrp="1"/>
+            <a:spLocks noGrp="1"/>
           </p:cNvSpPr>
           <p:nvPr>
             <p:ph type="body" idx="1"/>
@@ -509,16 +402,18 @@
         </p:nvSpPr>
         <p:spPr/>
         <p:txBody>
-          <a:bodyPr xmlns:a="http://schemas.openxmlformats.org/drawingml/2006/main"/>
-          <a:lstStyle xmlns:a="http://schemas.openxmlformats.org/drawingml/2006/main"/>
-          <a:p xmlns:a="http://schemas.openxmlformats.org/drawingml/2006/main"/>
+          <a:bodyPr/>
+          <a:lstStyle/>
+          <a:p>
+            <a:endParaRPr/>
+          </a:p>
         </p:txBody>
       </p:sp>
       <p:sp>
         <p:nvSpPr>
           <p:cNvPr id="4" name="Slide Number Placeholder 3"/>
           <p:cNvSpPr>
-            <a:spLocks xmlns:a="http://schemas.openxmlformats.org/drawingml/2006/main" noGrp="1"/>
+            <a:spLocks noGrp="1"/>
           </p:cNvSpPr>
           <p:nvPr>
             <p:ph type="sldNum" idx="5"/>
@@ -526,21 +421,23 @@
         </p:nvSpPr>
         <p:spPr/>
         <p:txBody>
-          <a:bodyPr xmlns:a="http://schemas.openxmlformats.org/drawingml/2006/main"/>
-          <a:lstStyle xmlns:a="http://schemas.openxmlformats.org/drawingml/2006/main"/>
-          <a:p xmlns:a="http://schemas.openxmlformats.org/drawingml/2006/main"/>
+          <a:bodyPr/>
+          <a:lstStyle/>
+          <a:p>
+            <a:endParaRPr/>
+          </a:p>
         </p:txBody>
       </p:sp>
     </p:spTree>
   </p:cSld>
   <p:clrMapOvr>
-    <a:masterClrMapping xmlns:a="http://schemas.openxmlformats.org/drawingml/2006/main"/>
+    <a:masterClrMapping/>
   </p:clrMapOvr>
 </p:notes>
 </file>
 
 <file path=ppt/notesSlides/notesSlide3.xml><?xml version="1.0" encoding="utf-8"?>
-<p:notes xmlns:p="http://schemas.openxmlformats.org/presentationml/2006/main">
+<p:notes xmlns:a="http://schemas.openxmlformats.org/drawingml/2006/main" xmlns:r="http://schemas.openxmlformats.org/officeDocument/2006/relationships" xmlns:p="http://schemas.openxmlformats.org/presentationml/2006/main">
   <p:cSld>
     <p:spTree>
       <p:nvGrpSpPr>
@@ -549,16 +446,21 @@
         <p:nvPr/>
       </p:nvGrpSpPr>
       <p:grpSpPr>
-        <a:xfrm xmlns:a="http://schemas.openxmlformats.org/drawingml/2006/main"/>
+        <a:xfrm>
+          <a:off x="0" y="0"/>
+          <a:ext cx="0" cy="0"/>
+          <a:chOff x="0" y="0"/>
+          <a:chExt cx="0" cy="0"/>
+        </a:xfrm>
       </p:grpSpPr>
       <p:sp>
         <p:nvSpPr>
           <p:cNvPr id="2" name="Slide Image Placeholder 1"/>
           <p:cNvSpPr>
-            <a:spLocks xmlns:a="http://schemas.openxmlformats.org/drawingml/2006/main" noGrp="1"/>
+            <a:spLocks noGrp="1" noRot="1" noChangeAspect="1"/>
           </p:cNvSpPr>
           <p:nvPr>
-            <p:ph type="sldImg" idx="0"/>
+            <p:ph type="sldImg"/>
           </p:nvPr>
         </p:nvSpPr>
         <p:spPr/>
@@ -567,7 +469,7 @@
         <p:nvSpPr>
           <p:cNvPr id="3" name="Notes Placeholder 2"/>
           <p:cNvSpPr>
-            <a:spLocks xmlns:a="http://schemas.openxmlformats.org/drawingml/2006/main" noGrp="1"/>
+            <a:spLocks noGrp="1"/>
           </p:cNvSpPr>
           <p:nvPr>
             <p:ph type="body" idx="1"/>
@@ -575,16 +477,18 @@
         </p:nvSpPr>
         <p:spPr/>
         <p:txBody>
-          <a:bodyPr xmlns:a="http://schemas.openxmlformats.org/drawingml/2006/main"/>
-          <a:lstStyle xmlns:a="http://schemas.openxmlformats.org/drawingml/2006/main"/>
-          <a:p xmlns:a="http://schemas.openxmlformats.org/drawingml/2006/main"/>
+          <a:bodyPr/>
+          <a:lstStyle/>
+          <a:p>
+            <a:endParaRPr/>
+          </a:p>
         </p:txBody>
       </p:sp>
       <p:sp>
         <p:nvSpPr>
           <p:cNvPr id="4" name="Slide Number Placeholder 3"/>
           <p:cNvSpPr>
-            <a:spLocks xmlns:a="http://schemas.openxmlformats.org/drawingml/2006/main" noGrp="1"/>
+            <a:spLocks noGrp="1"/>
           </p:cNvSpPr>
           <p:nvPr>
             <p:ph type="sldNum" idx="5"/>
@@ -592,21 +496,23 @@
         </p:nvSpPr>
         <p:spPr/>
         <p:txBody>
-          <a:bodyPr xmlns:a="http://schemas.openxmlformats.org/drawingml/2006/main"/>
-          <a:lstStyle xmlns:a="http://schemas.openxmlformats.org/drawingml/2006/main"/>
-          <a:p xmlns:a="http://schemas.openxmlformats.org/drawingml/2006/main"/>
+          <a:bodyPr/>
+          <a:lstStyle/>
+          <a:p>
+            <a:endParaRPr/>
+          </a:p>
         </p:txBody>
       </p:sp>
     </p:spTree>
   </p:cSld>
   <p:clrMapOvr>
-    <a:masterClrMapping xmlns:a="http://schemas.openxmlformats.org/drawingml/2006/main"/>
+    <a:masterClrMapping/>
   </p:clrMapOvr>
 </p:notes>
 </file>
 
 <file path=ppt/notesSlides/notesSlide4.xml><?xml version="1.0" encoding="utf-8"?>
-<p:notes xmlns:p="http://schemas.openxmlformats.org/presentationml/2006/main">
+<p:notes xmlns:a="http://schemas.openxmlformats.org/drawingml/2006/main" xmlns:r="http://schemas.openxmlformats.org/officeDocument/2006/relationships" xmlns:p="http://schemas.openxmlformats.org/presentationml/2006/main">
   <p:cSld>
     <p:spTree>
       <p:nvGrpSpPr>
@@ -615,16 +521,21 @@
         <p:nvPr/>
       </p:nvGrpSpPr>
       <p:grpSpPr>
-        <a:xfrm xmlns:a="http://schemas.openxmlformats.org/drawingml/2006/main"/>
+        <a:xfrm>
+          <a:off x="0" y="0"/>
+          <a:ext cx="0" cy="0"/>
+          <a:chOff x="0" y="0"/>
+          <a:chExt cx="0" cy="0"/>
+        </a:xfrm>
       </p:grpSpPr>
       <p:sp>
         <p:nvSpPr>
           <p:cNvPr id="2" name="Slide Image Placeholder 1"/>
           <p:cNvSpPr>
-            <a:spLocks xmlns:a="http://schemas.openxmlformats.org/drawingml/2006/main" noGrp="1"/>
+            <a:spLocks noGrp="1" noRot="1" noChangeAspect="1"/>
           </p:cNvSpPr>
           <p:nvPr>
-            <p:ph type="sldImg" idx="0"/>
+            <p:ph type="sldImg"/>
           </p:nvPr>
         </p:nvSpPr>
         <p:spPr/>
@@ -633,7 +544,7 @@
         <p:nvSpPr>
           <p:cNvPr id="3" name="Notes Placeholder 2"/>
           <p:cNvSpPr>
-            <a:spLocks xmlns:a="http://schemas.openxmlformats.org/drawingml/2006/main" noGrp="1"/>
+            <a:spLocks noGrp="1"/>
           </p:cNvSpPr>
           <p:nvPr>
             <p:ph type="body" idx="1"/>
@@ -641,16 +552,18 @@
         </p:nvSpPr>
         <p:spPr/>
         <p:txBody>
-          <a:bodyPr xmlns:a="http://schemas.openxmlformats.org/drawingml/2006/main"/>
-          <a:lstStyle xmlns:a="http://schemas.openxmlformats.org/drawingml/2006/main"/>
-          <a:p xmlns:a="http://schemas.openxmlformats.org/drawingml/2006/main"/>
+          <a:bodyPr/>
+          <a:lstStyle/>
+          <a:p>
+            <a:endParaRPr/>
+          </a:p>
         </p:txBody>
       </p:sp>
       <p:sp>
         <p:nvSpPr>
           <p:cNvPr id="4" name="Slide Number Placeholder 3"/>
           <p:cNvSpPr>
-            <a:spLocks xmlns:a="http://schemas.openxmlformats.org/drawingml/2006/main" noGrp="1"/>
+            <a:spLocks noGrp="1"/>
           </p:cNvSpPr>
           <p:nvPr>
             <p:ph type="sldNum" idx="5"/>
@@ -658,21 +571,23 @@
         </p:nvSpPr>
         <p:spPr/>
         <p:txBody>
-          <a:bodyPr xmlns:a="http://schemas.openxmlformats.org/drawingml/2006/main"/>
-          <a:lstStyle xmlns:a="http://schemas.openxmlformats.org/drawingml/2006/main"/>
-          <a:p xmlns:a="http://schemas.openxmlformats.org/drawingml/2006/main"/>
+          <a:bodyPr/>
+          <a:lstStyle/>
+          <a:p>
+            <a:endParaRPr/>
+          </a:p>
         </p:txBody>
       </p:sp>
     </p:spTree>
   </p:cSld>
   <p:clrMapOvr>
-    <a:masterClrMapping xmlns:a="http://schemas.openxmlformats.org/drawingml/2006/main"/>
+    <a:masterClrMapping/>
   </p:clrMapOvr>
 </p:notes>
 </file>
 
 <file path=ppt/notesSlides/notesSlide5.xml><?xml version="1.0" encoding="utf-8"?>
-<p:notes xmlns:p="http://schemas.openxmlformats.org/presentationml/2006/main">
+<p:notes xmlns:a="http://schemas.openxmlformats.org/drawingml/2006/main" xmlns:r="http://schemas.openxmlformats.org/officeDocument/2006/relationships" xmlns:p="http://schemas.openxmlformats.org/presentationml/2006/main">
   <p:cSld>
     <p:spTree>
       <p:nvGrpSpPr>
@@ -681,16 +596,21 @@
         <p:nvPr/>
       </p:nvGrpSpPr>
       <p:grpSpPr>
-        <a:xfrm xmlns:a="http://schemas.openxmlformats.org/drawingml/2006/main"/>
+        <a:xfrm>
+          <a:off x="0" y="0"/>
+          <a:ext cx="0" cy="0"/>
+          <a:chOff x="0" y="0"/>
+          <a:chExt cx="0" cy="0"/>
+        </a:xfrm>
       </p:grpSpPr>
       <p:sp>
         <p:nvSpPr>
           <p:cNvPr id="2" name="Slide Image Placeholder 1"/>
           <p:cNvSpPr>
-            <a:spLocks xmlns:a="http://schemas.openxmlformats.org/drawingml/2006/main" noGrp="1"/>
+            <a:spLocks noGrp="1" noRot="1" noChangeAspect="1"/>
           </p:cNvSpPr>
           <p:nvPr>
-            <p:ph type="sldImg" idx="0"/>
+            <p:ph type="sldImg"/>
           </p:nvPr>
         </p:nvSpPr>
         <p:spPr/>
@@ -699,7 +619,7 @@
         <p:nvSpPr>
           <p:cNvPr id="3" name="Notes Placeholder 2"/>
           <p:cNvSpPr>
-            <a:spLocks xmlns:a="http://schemas.openxmlformats.org/drawingml/2006/main" noGrp="1"/>
+            <a:spLocks noGrp="1"/>
           </p:cNvSpPr>
           <p:nvPr>
             <p:ph type="body" idx="1"/>
@@ -707,16 +627,18 @@
         </p:nvSpPr>
         <p:spPr/>
         <p:txBody>
-          <a:bodyPr xmlns:a="http://schemas.openxmlformats.org/drawingml/2006/main"/>
-          <a:lstStyle xmlns:a="http://schemas.openxmlformats.org/drawingml/2006/main"/>
-          <a:p xmlns:a="http://schemas.openxmlformats.org/drawingml/2006/main"/>
+          <a:bodyPr/>
+          <a:lstStyle/>
+          <a:p>
+            <a:endParaRPr/>
+          </a:p>
         </p:txBody>
       </p:sp>
       <p:sp>
         <p:nvSpPr>
           <p:cNvPr id="4" name="Slide Number Placeholder 3"/>
           <p:cNvSpPr>
-            <a:spLocks xmlns:a="http://schemas.openxmlformats.org/drawingml/2006/main" noGrp="1"/>
+            <a:spLocks noGrp="1"/>
           </p:cNvSpPr>
           <p:nvPr>
             <p:ph type="sldNum" idx="5"/>
@@ -724,21 +646,23 @@
         </p:nvSpPr>
         <p:spPr/>
         <p:txBody>
-          <a:bodyPr xmlns:a="http://schemas.openxmlformats.org/drawingml/2006/main"/>
-          <a:lstStyle xmlns:a="http://schemas.openxmlformats.org/drawingml/2006/main"/>
-          <a:p xmlns:a="http://schemas.openxmlformats.org/drawingml/2006/main"/>
+          <a:bodyPr/>
+          <a:lstStyle/>
+          <a:p>
+            <a:endParaRPr/>
+          </a:p>
         </p:txBody>
       </p:sp>
     </p:spTree>
   </p:cSld>
   <p:clrMapOvr>
-    <a:masterClrMapping xmlns:a="http://schemas.openxmlformats.org/drawingml/2006/main"/>
+    <a:masterClrMapping/>
   </p:clrMapOvr>
 </p:notes>
 </file>
 
 <file path=ppt/notesSlides/notesSlide6.xml><?xml version="1.0" encoding="utf-8"?>
-<p:notes xmlns:p="http://schemas.openxmlformats.org/presentationml/2006/main">
+<p:notes xmlns:a="http://schemas.openxmlformats.org/drawingml/2006/main" xmlns:r="http://schemas.openxmlformats.org/officeDocument/2006/relationships" xmlns:p="http://schemas.openxmlformats.org/presentationml/2006/main">
   <p:cSld>
     <p:spTree>
       <p:nvGrpSpPr>
@@ -747,16 +671,21 @@
         <p:nvPr/>
       </p:nvGrpSpPr>
       <p:grpSpPr>
-        <a:xfrm xmlns:a="http://schemas.openxmlformats.org/drawingml/2006/main"/>
+        <a:xfrm>
+          <a:off x="0" y="0"/>
+          <a:ext cx="0" cy="0"/>
+          <a:chOff x="0" y="0"/>
+          <a:chExt cx="0" cy="0"/>
+        </a:xfrm>
       </p:grpSpPr>
       <p:sp>
         <p:nvSpPr>
           <p:cNvPr id="2" name="Slide Image Placeholder 1"/>
           <p:cNvSpPr>
-            <a:spLocks xmlns:a="http://schemas.openxmlformats.org/drawingml/2006/main" noGrp="1"/>
+            <a:spLocks noGrp="1" noRot="1" noChangeAspect="1"/>
           </p:cNvSpPr>
           <p:nvPr>
-            <p:ph type="sldImg" idx="0"/>
+            <p:ph type="sldImg"/>
           </p:nvPr>
         </p:nvSpPr>
         <p:spPr/>
@@ -765,7 +694,7 @@
         <p:nvSpPr>
           <p:cNvPr id="3" name="Notes Placeholder 2"/>
           <p:cNvSpPr>
-            <a:spLocks xmlns:a="http://schemas.openxmlformats.org/drawingml/2006/main" noGrp="1"/>
+            <a:spLocks noGrp="1"/>
           </p:cNvSpPr>
           <p:nvPr>
             <p:ph type="body" idx="1"/>
@@ -773,16 +702,18 @@
         </p:nvSpPr>
         <p:spPr/>
         <p:txBody>
-          <a:bodyPr xmlns:a="http://schemas.openxmlformats.org/drawingml/2006/main"/>
-          <a:lstStyle xmlns:a="http://schemas.openxmlformats.org/drawingml/2006/main"/>
-          <a:p xmlns:a="http://schemas.openxmlformats.org/drawingml/2006/main"/>
+          <a:bodyPr/>
+          <a:lstStyle/>
+          <a:p>
+            <a:endParaRPr/>
+          </a:p>
         </p:txBody>
       </p:sp>
       <p:sp>
         <p:nvSpPr>
           <p:cNvPr id="4" name="Slide Number Placeholder 3"/>
           <p:cNvSpPr>
-            <a:spLocks xmlns:a="http://schemas.openxmlformats.org/drawingml/2006/main" noGrp="1"/>
+            <a:spLocks noGrp="1"/>
           </p:cNvSpPr>
           <p:nvPr>
             <p:ph type="sldNum" idx="5"/>
@@ -790,21 +721,23 @@
         </p:nvSpPr>
         <p:spPr/>
         <p:txBody>
-          <a:bodyPr xmlns:a="http://schemas.openxmlformats.org/drawingml/2006/main"/>
-          <a:lstStyle xmlns:a="http://schemas.openxmlformats.org/drawingml/2006/main"/>
-          <a:p xmlns:a="http://schemas.openxmlformats.org/drawingml/2006/main"/>
+          <a:bodyPr/>
+          <a:lstStyle/>
+          <a:p>
+            <a:endParaRPr/>
+          </a:p>
         </p:txBody>
       </p:sp>
     </p:spTree>
   </p:cSld>
   <p:clrMapOvr>
-    <a:masterClrMapping xmlns:a="http://schemas.openxmlformats.org/drawingml/2006/main"/>
+    <a:masterClrMapping/>
   </p:clrMapOvr>
 </p:notes>
 </file>
 
 <file path=ppt/slideLayouts/slideLayout1.xml><?xml version="1.0" encoding="utf-8"?>
-<p:sldLayout xmlns:p="http://schemas.openxmlformats.org/presentationml/2006/main" type="title">
+<p:sldLayout xmlns:a="http://schemas.openxmlformats.org/drawingml/2006/main" xmlns:r="http://schemas.openxmlformats.org/officeDocument/2006/relationships" xmlns:p="http://schemas.openxmlformats.org/presentationml/2006/main" type="title">
   <p:cSld name="Title Slide">
     <p:spTree>
       <p:nvGrpSpPr>
@@ -813,19 +746,27 @@
         <p:nvPr/>
       </p:nvGrpSpPr>
       <p:grpSpPr>
-        <a:xfrm xmlns:a="http://schemas.openxmlformats.org/drawingml/2006/main"/>
+        <a:xfrm>
+          <a:off x="0" y="0"/>
+          <a:ext cx="0" cy="0"/>
+          <a:chOff x="0" y="0"/>
+          <a:chExt cx="0" cy="0"/>
+        </a:xfrm>
       </p:grpSpPr>
     </p:spTree>
   </p:cSld>
+  <p:clrMapOvr>
+    <a:masterClrMapping/>
+  </p:clrMapOvr>
 </p:sldLayout>
 </file>
 
 <file path=ppt/slideMasters/slideMaster1.xml><?xml version="1.0" encoding="utf-8"?>
-<p:sldMaster xmlns:p="http://schemas.openxmlformats.org/presentationml/2006/main">
+<p:sldMaster xmlns:a="http://schemas.openxmlformats.org/drawingml/2006/main" xmlns:r="http://schemas.openxmlformats.org/officeDocument/2006/relationships" xmlns:p="http://schemas.openxmlformats.org/presentationml/2006/main">
   <p:cSld name="Master">
     <p:bg>
       <p:bgRef idx="1001">
-        <a:schemeClr xmlns:a="http://schemas.openxmlformats.org/drawingml/2006/main" val="bg1"/>
+        <a:schemeClr val="bg1"/>
       </p:bgRef>
     </p:bg>
     <p:spTree>
@@ -835,17 +776,22 @@
         <p:nvPr/>
       </p:nvGrpSpPr>
       <p:grpSpPr>
-        <a:xfrm xmlns:a="http://schemas.openxmlformats.org/drawingml/2006/main"/>
+        <a:xfrm>
+          <a:off x="0" y="0"/>
+          <a:ext cx="0" cy="0"/>
+          <a:chOff x="0" y="0"/>
+          <a:chExt cx="0" cy="0"/>
+        </a:xfrm>
       </p:grpSpPr>
     </p:spTree>
   </p:cSld>
   <p:clrMap bg1="lt1" tx1="dk1" bg2="lt2" tx2="dk2" accent1="accent1" accent2="accent2" accent3="accent3" accent4="accent4" accent5="accent5" accent6="accent6" hlink="hlink" folHlink="folHlink"/>
   <p:sldLayoutIdLst>
-    <p:sldLayoutId xmlns:r="http://schemas.openxmlformats.org/officeDocument/2006/relationships" id="2147483649" r:id="R0c2a016b49dc4be0"/>
+    <p:sldLayoutId id="2147483649" r:id="rId1"/>
   </p:sldLayoutIdLst>
   <p:txStyles>
     <p:titleStyle>
-      <a:lvl1pPr xmlns:a="http://schemas.openxmlformats.org/drawingml/2006/main" algn="l">
+      <a:lvl1pPr algn="l">
         <a:lnSpc>
           <a:spcPct val="90000"/>
         </a:lnSpc>
@@ -864,7 +810,7 @@
       </a:lvl1pPr>
     </p:titleStyle>
     <p:bodyStyle>
-      <a:lvl1pPr xmlns:a="http://schemas.openxmlformats.org/drawingml/2006/main" marL="228600" indent="-228600" algn="l">
+      <a:lvl1pPr marL="228600" indent="-228600" algn="l">
         <a:lnSpc>
           <a:spcPct val="90000"/>
         </a:lnSpc>
@@ -881,7 +827,7 @@
           <a:cs typeface="+mn-lt"/>
         </a:defRPr>
       </a:lvl1pPr>
-      <a:lvl2pPr xmlns:a="http://schemas.openxmlformats.org/drawingml/2006/main" marL="685800" indent="-228600" algn="l">
+      <a:lvl2pPr marL="685800" indent="-228600" algn="l">
         <a:lnSpc>
           <a:spcPct val="90000"/>
         </a:lnSpc>
@@ -898,7 +844,7 @@
           <a:cs typeface="+mn-lt"/>
         </a:defRPr>
       </a:lvl2pPr>
-      <a:lvl3pPr xmlns:a="http://schemas.openxmlformats.org/drawingml/2006/main" marL="1143000" indent="-228600" algn="l">
+      <a:lvl3pPr marL="1143000" indent="-228600" algn="l">
         <a:lnSpc>
           <a:spcPct val="90000"/>
         </a:lnSpc>
@@ -915,7 +861,7 @@
           <a:cs typeface="+mn-lt"/>
         </a:defRPr>
       </a:lvl3pPr>
-      <a:lvl4pPr xmlns:a="http://schemas.openxmlformats.org/drawingml/2006/main" marL="1600200" indent="-228600" algn="l">
+      <a:lvl4pPr marL="1600200" indent="-228600" algn="l">
         <a:lnSpc>
           <a:spcPct val="90000"/>
         </a:lnSpc>
@@ -932,7 +878,7 @@
           <a:cs typeface="+mn-lt"/>
         </a:defRPr>
       </a:lvl4pPr>
-      <a:lvl5pPr xmlns:a="http://schemas.openxmlformats.org/drawingml/2006/main" marL="2057400" indent="-228600" algn="l">
+      <a:lvl5pPr marL="2057400" indent="-228600" algn="l">
         <a:lnSpc>
           <a:spcPct val="90000"/>
         </a:lnSpc>
@@ -949,7 +895,7 @@
           <a:cs typeface="+mn-lt"/>
         </a:defRPr>
       </a:lvl5pPr>
-      <a:lvl6pPr xmlns:a="http://schemas.openxmlformats.org/drawingml/2006/main" marL="2514600" indent="-228600" algn="l">
+      <a:lvl6pPr marL="2514600" indent="-228600" algn="l">
         <a:lnSpc>
           <a:spcPct val="90000"/>
         </a:lnSpc>
@@ -966,7 +912,7 @@
           <a:cs typeface="+mn-lt"/>
         </a:defRPr>
       </a:lvl6pPr>
-      <a:lvl7pPr xmlns:a="http://schemas.openxmlformats.org/drawingml/2006/main" marL="2971800" indent="-228600" algn="l">
+      <a:lvl7pPr marL="2971800" indent="-228600" algn="l">
         <a:lnSpc>
           <a:spcPct val="90000"/>
         </a:lnSpc>
@@ -983,7 +929,7 @@
           <a:cs typeface="+mn-lt"/>
         </a:defRPr>
       </a:lvl7pPr>
-      <a:lvl8pPr xmlns:a="http://schemas.openxmlformats.org/drawingml/2006/main" marL="3429000" indent="-228600" algn="l">
+      <a:lvl8pPr marL="3429000" indent="-228600" algn="l">
         <a:lnSpc>
           <a:spcPct val="90000"/>
         </a:lnSpc>
@@ -1000,7 +946,7 @@
           <a:cs typeface="+mn-lt"/>
         </a:defRPr>
       </a:lvl8pPr>
-      <a:lvl9pPr xmlns:a="http://schemas.openxmlformats.org/drawingml/2006/main" marL="3886200" indent="-228600" algn="l">
+      <a:lvl9pPr marL="3886200" indent="-228600" algn="l">
         <a:lnSpc>
           <a:spcPct val="90000"/>
         </a:lnSpc>
@@ -1019,7 +965,7 @@
       </a:lvl9pPr>
     </p:bodyStyle>
     <p:otherStyle>
-      <a:lvl1pPr xmlns:a="http://schemas.openxmlformats.org/drawingml/2006/main" marL="0" algn="l">
+      <a:lvl1pPr marL="0" algn="l">
         <a:buNone/>
         <a:defRPr sz="1800">
           <a:solidFill>
@@ -1030,7 +976,7 @@
           <a:cs typeface="+mn-lt"/>
         </a:defRPr>
       </a:lvl1pPr>
-      <a:lvl2pPr xmlns:a="http://schemas.openxmlformats.org/drawingml/2006/main" marL="457200" algn="l">
+      <a:lvl2pPr marL="457200" algn="l">
         <a:buNone/>
         <a:defRPr sz="1800">
           <a:solidFill>
@@ -1041,7 +987,7 @@
           <a:cs typeface="+mn-lt"/>
         </a:defRPr>
       </a:lvl2pPr>
-      <a:lvl3pPr xmlns:a="http://schemas.openxmlformats.org/drawingml/2006/main" marL="914400" algn="l">
+      <a:lvl3pPr marL="914400" algn="l">
         <a:buNone/>
         <a:defRPr sz="1800">
           <a:solidFill>
@@ -1052,7 +998,7 @@
           <a:cs typeface="+mn-lt"/>
         </a:defRPr>
       </a:lvl3pPr>
-      <a:lvl4pPr xmlns:a="http://schemas.openxmlformats.org/drawingml/2006/main" marL="1371600" algn="l">
+      <a:lvl4pPr marL="1371600" algn="l">
         <a:buNone/>
         <a:defRPr sz="1800">
           <a:solidFill>
@@ -1063,7 +1009,7 @@
           <a:cs typeface="+mn-lt"/>
         </a:defRPr>
       </a:lvl4pPr>
-      <a:lvl5pPr xmlns:a="http://schemas.openxmlformats.org/drawingml/2006/main" marL="1828800" algn="l">
+      <a:lvl5pPr marL="1828800" algn="l">
         <a:buNone/>
         <a:defRPr sz="1800">
           <a:solidFill>
@@ -1074,7 +1020,7 @@
           <a:cs typeface="+mn-lt"/>
         </a:defRPr>
       </a:lvl5pPr>
-      <a:lvl6pPr xmlns:a="http://schemas.openxmlformats.org/drawingml/2006/main" marL="2286000" algn="l">
+      <a:lvl6pPr marL="2286000" algn="l">
         <a:buNone/>
         <a:defRPr sz="1800">
           <a:solidFill>
@@ -1085,7 +1031,7 @@
           <a:cs typeface="+mn-lt"/>
         </a:defRPr>
       </a:lvl6pPr>
-      <a:lvl7pPr xmlns:a="http://schemas.openxmlformats.org/drawingml/2006/main" marL="2743200" algn="l">
+      <a:lvl7pPr marL="2743200" algn="l">
         <a:buNone/>
         <a:defRPr sz="1800">
           <a:solidFill>
@@ -1096,7 +1042,7 @@
           <a:cs typeface="+mn-lt"/>
         </a:defRPr>
       </a:lvl7pPr>
-      <a:lvl8pPr xmlns:a="http://schemas.openxmlformats.org/drawingml/2006/main" marL="3200400" algn="l">
+      <a:lvl8pPr marL="3200400" algn="l">
         <a:buNone/>
         <a:defRPr sz="1800">
           <a:solidFill>
@@ -1107,7 +1053,7 @@
           <a:cs typeface="+mn-lt"/>
         </a:defRPr>
       </a:lvl8pPr>
-      <a:lvl9pPr xmlns:a="http://schemas.openxmlformats.org/drawingml/2006/main" marL="3657600" algn="l">
+      <a:lvl9pPr marL="3657600" algn="l">
         <a:buNone/>
         <a:defRPr sz="1800">
           <a:solidFill>
@@ -1123,253 +1069,8 @@
 </p:sldMaster>
 </file>
 
-<file path=ppt/slideMasters/theme/theme2.xml><?xml version="1.0" encoding="utf-8"?>
-<a:theme xmlns:a="http://schemas.openxmlformats.org/drawingml/2006/main" name="ChatGPT">
-  <a:themeElements>
-    <a:clrScheme name="ChatGPT">
-      <a:dk1>
-        <a:srgbClr val="000000"/>
-      </a:dk1>
-      <a:lt1>
-        <a:srgbClr val="FFFFFF"/>
-      </a:lt1>
-      <a:dk2>
-        <a:srgbClr val="0E2841"/>
-      </a:dk2>
-      <a:lt2>
-        <a:srgbClr val="E8E8E8"/>
-      </a:lt2>
-      <a:accent1>
-        <a:srgbClr val="156082"/>
-      </a:accent1>
-      <a:accent2>
-        <a:srgbClr val="E97132"/>
-      </a:accent2>
-      <a:accent3>
-        <a:srgbClr val="196B24"/>
-      </a:accent3>
-      <a:accent4>
-        <a:srgbClr val="0F9ED5"/>
-      </a:accent4>
-      <a:accent5>
-        <a:srgbClr val="A02B93"/>
-      </a:accent5>
-      <a:accent6>
-        <a:srgbClr val="4EA72E"/>
-      </a:accent6>
-      <a:hlink>
-        <a:srgbClr val="467886"/>
-      </a:hlink>
-      <a:folHlink>
-        <a:srgbClr val="96607D"/>
-      </a:folHlink>
-    </a:clrScheme>
-    <a:fontScheme name="Office">
-      <a:majorFont>
-        <a:latin typeface="Calibri Light"/>
-        <a:ea typeface="Calibri Light"/>
-        <a:cs typeface="Calibri Light"/>
-      </a:majorFont>
-      <a:minorFont>
-        <a:latin typeface="Calibri"/>
-        <a:ea typeface="Calibri"/>
-        <a:cs typeface="Calibri"/>
-      </a:minorFont>
-    </a:fontScheme>
-    <a:fmtScheme name="ChatGPT">
-      <a:fillStyleLst>
-        <a:solidFill>
-          <a:schemeClr val="phClr"/>
-        </a:solidFill>
-        <a:gradFill>
-          <a:gsLst>
-            <a:gs pos="0">
-              <a:schemeClr val="phClr">
-                <a:tint val="67000"/>
-                <a:lumMod val="110000"/>
-                <a:satMod val="105000"/>
-              </a:schemeClr>
-            </a:gs>
-            <a:gs pos="50000">
-              <a:schemeClr val="phClr">
-                <a:tint val="73000"/>
-                <a:lumMod val="105000"/>
-                <a:satMod val="103000"/>
-              </a:schemeClr>
-            </a:gs>
-            <a:gs pos="100000">
-              <a:schemeClr val="phClr">
-                <a:tint val="81000"/>
-                <a:lumMod val="105000"/>
-                <a:satMod val="109000"/>
-              </a:schemeClr>
-            </a:gs>
-          </a:gsLst>
-          <a:lin ang="5400000" scaled="0"/>
-        </a:gradFill>
-        <a:gradFill>
-          <a:gsLst>
-            <a:gs pos="0">
-              <a:schemeClr val="phClr">
-                <a:tint val="94000"/>
-                <a:lumMod val="102000"/>
-                <a:satMod val="103000"/>
-              </a:schemeClr>
-            </a:gs>
-            <a:gs pos="50000">
-              <a:schemeClr val="phClr">
-                <a:shade val="100000"/>
-                <a:lumMod val="100000"/>
-                <a:satMod val="110000"/>
-              </a:schemeClr>
-            </a:gs>
-            <a:gs pos="100000">
-              <a:schemeClr val="phClr">
-                <a:shade val="78000"/>
-                <a:lumMod val="99000"/>
-                <a:satMod val="120000"/>
-              </a:schemeClr>
-            </a:gs>
-          </a:gsLst>
-          <a:lin ang="5400000" scaled="0"/>
-        </a:gradFill>
-      </a:fillStyleLst>
-      <a:lnStyleLst>
-        <a:ln w="12700">
-          <a:solidFill>
-            <a:schemeClr val="phClr"/>
-          </a:solidFill>
-          <a:prstDash val="solid"/>
-        </a:ln>
-        <a:ln w="19050">
-          <a:solidFill>
-            <a:schemeClr val="phClr"/>
-          </a:solidFill>
-          <a:prstDash val="solid"/>
-        </a:ln>
-        <a:ln w="25400">
-          <a:solidFill>
-            <a:schemeClr val="phClr"/>
-          </a:solidFill>
-          <a:prstDash val="solid"/>
-        </a:ln>
-      </a:lnStyleLst>
-      <a:effectStyleLst>
-        <a:effectStyle>
-          <a:effectLst/>
-        </a:effectStyle>
-        <a:effectStyle>
-          <a:effectLst/>
-        </a:effectStyle>
-        <a:effectStyle>
-          <a:effectLst>
-            <a:outerShdw blurRad="57150" dist="19050" dir="5400000">
-              <a:srgbClr val="000000">
-                <a:alpha val="16000"/>
-              </a:srgbClr>
-            </a:outerShdw>
-          </a:effectLst>
-        </a:effectStyle>
-        <a:effectStyle>
-          <a:effectLst>
-            <a:outerShdw blurRad="19050" dist="9525" dir="5400000">
-              <a:srgbClr val="000000">
-                <a:alpha val="6000"/>
-              </a:srgbClr>
-            </a:outerShdw>
-          </a:effectLst>
-        </a:effectStyle>
-        <a:effectStyle>
-          <a:effectLst>
-            <a:outerShdw blurRad="28575" dist="9525" dir="5400000">
-              <a:srgbClr val="000000">
-                <a:alpha val="8000"/>
-              </a:srgbClr>
-            </a:outerShdw>
-          </a:effectLst>
-        </a:effectStyle>
-        <a:effectStyle>
-          <a:effectLst>
-            <a:outerShdw blurRad="57150" dist="19050" dir="5400000">
-              <a:srgbClr val="000000">
-                <a:alpha val="10000"/>
-              </a:srgbClr>
-            </a:outerShdw>
-          </a:effectLst>
-        </a:effectStyle>
-        <a:effectStyle>
-          <a:effectLst>
-            <a:outerShdw blurRad="114300" dist="38100" dir="5400000">
-              <a:srgbClr val="000000">
-                <a:alpha val="12000"/>
-              </a:srgbClr>
-            </a:outerShdw>
-          </a:effectLst>
-        </a:effectStyle>
-        <a:effectStyle>
-          <a:effectLst>
-            <a:outerShdw blurRad="171450" dist="57150" dir="5400000">
-              <a:srgbClr val="000000">
-                <a:alpha val="16000"/>
-              </a:srgbClr>
-            </a:outerShdw>
-          </a:effectLst>
-        </a:effectStyle>
-        <a:effectStyle>
-          <a:effectLst>
-            <a:outerShdw blurRad="266700" dist="95250" dir="5400000">
-              <a:srgbClr val="000000">
-                <a:alpha val="24000"/>
-              </a:srgbClr>
-            </a:outerShdw>
-          </a:effectLst>
-        </a:effectStyle>
-      </a:effectStyleLst>
-      <a:bgFillStyleLst>
-        <a:solidFill>
-          <a:schemeClr val="phClr"/>
-        </a:solidFill>
-        <a:solidFill>
-          <a:schemeClr val="phClr">
-            <a:tint val="95000"/>
-            <a:satMod val="170000"/>
-          </a:schemeClr>
-        </a:solidFill>
-        <a:gradFill>
-          <a:gsLst>
-            <a:gs pos="0">
-              <a:schemeClr val="phClr">
-                <a:tint val="93000"/>
-                <a:shade val="98000"/>
-                <a:lumMod val="102000"/>
-                <a:satMod val="150000"/>
-              </a:schemeClr>
-            </a:gs>
-            <a:gs pos="50000">
-              <a:schemeClr val="phClr">
-                <a:tint val="98000"/>
-                <a:shade val="90000"/>
-                <a:lumMod val="103000"/>
-                <a:satMod val="130000"/>
-              </a:schemeClr>
-            </a:gs>
-            <a:gs pos="100000">
-              <a:schemeClr val="phClr">
-                <a:shade val="63000"/>
-                <a:satMod val="120000"/>
-              </a:schemeClr>
-            </a:gs>
-          </a:gsLst>
-          <a:lin ang="5400000" scaled="0"/>
-        </a:gradFill>
-      </a:bgFillStyleLst>
-    </a:fmtScheme>
-  </a:themeElements>
-</a:theme>
-</file>
-
 <file path=ppt/slides/slide1.xml><?xml version="1.0" encoding="utf-8"?>
-<p:sld xmlns:p="http://schemas.openxmlformats.org/presentationml/2006/main">
+<p:sld xmlns:a="http://schemas.openxmlformats.org/drawingml/2006/main" xmlns:r="http://schemas.openxmlformats.org/officeDocument/2006/relationships" xmlns:p="http://schemas.openxmlformats.org/presentationml/2006/main">
   <p:cSld>
     <p:spTree>
       <p:nvGrpSpPr>
@@ -1378,36 +1079,41 @@
         <p:nvPr/>
       </p:nvGrpSpPr>
       <p:grpSpPr>
-        <a:xfrm xmlns:a="http://schemas.openxmlformats.org/drawingml/2006/main"/>
+        <a:xfrm>
+          <a:off x="0" y="0"/>
+          <a:ext cx="0" cy="0"/>
+          <a:chOff x="0" y="0"/>
+          <a:chExt cx="0" cy="0"/>
+        </a:xfrm>
       </p:grpSpPr>
       <p:sp>
         <p:nvSpPr>
-          <p:cNvPr id="10" name="">
-            <a:extLst xmlns:a="http://schemas.openxmlformats.org/drawingml/2006/main">
+          <p:cNvPr id="10" name="矩形: 圆角 9">
+            <a:extLst>
               <a:ext uri="{FF2B5EF4-FFF2-40B4-BE49-F238E27FC236}">
                 <a16:creationId xmlns:a16="http://schemas.microsoft.com/office/drawing/2014/main" id="{0D12C549-D14C-4123-B955-32A8967DB2E6}"/>
               </a:ext>
             </a:extLst>
           </p:cNvPr>
           <p:cNvSpPr>
-            <a:spLocks xmlns:a="http://schemas.openxmlformats.org/drawingml/2006/main" noGrp="1"/>
-          </p:cNvSpPr>
-          <p:nvPr/>
-        </p:nvSpPr>
-        <p:spPr>
-          <a:xfrm xmlns:a="http://schemas.openxmlformats.org/drawingml/2006/main">
+            <a:spLocks noGrp="1"/>
+          </p:cNvSpPr>
+          <p:nvPr/>
+        </p:nvSpPr>
+        <p:spPr>
+          <a:xfrm>
             <a:off x="6705600" y="571500"/>
             <a:ext cx="4914900" cy="5676900"/>
           </a:xfrm>
-          <a:prstGeom xmlns:a="http://schemas.openxmlformats.org/drawingml/2006/main" prst="roundRect">
+          <a:prstGeom prst="roundRect">
             <a:avLst>
               <a:gd name="adj" fmla="val 5426"/>
             </a:avLst>
           </a:prstGeom>
-          <a:solidFill xmlns:a="http://schemas.openxmlformats.org/drawingml/2006/main">
+          <a:solidFill>
             <a:srgbClr val="EDEDED"/>
           </a:solidFill>
-          <a:ln xmlns:a="http://schemas.openxmlformats.org/drawingml/2006/main" w="9525">
+          <a:ln w="9525">
             <a:solidFill>
               <a:srgbClr val="B8BCC4"/>
             </a:solidFill>
@@ -1417,58 +1123,58 @@
       </p:sp>
       <p:pic>
         <p:nvPicPr>
-          <p:cNvPr id="11" name=""/>
+          <p:cNvPr id="11" name="图片 10"/>
           <p:cNvPicPr>
-            <a:picLocks xmlns:a="http://schemas.openxmlformats.org/drawingml/2006/main" noChangeAspect="1"/>
+            <a:picLocks noChangeAspect="1"/>
           </p:cNvPicPr>
           <p:nvPr/>
         </p:nvPicPr>
         <p:blipFill>
-          <a:blip xmlns:r="http://schemas.openxmlformats.org/officeDocument/2006/relationships" xmlns:a="http://schemas.openxmlformats.org/drawingml/2006/main" r:embed="Rf74828e1729f4f38"/>
-          <a:stretch xmlns:a="http://schemas.openxmlformats.org/drawingml/2006/main"/>
+          <a:blip r:embed="rId3"/>
+          <a:stretch/>
         </p:blipFill>
         <p:spPr>
-          <a:xfrm xmlns:a="http://schemas.openxmlformats.org/drawingml/2006/main">
+          <a:xfrm>
             <a:off x="7258050" y="1653332"/>
             <a:ext cx="3810000" cy="3475137"/>
           </a:xfrm>
-          <a:prstGeom xmlns:a="http://schemas.openxmlformats.org/drawingml/2006/main" prst="rect">
+          <a:prstGeom prst="rect">
             <a:avLst/>
           </a:prstGeom>
         </p:spPr>
       </p:pic>
       <p:sp>
         <p:nvSpPr>
-          <p:cNvPr id="3" name="">
-            <a:extLst xmlns:a="http://schemas.openxmlformats.org/drawingml/2006/main">
+          <p:cNvPr id="3" name="矩形 2">
+            <a:extLst>
               <a:ext uri="{FF2B5EF4-FFF2-40B4-BE49-F238E27FC236}">
                 <a16:creationId xmlns:a16="http://schemas.microsoft.com/office/drawing/2014/main" id="{0AF56CEC-5324-418B-9B2C-B83B6007DEA9}"/>
               </a:ext>
             </a:extLst>
           </p:cNvPr>
           <p:cNvSpPr>
-            <a:spLocks xmlns:a="http://schemas.openxmlformats.org/drawingml/2006/main" noGrp="1"/>
-          </p:cNvSpPr>
-          <p:nvPr/>
-        </p:nvSpPr>
-        <p:spPr>
-          <a:xfrm xmlns:a="http://schemas.openxmlformats.org/drawingml/2006/main">
+            <a:spLocks noGrp="1"/>
+          </p:cNvSpPr>
+          <p:nvPr/>
+        </p:nvSpPr>
+        <p:spPr>
+          <a:xfrm>
             <a:off x="571500" y="723900"/>
             <a:ext cx="5334000" cy="285750"/>
           </a:xfrm>
-          <a:prstGeom xmlns:a="http://schemas.openxmlformats.org/drawingml/2006/main" prst="rect">
-            <a:avLst/>
-          </a:prstGeom>
-          <a:noFill xmlns:a="http://schemas.openxmlformats.org/drawingml/2006/main"/>
-          <a:ln xmlns:a="http://schemas.openxmlformats.org/drawingml/2006/main" w="0">
+          <a:prstGeom prst="rect">
+            <a:avLst/>
+          </a:prstGeom>
+          <a:noFill/>
+          <a:ln w="0">
             <a:noFill/>
             <a:prstDash val="solid"/>
           </a:ln>
         </p:spPr>
         <p:txBody>
-          <a:bodyPr xmlns:a="http://schemas.openxmlformats.org/drawingml/2006/main" anchor="t"/>
-          <a:lstStyle xmlns:a="http://schemas.openxmlformats.org/drawingml/2006/main"/>
-          <a:p xmlns:a="http://schemas.openxmlformats.org/drawingml/2006/main">
+          <a:bodyPr anchor="t"/>
+          <a:lstStyle/>
+          <a:p>
             <a:pPr algn="l">
               <a:defRPr sz="1200" b="1" i="0">
                 <a:solidFill>
@@ -1495,36 +1201,36 @@
       </p:sp>
       <p:sp>
         <p:nvSpPr>
-          <p:cNvPr id="4" name="">
-            <a:extLst xmlns:a="http://schemas.openxmlformats.org/drawingml/2006/main">
+          <p:cNvPr id="4" name="矩形 3">
+            <a:extLst>
               <a:ext uri="{FF2B5EF4-FFF2-40B4-BE49-F238E27FC236}">
                 <a16:creationId xmlns:a16="http://schemas.microsoft.com/office/drawing/2014/main" id="{B2A5E36D-BD13-48B1-8F92-5445F058DFA3}"/>
               </a:ext>
             </a:extLst>
           </p:cNvPr>
           <p:cNvSpPr>
-            <a:spLocks xmlns:a="http://schemas.openxmlformats.org/drawingml/2006/main" noGrp="1"/>
-          </p:cNvSpPr>
-          <p:nvPr/>
-        </p:nvSpPr>
-        <p:spPr>
-          <a:xfrm xmlns:a="http://schemas.openxmlformats.org/drawingml/2006/main">
+            <a:spLocks noGrp="1"/>
+          </p:cNvSpPr>
+          <p:nvPr/>
+        </p:nvSpPr>
+        <p:spPr>
+          <a:xfrm>
             <a:off x="571500" y="1238250"/>
             <a:ext cx="5524500" cy="1428750"/>
           </a:xfrm>
-          <a:prstGeom xmlns:a="http://schemas.openxmlformats.org/drawingml/2006/main" prst="rect">
-            <a:avLst/>
-          </a:prstGeom>
-          <a:noFill xmlns:a="http://schemas.openxmlformats.org/drawingml/2006/main"/>
-          <a:ln xmlns:a="http://schemas.openxmlformats.org/drawingml/2006/main" w="0">
+          <a:prstGeom prst="rect">
+            <a:avLst/>
+          </a:prstGeom>
+          <a:noFill/>
+          <a:ln w="0">
             <a:noFill/>
             <a:prstDash val="solid"/>
           </a:ln>
         </p:spPr>
         <p:txBody>
-          <a:bodyPr xmlns:a="http://schemas.openxmlformats.org/drawingml/2006/main" anchor="t"/>
-          <a:lstStyle xmlns:a="http://schemas.openxmlformats.org/drawingml/2006/main"/>
-          <a:p xmlns:a="http://schemas.openxmlformats.org/drawingml/2006/main">
+          <a:bodyPr anchor="t"/>
+          <a:lstStyle/>
+          <a:p>
             <a:pPr algn="l">
               <a:defRPr sz="5400" b="1" i="0">
                 <a:solidFill>
@@ -1551,36 +1257,36 @@
       </p:sp>
       <p:sp>
         <p:nvSpPr>
-          <p:cNvPr id="5" name="">
-            <a:extLst xmlns:a="http://schemas.openxmlformats.org/drawingml/2006/main">
+          <p:cNvPr id="5" name="矩形 4">
+            <a:extLst>
               <a:ext uri="{FF2B5EF4-FFF2-40B4-BE49-F238E27FC236}">
                 <a16:creationId xmlns:a16="http://schemas.microsoft.com/office/drawing/2014/main" id="{554CDAF8-F7B5-418C-9543-030038754B25}"/>
               </a:ext>
             </a:extLst>
           </p:cNvPr>
           <p:cNvSpPr>
-            <a:spLocks xmlns:a="http://schemas.openxmlformats.org/drawingml/2006/main" noGrp="1"/>
-          </p:cNvSpPr>
-          <p:nvPr/>
-        </p:nvSpPr>
-        <p:spPr>
-          <a:xfrm xmlns:a="http://schemas.openxmlformats.org/drawingml/2006/main">
+            <a:spLocks noGrp="1"/>
+          </p:cNvSpPr>
+          <p:nvPr/>
+        </p:nvSpPr>
+        <p:spPr>
+          <a:xfrm>
             <a:off x="571500" y="2781300"/>
             <a:ext cx="5334000" cy="914400"/>
           </a:xfrm>
-          <a:prstGeom xmlns:a="http://schemas.openxmlformats.org/drawingml/2006/main" prst="rect">
-            <a:avLst/>
-          </a:prstGeom>
-          <a:noFill xmlns:a="http://schemas.openxmlformats.org/drawingml/2006/main"/>
-          <a:ln xmlns:a="http://schemas.openxmlformats.org/drawingml/2006/main" w="0">
+          <a:prstGeom prst="rect">
+            <a:avLst/>
+          </a:prstGeom>
+          <a:noFill/>
+          <a:ln w="0">
             <a:noFill/>
             <a:prstDash val="solid"/>
           </a:ln>
         </p:spPr>
         <p:txBody>
-          <a:bodyPr xmlns:a="http://schemas.openxmlformats.org/drawingml/2006/main" anchor="t"/>
-          <a:lstStyle xmlns:a="http://schemas.openxmlformats.org/drawingml/2006/main"/>
-          <a:p xmlns:a="http://schemas.openxmlformats.org/drawingml/2006/main">
+          <a:bodyPr anchor="t"/>
+          <a:lstStyle/>
+          <a:p>
             <a:pPr algn="l">
               <a:defRPr sz="2025" b="0" i="0">
                 <a:solidFill>
@@ -1603,7 +1309,7 @@
               <a:t>无人机照片一键三维建模</a:t>
             </a:r>
           </a:p>
-          <a:p xmlns:a="http://schemas.openxmlformats.org/drawingml/2006/main">
+          <a:p>
             <a:pPr algn="l">
               <a:defRPr sz="2025" b="0" i="0">
                 <a:solidFill>
@@ -1630,36 +1336,36 @@
       </p:sp>
       <p:sp>
         <p:nvSpPr>
-          <p:cNvPr id="6" name="">
-            <a:extLst xmlns:a="http://schemas.openxmlformats.org/drawingml/2006/main">
+          <p:cNvPr id="6" name="矩形 5">
+            <a:extLst>
               <a:ext uri="{FF2B5EF4-FFF2-40B4-BE49-F238E27FC236}">
                 <a16:creationId xmlns:a16="http://schemas.microsoft.com/office/drawing/2014/main" id="{216F30F4-9D20-42BA-93FC-A4647E010D0D}"/>
               </a:ext>
             </a:extLst>
           </p:cNvPr>
           <p:cNvSpPr>
-            <a:spLocks xmlns:a="http://schemas.openxmlformats.org/drawingml/2006/main" noGrp="1"/>
-          </p:cNvSpPr>
-          <p:nvPr/>
-        </p:nvSpPr>
-        <p:spPr>
-          <a:xfrm xmlns:a="http://schemas.openxmlformats.org/drawingml/2006/main">
+            <a:spLocks noGrp="1"/>
+          </p:cNvSpPr>
+          <p:nvPr/>
+        </p:nvSpPr>
+        <p:spPr>
+          <a:xfrm>
             <a:off x="571500" y="4000500"/>
             <a:ext cx="4762500" cy="342900"/>
           </a:xfrm>
-          <a:prstGeom xmlns:a="http://schemas.openxmlformats.org/drawingml/2006/main" prst="rect">
-            <a:avLst/>
-          </a:prstGeom>
-          <a:noFill xmlns:a="http://schemas.openxmlformats.org/drawingml/2006/main"/>
-          <a:ln xmlns:a="http://schemas.openxmlformats.org/drawingml/2006/main" w="0">
+          <a:prstGeom prst="rect">
+            <a:avLst/>
+          </a:prstGeom>
+          <a:noFill/>
+          <a:ln w="0">
             <a:noFill/>
             <a:prstDash val="solid"/>
           </a:ln>
         </p:spPr>
         <p:txBody>
-          <a:bodyPr xmlns:a="http://schemas.openxmlformats.org/drawingml/2006/main" anchor="t"/>
-          <a:lstStyle xmlns:a="http://schemas.openxmlformats.org/drawingml/2006/main"/>
-          <a:p xmlns:a="http://schemas.openxmlformats.org/drawingml/2006/main">
+          <a:bodyPr anchor="t"/>
+          <a:lstStyle/>
+          <a:p>
             <a:pPr algn="l">
               <a:defRPr sz="1500" b="1" i="0">
                 <a:solidFill>
@@ -1686,36 +1392,36 @@
       </p:sp>
       <p:sp>
         <p:nvSpPr>
-          <p:cNvPr id="7" name="">
-            <a:extLst xmlns:a="http://schemas.openxmlformats.org/drawingml/2006/main">
+          <p:cNvPr id="7" name="矩形 6">
+            <a:extLst>
               <a:ext uri="{FF2B5EF4-FFF2-40B4-BE49-F238E27FC236}">
                 <a16:creationId xmlns:a16="http://schemas.microsoft.com/office/drawing/2014/main" id="{A8887E8E-27B9-46D9-A3B9-2264441FEF3B}"/>
               </a:ext>
             </a:extLst>
           </p:cNvPr>
           <p:cNvSpPr>
-            <a:spLocks xmlns:a="http://schemas.openxmlformats.org/drawingml/2006/main" noGrp="1"/>
-          </p:cNvSpPr>
-          <p:nvPr/>
-        </p:nvSpPr>
-        <p:spPr>
-          <a:xfrm xmlns:a="http://schemas.openxmlformats.org/drawingml/2006/main">
+            <a:spLocks noGrp="1"/>
+          </p:cNvSpPr>
+          <p:nvPr/>
+        </p:nvSpPr>
+        <p:spPr>
+          <a:xfrm>
             <a:off x="571500" y="4629150"/>
             <a:ext cx="5334000" cy="857250"/>
           </a:xfrm>
-          <a:prstGeom xmlns:a="http://schemas.openxmlformats.org/drawingml/2006/main" prst="rect">
-            <a:avLst/>
-          </a:prstGeom>
-          <a:noFill xmlns:a="http://schemas.openxmlformats.org/drawingml/2006/main"/>
-          <a:ln xmlns:a="http://schemas.openxmlformats.org/drawingml/2006/main" w="0">
+          <a:prstGeom prst="rect">
+            <a:avLst/>
+          </a:prstGeom>
+          <a:noFill/>
+          <a:ln w="0">
             <a:noFill/>
             <a:prstDash val="solid"/>
           </a:ln>
         </p:spPr>
         <p:txBody>
-          <a:bodyPr xmlns:a="http://schemas.openxmlformats.org/drawingml/2006/main" anchor="t"/>
-          <a:lstStyle xmlns:a="http://schemas.openxmlformats.org/drawingml/2006/main"/>
-          <a:p xmlns:a="http://schemas.openxmlformats.org/drawingml/2006/main">
+          <a:bodyPr anchor="t"/>
+          <a:lstStyle/>
+          <a:p>
             <a:pPr algn="l">
               <a:defRPr sz="1350" b="0" i="0">
                 <a:solidFill>
@@ -1742,36 +1448,36 @@
       </p:sp>
       <p:sp>
         <p:nvSpPr>
-          <p:cNvPr id="8" name="">
-            <a:extLst xmlns:a="http://schemas.openxmlformats.org/drawingml/2006/main">
+          <p:cNvPr id="8" name="矩形 7">
+            <a:extLst>
               <a:ext uri="{FF2B5EF4-FFF2-40B4-BE49-F238E27FC236}">
                 <a16:creationId xmlns:a16="http://schemas.microsoft.com/office/drawing/2014/main" id="{E1C4E26A-9840-4A61-998B-CC0F280698BE}"/>
               </a:ext>
             </a:extLst>
           </p:cNvPr>
           <p:cNvSpPr>
-            <a:spLocks xmlns:a="http://schemas.openxmlformats.org/drawingml/2006/main" noGrp="1"/>
-          </p:cNvSpPr>
-          <p:nvPr/>
-        </p:nvSpPr>
-        <p:spPr>
-          <a:xfrm xmlns:a="http://schemas.openxmlformats.org/drawingml/2006/main">
+            <a:spLocks noGrp="1"/>
+          </p:cNvSpPr>
+          <p:nvPr/>
+        </p:nvSpPr>
+        <p:spPr>
+          <a:xfrm>
             <a:off x="11334750" y="6362700"/>
             <a:ext cx="571500" cy="266700"/>
           </a:xfrm>
-          <a:prstGeom xmlns:a="http://schemas.openxmlformats.org/drawingml/2006/main" prst="rect">
-            <a:avLst/>
-          </a:prstGeom>
-          <a:noFill xmlns:a="http://schemas.openxmlformats.org/drawingml/2006/main"/>
-          <a:ln xmlns:a="http://schemas.openxmlformats.org/drawingml/2006/main" w="0">
+          <a:prstGeom prst="rect">
+            <a:avLst/>
+          </a:prstGeom>
+          <a:noFill/>
+          <a:ln w="0">
             <a:noFill/>
             <a:prstDash val="solid"/>
           </a:ln>
         </p:spPr>
         <p:txBody>
-          <a:bodyPr xmlns:a="http://schemas.openxmlformats.org/drawingml/2006/main" anchor="t"/>
-          <a:lstStyle xmlns:a="http://schemas.openxmlformats.org/drawingml/2006/main"/>
-          <a:p xmlns:a="http://schemas.openxmlformats.org/drawingml/2006/main">
+          <a:bodyPr anchor="t"/>
+          <a:lstStyle/>
+          <a:p>
             <a:pPr algn="r">
               <a:defRPr sz="1050" b="0" i="0">
                 <a:solidFill>
@@ -1798,36 +1504,36 @@
       </p:sp>
       <p:sp>
         <p:nvSpPr>
-          <p:cNvPr id="9" name="">
-            <a:extLst xmlns:a="http://schemas.openxmlformats.org/drawingml/2006/main">
+          <p:cNvPr id="9" name="矩形 8">
+            <a:extLst>
               <a:ext uri="{FF2B5EF4-FFF2-40B4-BE49-F238E27FC236}">
                 <a16:creationId xmlns:a16="http://schemas.microsoft.com/office/drawing/2014/main" id="{213382A9-CBA5-4298-AE0C-556D063DD9CC}"/>
               </a:ext>
             </a:extLst>
           </p:cNvPr>
           <p:cNvSpPr>
-            <a:spLocks xmlns:a="http://schemas.openxmlformats.org/drawingml/2006/main" noGrp="1"/>
-          </p:cNvSpPr>
-          <p:nvPr/>
-        </p:nvSpPr>
-        <p:spPr>
-          <a:xfrm xmlns:a="http://schemas.openxmlformats.org/drawingml/2006/main">
-            <a:off x="571500" y="6362700"/>
-            <a:ext cx="4762500" cy="266700"/>
-          </a:xfrm>
-          <a:prstGeom xmlns:a="http://schemas.openxmlformats.org/drawingml/2006/main" prst="rect">
-            <a:avLst/>
-          </a:prstGeom>
-          <a:noFill xmlns:a="http://schemas.openxmlformats.org/drawingml/2006/main"/>
-          <a:ln xmlns:a="http://schemas.openxmlformats.org/drawingml/2006/main" w="0">
+            <a:spLocks noGrp="1"/>
+          </p:cNvSpPr>
+          <p:nvPr/>
+        </p:nvSpPr>
+        <p:spPr>
+          <a:xfrm>
+            <a:off x="571500" y="6015446"/>
+            <a:ext cx="4762500" cy="613954"/>
+          </a:xfrm>
+          <a:prstGeom prst="rect">
+            <a:avLst/>
+          </a:prstGeom>
+          <a:noFill/>
+          <a:ln w="0">
             <a:noFill/>
             <a:prstDash val="solid"/>
           </a:ln>
         </p:spPr>
         <p:txBody>
-          <a:bodyPr xmlns:a="http://schemas.openxmlformats.org/drawingml/2006/main" anchor="t"/>
-          <a:lstStyle xmlns:a="http://schemas.openxmlformats.org/drawingml/2006/main"/>
-          <a:p xmlns:a="http://schemas.openxmlformats.org/drawingml/2006/main">
+          <a:bodyPr anchor="t"/>
+          <a:lstStyle/>
+          <a:p>
             <a:pPr algn="l">
               <a:defRPr sz="1050" b="0" i="0">
                 <a:solidFill>
@@ -1839,7 +1545,7 @@
               </a:defRPr>
             </a:pPr>
             <a:r>
-              <a:rPr sz="1050" b="0" i="0">
+              <a:rPr lang="zh-CN" altLang="en-US" sz="1050" b="0" i="0" dirty="0">
                 <a:solidFill>
                   <a:srgbClr val="8A97A5"/>
                 </a:solidFill>
@@ -1847,8 +1553,144 @@
                 <a:ea typeface="Microsoft YaHei"/>
                 <a:cs typeface="Microsoft YaHei"/>
               </a:rPr>
-              <a:t>鹭见 SiteSight · v1.0.0</a:t>
-            </a:r>
+              <a:t>队伍名称：我是山里灵活的狗  </a:t>
+            </a:r>
+            <a:r>
+              <a:rPr lang="en-US" altLang="zh-CN" sz="1050" b="0" i="0" dirty="0">
+                <a:solidFill>
+                  <a:srgbClr val="8A97A5"/>
+                </a:solidFill>
+                <a:latin typeface="Microsoft YaHei"/>
+                <a:ea typeface="Microsoft YaHei"/>
+                <a:cs typeface="Microsoft YaHei"/>
+              </a:rPr>
+              <a:t>T0002</a:t>
+            </a:r>
+            <a:endParaRPr lang="en-US" sz="1050" b="0" i="0" dirty="0">
+              <a:solidFill>
+                <a:srgbClr val="8A97A5"/>
+              </a:solidFill>
+              <a:latin typeface="Microsoft YaHei"/>
+              <a:ea typeface="Microsoft YaHei"/>
+              <a:cs typeface="Microsoft YaHei"/>
+            </a:endParaRPr>
+          </a:p>
+          <a:p>
+            <a:pPr algn="l">
+              <a:defRPr sz="1050" b="0" i="0">
+                <a:solidFill>
+                  <a:srgbClr val="8A97A5"/>
+                </a:solidFill>
+                <a:latin typeface="Microsoft YaHei"/>
+                <a:ea typeface="Microsoft YaHei"/>
+                <a:cs typeface="Microsoft YaHei"/>
+              </a:defRPr>
+            </a:pPr>
+            <a:r>
+              <a:rPr lang="zh-CN" altLang="en-US" sz="1050" dirty="0">
+                <a:solidFill>
+                  <a:srgbClr val="8A97A5"/>
+                </a:solidFill>
+                <a:latin typeface="Microsoft YaHei"/>
+                <a:ea typeface="Microsoft YaHei"/>
+                <a:cs typeface="Microsoft YaHei"/>
+              </a:rPr>
+              <a:t>团队成员：</a:t>
+            </a:r>
+            <a:r>
+              <a:rPr lang="en-US" altLang="zh-CN" sz="1050" dirty="0">
+                <a:solidFill>
+                  <a:srgbClr val="8A97A5"/>
+                </a:solidFill>
+                <a:latin typeface="Microsoft YaHei"/>
+                <a:ea typeface="Microsoft YaHei"/>
+                <a:cs typeface="Microsoft YaHei"/>
+              </a:rPr>
+              <a:t>P0005</a:t>
+            </a:r>
+            <a:endParaRPr lang="en-US" sz="1050" dirty="0">
+              <a:solidFill>
+                <a:srgbClr val="8A97A5"/>
+              </a:solidFill>
+              <a:latin typeface="Microsoft YaHei"/>
+              <a:ea typeface="Microsoft YaHei"/>
+              <a:cs typeface="Microsoft YaHei"/>
+            </a:endParaRPr>
+          </a:p>
+          <a:p>
+            <a:pPr algn="l">
+              <a:defRPr sz="1050" b="0" i="0">
+                <a:solidFill>
+                  <a:srgbClr val="8A97A5"/>
+                </a:solidFill>
+                <a:latin typeface="Microsoft YaHei"/>
+                <a:ea typeface="Microsoft YaHei"/>
+                <a:cs typeface="Microsoft YaHei"/>
+              </a:defRPr>
+            </a:pPr>
+            <a:r>
+              <a:rPr lang="zh-CN" altLang="en-US" sz="1050" b="0" i="0" dirty="0">
+                <a:solidFill>
+                  <a:srgbClr val="8A97A5"/>
+                </a:solidFill>
+                <a:latin typeface="Microsoft YaHei"/>
+                <a:ea typeface="Microsoft YaHei"/>
+                <a:cs typeface="Microsoft YaHei"/>
+              </a:rPr>
+              <a:t>项目名称：</a:t>
+            </a:r>
+            <a:r>
+              <a:rPr sz="1050" b="0" i="0" dirty="0" err="1">
+                <a:solidFill>
+                  <a:srgbClr val="8A97A5"/>
+                </a:solidFill>
+                <a:latin typeface="Microsoft YaHei"/>
+                <a:ea typeface="Microsoft YaHei"/>
+                <a:cs typeface="Microsoft YaHei"/>
+              </a:rPr>
+              <a:t>鹭见</a:t>
+            </a:r>
+            <a:r>
+              <a:rPr sz="1050" b="0" i="0" dirty="0">
+                <a:solidFill>
+                  <a:srgbClr val="8A97A5"/>
+                </a:solidFill>
+                <a:latin typeface="Microsoft YaHei"/>
+                <a:ea typeface="Microsoft YaHei"/>
+                <a:cs typeface="Microsoft YaHei"/>
+              </a:rPr>
+              <a:t> </a:t>
+            </a:r>
+            <a:r>
+              <a:rPr sz="1050" b="0" i="0" dirty="0" err="1">
+                <a:solidFill>
+                  <a:srgbClr val="8A97A5"/>
+                </a:solidFill>
+                <a:latin typeface="Microsoft YaHei"/>
+                <a:ea typeface="Microsoft YaHei"/>
+                <a:cs typeface="Microsoft YaHei"/>
+              </a:rPr>
+              <a:t>SiteSigh</a:t>
+            </a:r>
+            <a:r>
+              <a:rPr lang="en-US" altLang="zh-CN" sz="1050" b="0" i="0" dirty="0" err="1">
+                <a:solidFill>
+                  <a:srgbClr val="8A97A5"/>
+                </a:solidFill>
+                <a:latin typeface="Microsoft YaHei"/>
+                <a:ea typeface="Microsoft YaHei"/>
+                <a:cs typeface="Microsoft YaHei"/>
+              </a:rPr>
+              <a:t>t</a:t>
+            </a:r>
+            <a:endParaRPr sz="1050" b="0" i="0" dirty="0">
+              <a:solidFill>
+                <a:srgbClr val="8A97A5"/>
+              </a:solidFill>
+              <a:latin typeface="Microsoft YaHei"/>
+              <a:ea typeface="Microsoft YaHei"/>
+              <a:cs typeface="Microsoft YaHei"/>
+            </a:endParaRPr>
           </a:p>
         </p:txBody>
       </p:sp>
@@ -1859,11 +1701,14 @@
       </p:ext>
     </p:extLst>
   </p:cSld>
+  <p:clrMapOvr>
+    <a:masterClrMapping/>
+  </p:clrMapOvr>
 </p:sld>
 </file>
 
 <file path=ppt/slides/slide2.xml><?xml version="1.0" encoding="utf-8"?>
-<p:sld xmlns:p="http://schemas.openxmlformats.org/presentationml/2006/main">
+<p:sld xmlns:a="http://schemas.openxmlformats.org/drawingml/2006/main" xmlns:r="http://schemas.openxmlformats.org/officeDocument/2006/relationships" xmlns:p="http://schemas.openxmlformats.org/presentationml/2006/main">
   <p:cSld>
     <p:spTree>
       <p:nvGrpSpPr>
@@ -1872,40 +1717,45 @@
         <p:nvPr/>
       </p:nvGrpSpPr>
       <p:grpSpPr>
-        <a:xfrm xmlns:a="http://schemas.openxmlformats.org/drawingml/2006/main"/>
+        <a:xfrm>
+          <a:off x="0" y="0"/>
+          <a:ext cx="0" cy="0"/>
+          <a:chOff x="0" y="0"/>
+          <a:chExt cx="0" cy="0"/>
+        </a:xfrm>
       </p:grpSpPr>
       <p:sp>
         <p:nvSpPr>
-          <p:cNvPr id="13" name="">
-            <a:extLst xmlns:a="http://schemas.openxmlformats.org/drawingml/2006/main">
+          <p:cNvPr id="13" name="矩形 12">
+            <a:extLst>
               <a:ext uri="{FF2B5EF4-FFF2-40B4-BE49-F238E27FC236}">
                 <a16:creationId xmlns:a16="http://schemas.microsoft.com/office/drawing/2014/main" id="{4FBC8010-E31D-4BFF-8499-B013E811FA76}"/>
               </a:ext>
             </a:extLst>
           </p:cNvPr>
           <p:cNvSpPr>
-            <a:spLocks xmlns:a="http://schemas.openxmlformats.org/drawingml/2006/main" noGrp="1"/>
-          </p:cNvSpPr>
-          <p:nvPr/>
-        </p:nvSpPr>
-        <p:spPr>
-          <a:xfrm xmlns:a="http://schemas.openxmlformats.org/drawingml/2006/main">
+            <a:spLocks noGrp="1"/>
+          </p:cNvSpPr>
+          <p:nvPr/>
+        </p:nvSpPr>
+        <p:spPr>
+          <a:xfrm>
             <a:off x="571500" y="495300"/>
             <a:ext cx="11049000" cy="571500"/>
           </a:xfrm>
-          <a:prstGeom xmlns:a="http://schemas.openxmlformats.org/drawingml/2006/main" prst="rect">
-            <a:avLst/>
-          </a:prstGeom>
-          <a:noFill xmlns:a="http://schemas.openxmlformats.org/drawingml/2006/main"/>
-          <a:ln xmlns:a="http://schemas.openxmlformats.org/drawingml/2006/main" w="0">
+          <a:prstGeom prst="rect">
+            <a:avLst/>
+          </a:prstGeom>
+          <a:noFill/>
+          <a:ln w="0">
             <a:noFill/>
             <a:prstDash val="solid"/>
           </a:ln>
         </p:spPr>
         <p:txBody>
-          <a:bodyPr xmlns:a="http://schemas.openxmlformats.org/drawingml/2006/main" anchor="t"/>
-          <a:lstStyle xmlns:a="http://schemas.openxmlformats.org/drawingml/2006/main"/>
-          <a:p xmlns:a="http://schemas.openxmlformats.org/drawingml/2006/main">
+          <a:bodyPr anchor="t"/>
+          <a:lstStyle/>
+          <a:p>
             <a:pPr algn="l">
               <a:defRPr sz="3525" b="1" i="0">
                 <a:solidFill>
@@ -1932,36 +1782,36 @@
       </p:sp>
       <p:sp>
         <p:nvSpPr>
-          <p:cNvPr id="2" name="">
-            <a:extLst xmlns:a="http://schemas.openxmlformats.org/drawingml/2006/main">
+          <p:cNvPr id="2" name="矩形 1">
+            <a:extLst>
               <a:ext uri="{FF2B5EF4-FFF2-40B4-BE49-F238E27FC236}">
                 <a16:creationId xmlns:a16="http://schemas.microsoft.com/office/drawing/2014/main" id="{0B132954-CD7F-4E0A-8B06-E4C33166EFF6}"/>
               </a:ext>
             </a:extLst>
           </p:cNvPr>
           <p:cNvSpPr>
-            <a:spLocks xmlns:a="http://schemas.openxmlformats.org/drawingml/2006/main" noGrp="1"/>
-          </p:cNvSpPr>
-          <p:nvPr/>
-        </p:nvSpPr>
-        <p:spPr>
-          <a:xfrm xmlns:a="http://schemas.openxmlformats.org/drawingml/2006/main">
+            <a:spLocks noGrp="1"/>
+          </p:cNvSpPr>
+          <p:nvPr/>
+        </p:nvSpPr>
+        <p:spPr>
+          <a:xfrm>
             <a:off x="571500" y="1428750"/>
             <a:ext cx="5334000" cy="4000500"/>
           </a:xfrm>
-          <a:prstGeom xmlns:a="http://schemas.openxmlformats.org/drawingml/2006/main" prst="rect">
-            <a:avLst/>
-          </a:prstGeom>
-          <a:noFill xmlns:a="http://schemas.openxmlformats.org/drawingml/2006/main"/>
-          <a:ln xmlns:a="http://schemas.openxmlformats.org/drawingml/2006/main" w="0">
+          <a:prstGeom prst="rect">
+            <a:avLst/>
+          </a:prstGeom>
+          <a:noFill/>
+          <a:ln w="0">
             <a:noFill/>
             <a:prstDash val="solid"/>
           </a:ln>
         </p:spPr>
         <p:txBody>
-          <a:bodyPr xmlns:a="http://schemas.openxmlformats.org/drawingml/2006/main" anchor="t"/>
-          <a:lstStyle xmlns:a="http://schemas.openxmlformats.org/drawingml/2006/main"/>
-          <a:p xmlns:a="http://schemas.openxmlformats.org/drawingml/2006/main">
+          <a:bodyPr anchor="t"/>
+          <a:lstStyle/>
+          <a:p>
             <a:pPr algn="l">
               <a:defRPr sz="1650" b="0" i="0">
                 <a:solidFill>
@@ -1984,12 +1834,17 @@
               <a:t>传统场地测绘需要数万元的专业无人机与测绘软件，以及专门培训，个人与小微团队难以入门。</a:t>
             </a:r>
           </a:p>
-          <a:p xmlns:a="http://schemas.openxmlformats.org/drawingml/2006/main">
-            <a:r>
-              <a:t/>
-            </a:r>
-          </a:p>
-          <a:p xmlns:a="http://schemas.openxmlformats.org/drawingml/2006/main">
+          <a:p>
+            <a:endParaRPr sz="1650" b="0" i="0">
+              <a:solidFill>
+                <a:srgbClr val="46525F"/>
+              </a:solidFill>
+              <a:latin typeface="Microsoft YaHei"/>
+              <a:ea typeface="Microsoft YaHei"/>
+              <a:cs typeface="Microsoft YaHei"/>
+            </a:endParaRPr>
+          </a:p>
+          <a:p>
             <a:pPr algn="l">
               <a:defRPr sz="1650" b="0" i="0">
                 <a:solidFill>
@@ -2012,12 +1867,17 @@
               <a:t>我们希望用开源引擎搭配平价无人机，把三维建模与场地分析变成每个人都能上手的工具。</a:t>
             </a:r>
           </a:p>
-          <a:p xmlns:a="http://schemas.openxmlformats.org/drawingml/2006/main">
-            <a:r>
-              <a:t/>
-            </a:r>
-          </a:p>
-          <a:p xmlns:a="http://schemas.openxmlformats.org/drawingml/2006/main">
+          <a:p>
+            <a:endParaRPr sz="1650" b="0" i="0">
+              <a:solidFill>
+                <a:srgbClr val="46525F"/>
+              </a:solidFill>
+              <a:latin typeface="Microsoft YaHei"/>
+              <a:ea typeface="Microsoft YaHei"/>
+              <a:cs typeface="Microsoft YaHei"/>
+            </a:endParaRPr>
+          </a:p>
+          <a:p>
             <a:pPr algn="l">
               <a:defRPr sz="1650" b="0" i="0">
                 <a:solidFill>
@@ -2044,30 +1904,30 @@
       </p:sp>
       <p:sp>
         <p:nvSpPr>
-          <p:cNvPr id="3" name="">
-            <a:extLst xmlns:a="http://schemas.openxmlformats.org/drawingml/2006/main">
+          <p:cNvPr id="3" name="椭圆 2">
+            <a:extLst>
               <a:ext uri="{FF2B5EF4-FFF2-40B4-BE49-F238E27FC236}">
                 <a16:creationId xmlns:a16="http://schemas.microsoft.com/office/drawing/2014/main" id="{1C140853-FDD0-4AA9-B582-E2599D5BC539}"/>
               </a:ext>
             </a:extLst>
           </p:cNvPr>
           <p:cNvSpPr>
-            <a:spLocks xmlns:a="http://schemas.openxmlformats.org/drawingml/2006/main" noGrp="1"/>
-          </p:cNvSpPr>
-          <p:nvPr/>
-        </p:nvSpPr>
-        <p:spPr>
-          <a:xfrm xmlns:a="http://schemas.openxmlformats.org/drawingml/2006/main">
+            <a:spLocks noGrp="1"/>
+          </p:cNvSpPr>
+          <p:nvPr/>
+        </p:nvSpPr>
+        <p:spPr>
+          <a:xfrm>
             <a:off x="6667500" y="1638300"/>
             <a:ext cx="209550" cy="209550"/>
           </a:xfrm>
-          <a:prstGeom xmlns:a="http://schemas.openxmlformats.org/drawingml/2006/main" prst="ellipse">
-            <a:avLst/>
-          </a:prstGeom>
-          <a:solidFill xmlns:a="http://schemas.openxmlformats.org/drawingml/2006/main">
+          <a:prstGeom prst="ellipse">
+            <a:avLst/>
+          </a:prstGeom>
+          <a:solidFill>
             <a:srgbClr val="C96F2A"/>
           </a:solidFill>
-          <a:ln xmlns:a="http://schemas.openxmlformats.org/drawingml/2006/main" w="0">
+          <a:ln w="0">
             <a:noFill/>
             <a:prstDash val="solid"/>
           </a:ln>
@@ -2075,36 +1935,36 @@
       </p:sp>
       <p:sp>
         <p:nvSpPr>
-          <p:cNvPr id="4" name="">
-            <a:extLst xmlns:a="http://schemas.openxmlformats.org/drawingml/2006/main">
+          <p:cNvPr id="4" name="矩形 3">
+            <a:extLst>
               <a:ext uri="{FF2B5EF4-FFF2-40B4-BE49-F238E27FC236}">
                 <a16:creationId xmlns:a16="http://schemas.microsoft.com/office/drawing/2014/main" id="{9EF392F6-8206-4F0F-B756-E83FC33CC86D}"/>
               </a:ext>
             </a:extLst>
           </p:cNvPr>
           <p:cNvSpPr>
-            <a:spLocks xmlns:a="http://schemas.openxmlformats.org/drawingml/2006/main" noGrp="1"/>
-          </p:cNvSpPr>
-          <p:nvPr/>
-        </p:nvSpPr>
-        <p:spPr>
-          <a:xfrm xmlns:a="http://schemas.openxmlformats.org/drawingml/2006/main">
+            <a:spLocks noGrp="1"/>
+          </p:cNvSpPr>
+          <p:nvPr/>
+        </p:nvSpPr>
+        <p:spPr>
+          <a:xfrm>
             <a:off x="7048500" y="1581150"/>
             <a:ext cx="4572000" cy="609600"/>
           </a:xfrm>
-          <a:prstGeom xmlns:a="http://schemas.openxmlformats.org/drawingml/2006/main" prst="rect">
-            <a:avLst/>
-          </a:prstGeom>
-          <a:noFill xmlns:a="http://schemas.openxmlformats.org/drawingml/2006/main"/>
-          <a:ln xmlns:a="http://schemas.openxmlformats.org/drawingml/2006/main" w="0">
+          <a:prstGeom prst="rect">
+            <a:avLst/>
+          </a:prstGeom>
+          <a:noFill/>
+          <a:ln w="0">
             <a:noFill/>
             <a:prstDash val="solid"/>
           </a:ln>
         </p:spPr>
         <p:txBody>
-          <a:bodyPr xmlns:a="http://schemas.openxmlformats.org/drawingml/2006/main" anchor="t"/>
-          <a:lstStyle xmlns:a="http://schemas.openxmlformats.org/drawingml/2006/main"/>
-          <a:p xmlns:a="http://schemas.openxmlformats.org/drawingml/2006/main">
+          <a:bodyPr anchor="t"/>
+          <a:lstStyle/>
+          <a:p>
             <a:pPr algn="l">
               <a:defRPr sz="1575" b="0" i="0">
                 <a:solidFill>
@@ -2131,30 +1991,30 @@
       </p:sp>
       <p:sp>
         <p:nvSpPr>
-          <p:cNvPr id="5" name="">
-            <a:extLst xmlns:a="http://schemas.openxmlformats.org/drawingml/2006/main">
+          <p:cNvPr id="5" name="椭圆 4">
+            <a:extLst>
               <a:ext uri="{FF2B5EF4-FFF2-40B4-BE49-F238E27FC236}">
                 <a16:creationId xmlns:a16="http://schemas.microsoft.com/office/drawing/2014/main" id="{F2554FD9-790F-45EC-A1B7-6C3A3D43853C}"/>
               </a:ext>
             </a:extLst>
           </p:cNvPr>
           <p:cNvSpPr>
-            <a:spLocks xmlns:a="http://schemas.openxmlformats.org/drawingml/2006/main" noGrp="1"/>
-          </p:cNvSpPr>
-          <p:nvPr/>
-        </p:nvSpPr>
-        <p:spPr>
-          <a:xfrm xmlns:a="http://schemas.openxmlformats.org/drawingml/2006/main">
+            <a:spLocks noGrp="1"/>
+          </p:cNvSpPr>
+          <p:nvPr/>
+        </p:nvSpPr>
+        <p:spPr>
+          <a:xfrm>
             <a:off x="6667500" y="2343150"/>
             <a:ext cx="209550" cy="209550"/>
           </a:xfrm>
-          <a:prstGeom xmlns:a="http://schemas.openxmlformats.org/drawingml/2006/main" prst="ellipse">
-            <a:avLst/>
-          </a:prstGeom>
-          <a:solidFill xmlns:a="http://schemas.openxmlformats.org/drawingml/2006/main">
+          <a:prstGeom prst="ellipse">
+            <a:avLst/>
+          </a:prstGeom>
+          <a:solidFill>
             <a:srgbClr val="C96F2A"/>
           </a:solidFill>
-          <a:ln xmlns:a="http://schemas.openxmlformats.org/drawingml/2006/main" w="0">
+          <a:ln w="0">
             <a:noFill/>
             <a:prstDash val="solid"/>
           </a:ln>
@@ -2162,36 +2022,36 @@
       </p:sp>
       <p:sp>
         <p:nvSpPr>
-          <p:cNvPr id="6" name="">
-            <a:extLst xmlns:a="http://schemas.openxmlformats.org/drawingml/2006/main">
+          <p:cNvPr id="6" name="矩形 5">
+            <a:extLst>
               <a:ext uri="{FF2B5EF4-FFF2-40B4-BE49-F238E27FC236}">
                 <a16:creationId xmlns:a16="http://schemas.microsoft.com/office/drawing/2014/main" id="{399D552D-548E-47F1-8E50-B3D2353277CF}"/>
               </a:ext>
             </a:extLst>
           </p:cNvPr>
           <p:cNvSpPr>
-            <a:spLocks xmlns:a="http://schemas.openxmlformats.org/drawingml/2006/main" noGrp="1"/>
-          </p:cNvSpPr>
-          <p:nvPr/>
-        </p:nvSpPr>
-        <p:spPr>
-          <a:xfrm xmlns:a="http://schemas.openxmlformats.org/drawingml/2006/main">
+            <a:spLocks noGrp="1"/>
+          </p:cNvSpPr>
+          <p:nvPr/>
+        </p:nvSpPr>
+        <p:spPr>
+          <a:xfrm>
             <a:off x="7048500" y="2286000"/>
             <a:ext cx="4572000" cy="609600"/>
           </a:xfrm>
-          <a:prstGeom xmlns:a="http://schemas.openxmlformats.org/drawingml/2006/main" prst="rect">
-            <a:avLst/>
-          </a:prstGeom>
-          <a:noFill xmlns:a="http://schemas.openxmlformats.org/drawingml/2006/main"/>
-          <a:ln xmlns:a="http://schemas.openxmlformats.org/drawingml/2006/main" w="0">
+          <a:prstGeom prst="rect">
+            <a:avLst/>
+          </a:prstGeom>
+          <a:noFill/>
+          <a:ln w="0">
             <a:noFill/>
             <a:prstDash val="solid"/>
           </a:ln>
         </p:spPr>
         <p:txBody>
-          <a:bodyPr xmlns:a="http://schemas.openxmlformats.org/drawingml/2006/main" anchor="t"/>
-          <a:lstStyle xmlns:a="http://schemas.openxmlformats.org/drawingml/2006/main"/>
-          <a:p xmlns:a="http://schemas.openxmlformats.org/drawingml/2006/main">
+          <a:bodyPr anchor="t"/>
+          <a:lstStyle/>
+          <a:p>
             <a:pPr algn="l">
               <a:defRPr sz="1575" b="0" i="0">
                 <a:solidFill>
@@ -2218,30 +2078,30 @@
       </p:sp>
       <p:sp>
         <p:nvSpPr>
-          <p:cNvPr id="7" name="">
-            <a:extLst xmlns:a="http://schemas.openxmlformats.org/drawingml/2006/main">
+          <p:cNvPr id="7" name="椭圆 6">
+            <a:extLst>
               <a:ext uri="{FF2B5EF4-FFF2-40B4-BE49-F238E27FC236}">
                 <a16:creationId xmlns:a16="http://schemas.microsoft.com/office/drawing/2014/main" id="{07604EB7-EA29-479F-8ACD-9D84F55E8FC2}"/>
               </a:ext>
             </a:extLst>
           </p:cNvPr>
           <p:cNvSpPr>
-            <a:spLocks xmlns:a="http://schemas.openxmlformats.org/drawingml/2006/main" noGrp="1"/>
-          </p:cNvSpPr>
-          <p:nvPr/>
-        </p:nvSpPr>
-        <p:spPr>
-          <a:xfrm xmlns:a="http://schemas.openxmlformats.org/drawingml/2006/main">
+            <a:spLocks noGrp="1"/>
+          </p:cNvSpPr>
+          <p:nvPr/>
+        </p:nvSpPr>
+        <p:spPr>
+          <a:xfrm>
             <a:off x="6667500" y="3048000"/>
             <a:ext cx="209550" cy="209550"/>
           </a:xfrm>
-          <a:prstGeom xmlns:a="http://schemas.openxmlformats.org/drawingml/2006/main" prst="ellipse">
-            <a:avLst/>
-          </a:prstGeom>
-          <a:solidFill xmlns:a="http://schemas.openxmlformats.org/drawingml/2006/main">
+          <a:prstGeom prst="ellipse">
+            <a:avLst/>
+          </a:prstGeom>
+          <a:solidFill>
             <a:srgbClr val="C96F2A"/>
           </a:solidFill>
-          <a:ln xmlns:a="http://schemas.openxmlformats.org/drawingml/2006/main" w="0">
+          <a:ln w="0">
             <a:noFill/>
             <a:prstDash val="solid"/>
           </a:ln>
@@ -2249,36 +2109,36 @@
       </p:sp>
       <p:sp>
         <p:nvSpPr>
-          <p:cNvPr id="8" name="">
-            <a:extLst xmlns:a="http://schemas.openxmlformats.org/drawingml/2006/main">
+          <p:cNvPr id="8" name="矩形 7">
+            <a:extLst>
               <a:ext uri="{FF2B5EF4-FFF2-40B4-BE49-F238E27FC236}">
                 <a16:creationId xmlns:a16="http://schemas.microsoft.com/office/drawing/2014/main" id="{B0605CF2-05CC-4C86-A571-1E497D779447}"/>
               </a:ext>
             </a:extLst>
           </p:cNvPr>
           <p:cNvSpPr>
-            <a:spLocks xmlns:a="http://schemas.openxmlformats.org/drawingml/2006/main" noGrp="1"/>
-          </p:cNvSpPr>
-          <p:nvPr/>
-        </p:nvSpPr>
-        <p:spPr>
-          <a:xfrm xmlns:a="http://schemas.openxmlformats.org/drawingml/2006/main">
+            <a:spLocks noGrp="1"/>
+          </p:cNvSpPr>
+          <p:nvPr/>
+        </p:nvSpPr>
+        <p:spPr>
+          <a:xfrm>
             <a:off x="7048500" y="2990850"/>
             <a:ext cx="4572000" cy="609600"/>
           </a:xfrm>
-          <a:prstGeom xmlns:a="http://schemas.openxmlformats.org/drawingml/2006/main" prst="rect">
-            <a:avLst/>
-          </a:prstGeom>
-          <a:noFill xmlns:a="http://schemas.openxmlformats.org/drawingml/2006/main"/>
-          <a:ln xmlns:a="http://schemas.openxmlformats.org/drawingml/2006/main" w="0">
+          <a:prstGeom prst="rect">
+            <a:avLst/>
+          </a:prstGeom>
+          <a:noFill/>
+          <a:ln w="0">
             <a:noFill/>
             <a:prstDash val="solid"/>
           </a:ln>
         </p:spPr>
         <p:txBody>
-          <a:bodyPr xmlns:a="http://schemas.openxmlformats.org/drawingml/2006/main" anchor="t"/>
-          <a:lstStyle xmlns:a="http://schemas.openxmlformats.org/drawingml/2006/main"/>
-          <a:p xmlns:a="http://schemas.openxmlformats.org/drawingml/2006/main">
+          <a:bodyPr anchor="t"/>
+          <a:lstStyle/>
+          <a:p>
             <a:pPr algn="l">
               <a:defRPr sz="1575" b="0" i="0">
                 <a:solidFill>
@@ -2305,30 +2165,30 @@
       </p:sp>
       <p:sp>
         <p:nvSpPr>
-          <p:cNvPr id="9" name="">
-            <a:extLst xmlns:a="http://schemas.openxmlformats.org/drawingml/2006/main">
+          <p:cNvPr id="9" name="椭圆 8">
+            <a:extLst>
               <a:ext uri="{FF2B5EF4-FFF2-40B4-BE49-F238E27FC236}">
                 <a16:creationId xmlns:a16="http://schemas.microsoft.com/office/drawing/2014/main" id="{5225AFAA-D398-4001-9C41-97271C04CE77}"/>
               </a:ext>
             </a:extLst>
           </p:cNvPr>
           <p:cNvSpPr>
-            <a:spLocks xmlns:a="http://schemas.openxmlformats.org/drawingml/2006/main" noGrp="1"/>
-          </p:cNvSpPr>
-          <p:nvPr/>
-        </p:nvSpPr>
-        <p:spPr>
-          <a:xfrm xmlns:a="http://schemas.openxmlformats.org/drawingml/2006/main">
+            <a:spLocks noGrp="1"/>
+          </p:cNvSpPr>
+          <p:nvPr/>
+        </p:nvSpPr>
+        <p:spPr>
+          <a:xfrm>
             <a:off x="6667500" y="3752850"/>
             <a:ext cx="209550" cy="209550"/>
           </a:xfrm>
-          <a:prstGeom xmlns:a="http://schemas.openxmlformats.org/drawingml/2006/main" prst="ellipse">
-            <a:avLst/>
-          </a:prstGeom>
-          <a:solidFill xmlns:a="http://schemas.openxmlformats.org/drawingml/2006/main">
+          <a:prstGeom prst="ellipse">
+            <a:avLst/>
+          </a:prstGeom>
+          <a:solidFill>
             <a:srgbClr val="C96F2A"/>
           </a:solidFill>
-          <a:ln xmlns:a="http://schemas.openxmlformats.org/drawingml/2006/main" w="0">
+          <a:ln w="0">
             <a:noFill/>
             <a:prstDash val="solid"/>
           </a:ln>
@@ -2336,36 +2196,36 @@
       </p:sp>
       <p:sp>
         <p:nvSpPr>
-          <p:cNvPr id="10" name="">
-            <a:extLst xmlns:a="http://schemas.openxmlformats.org/drawingml/2006/main">
+          <p:cNvPr id="10" name="矩形 9">
+            <a:extLst>
               <a:ext uri="{FF2B5EF4-FFF2-40B4-BE49-F238E27FC236}">
                 <a16:creationId xmlns:a16="http://schemas.microsoft.com/office/drawing/2014/main" id="{9C17ACB5-0281-443B-AFF4-FA81E99A21A3}"/>
               </a:ext>
             </a:extLst>
           </p:cNvPr>
           <p:cNvSpPr>
-            <a:spLocks xmlns:a="http://schemas.openxmlformats.org/drawingml/2006/main" noGrp="1"/>
-          </p:cNvSpPr>
-          <p:nvPr/>
-        </p:nvSpPr>
-        <p:spPr>
-          <a:xfrm xmlns:a="http://schemas.openxmlformats.org/drawingml/2006/main">
+            <a:spLocks noGrp="1"/>
+          </p:cNvSpPr>
+          <p:nvPr/>
+        </p:nvSpPr>
+        <p:spPr>
+          <a:xfrm>
             <a:off x="7048500" y="3695700"/>
             <a:ext cx="4572000" cy="609600"/>
           </a:xfrm>
-          <a:prstGeom xmlns:a="http://schemas.openxmlformats.org/drawingml/2006/main" prst="rect">
-            <a:avLst/>
-          </a:prstGeom>
-          <a:noFill xmlns:a="http://schemas.openxmlformats.org/drawingml/2006/main"/>
-          <a:ln xmlns:a="http://schemas.openxmlformats.org/drawingml/2006/main" w="0">
+          <a:prstGeom prst="rect">
+            <a:avLst/>
+          </a:prstGeom>
+          <a:noFill/>
+          <a:ln w="0">
             <a:noFill/>
             <a:prstDash val="solid"/>
           </a:ln>
         </p:spPr>
         <p:txBody>
-          <a:bodyPr xmlns:a="http://schemas.openxmlformats.org/drawingml/2006/main" anchor="t"/>
-          <a:lstStyle xmlns:a="http://schemas.openxmlformats.org/drawingml/2006/main"/>
-          <a:p xmlns:a="http://schemas.openxmlformats.org/drawingml/2006/main">
+          <a:bodyPr anchor="t"/>
+          <a:lstStyle/>
+          <a:p>
             <a:pPr algn="l">
               <a:defRPr sz="1575" b="0" i="0">
                 <a:solidFill>
@@ -2392,36 +2252,36 @@
       </p:sp>
       <p:sp>
         <p:nvSpPr>
-          <p:cNvPr id="11" name="">
-            <a:extLst xmlns:a="http://schemas.openxmlformats.org/drawingml/2006/main">
+          <p:cNvPr id="11" name="矩形 10">
+            <a:extLst>
               <a:ext uri="{FF2B5EF4-FFF2-40B4-BE49-F238E27FC236}">
                 <a16:creationId xmlns:a16="http://schemas.microsoft.com/office/drawing/2014/main" id="{0799AAD2-4D5D-4161-90D2-9E0FA0562120}"/>
               </a:ext>
             </a:extLst>
           </p:cNvPr>
           <p:cNvSpPr>
-            <a:spLocks xmlns:a="http://schemas.openxmlformats.org/drawingml/2006/main" noGrp="1"/>
-          </p:cNvSpPr>
-          <p:nvPr/>
-        </p:nvSpPr>
-        <p:spPr>
-          <a:xfrm xmlns:a="http://schemas.openxmlformats.org/drawingml/2006/main">
+            <a:spLocks noGrp="1"/>
+          </p:cNvSpPr>
+          <p:nvPr/>
+        </p:nvSpPr>
+        <p:spPr>
+          <a:xfrm>
             <a:off x="11334750" y="6362700"/>
             <a:ext cx="571500" cy="266700"/>
           </a:xfrm>
-          <a:prstGeom xmlns:a="http://schemas.openxmlformats.org/drawingml/2006/main" prst="rect">
-            <a:avLst/>
-          </a:prstGeom>
-          <a:noFill xmlns:a="http://schemas.openxmlformats.org/drawingml/2006/main"/>
-          <a:ln xmlns:a="http://schemas.openxmlformats.org/drawingml/2006/main" w="0">
+          <a:prstGeom prst="rect">
+            <a:avLst/>
+          </a:prstGeom>
+          <a:noFill/>
+          <a:ln w="0">
             <a:noFill/>
             <a:prstDash val="solid"/>
           </a:ln>
         </p:spPr>
         <p:txBody>
-          <a:bodyPr xmlns:a="http://schemas.openxmlformats.org/drawingml/2006/main" anchor="t"/>
-          <a:lstStyle xmlns:a="http://schemas.openxmlformats.org/drawingml/2006/main"/>
-          <a:p xmlns:a="http://schemas.openxmlformats.org/drawingml/2006/main">
+          <a:bodyPr anchor="t"/>
+          <a:lstStyle/>
+          <a:p>
             <a:pPr algn="r">
               <a:defRPr sz="1050" b="0" i="0">
                 <a:solidFill>
@@ -2448,36 +2308,36 @@
       </p:sp>
       <p:sp>
         <p:nvSpPr>
-          <p:cNvPr id="12" name="">
-            <a:extLst xmlns:a="http://schemas.openxmlformats.org/drawingml/2006/main">
+          <p:cNvPr id="12" name="矩形 11">
+            <a:extLst>
               <a:ext uri="{FF2B5EF4-FFF2-40B4-BE49-F238E27FC236}">
                 <a16:creationId xmlns:a16="http://schemas.microsoft.com/office/drawing/2014/main" id="{BE4B3CB0-6F57-47D9-813D-51D4CC1FA732}"/>
               </a:ext>
             </a:extLst>
           </p:cNvPr>
           <p:cNvSpPr>
-            <a:spLocks xmlns:a="http://schemas.openxmlformats.org/drawingml/2006/main" noGrp="1"/>
-          </p:cNvSpPr>
-          <p:nvPr/>
-        </p:nvSpPr>
-        <p:spPr>
-          <a:xfrm xmlns:a="http://schemas.openxmlformats.org/drawingml/2006/main">
+            <a:spLocks noGrp="1"/>
+          </p:cNvSpPr>
+          <p:nvPr/>
+        </p:nvSpPr>
+        <p:spPr>
+          <a:xfrm>
             <a:off x="571500" y="6362700"/>
             <a:ext cx="4762500" cy="266700"/>
           </a:xfrm>
-          <a:prstGeom xmlns:a="http://schemas.openxmlformats.org/drawingml/2006/main" prst="rect">
-            <a:avLst/>
-          </a:prstGeom>
-          <a:noFill xmlns:a="http://schemas.openxmlformats.org/drawingml/2006/main"/>
-          <a:ln xmlns:a="http://schemas.openxmlformats.org/drawingml/2006/main" w="0">
+          <a:prstGeom prst="rect">
+            <a:avLst/>
+          </a:prstGeom>
+          <a:noFill/>
+          <a:ln w="0">
             <a:noFill/>
             <a:prstDash val="solid"/>
           </a:ln>
         </p:spPr>
         <p:txBody>
-          <a:bodyPr xmlns:a="http://schemas.openxmlformats.org/drawingml/2006/main" anchor="t"/>
-          <a:lstStyle xmlns:a="http://schemas.openxmlformats.org/drawingml/2006/main"/>
-          <a:p xmlns:a="http://schemas.openxmlformats.org/drawingml/2006/main">
+          <a:bodyPr anchor="t"/>
+          <a:lstStyle/>
+          <a:p>
             <a:pPr algn="l">
               <a:defRPr sz="1050" b="0" i="0">
                 <a:solidFill>
@@ -2509,11 +2369,14 @@
       </p:ext>
     </p:extLst>
   </p:cSld>
+  <p:clrMapOvr>
+    <a:masterClrMapping/>
+  </p:clrMapOvr>
 </p:sld>
 </file>
 
 <file path=ppt/slides/slide3.xml><?xml version="1.0" encoding="utf-8"?>
-<p:sld xmlns:p="http://schemas.openxmlformats.org/presentationml/2006/main">
+<p:sld xmlns:a="http://schemas.openxmlformats.org/drawingml/2006/main" xmlns:r="http://schemas.openxmlformats.org/officeDocument/2006/relationships" xmlns:p="http://schemas.openxmlformats.org/presentationml/2006/main">
   <p:cSld>
     <p:spTree>
       <p:nvGrpSpPr>
@@ -2522,40 +2385,45 @@
         <p:nvPr/>
       </p:nvGrpSpPr>
       <p:grpSpPr>
-        <a:xfrm xmlns:a="http://schemas.openxmlformats.org/drawingml/2006/main"/>
+        <a:xfrm>
+          <a:off x="0" y="0"/>
+          <a:ext cx="0" cy="0"/>
+          <a:chOff x="0" y="0"/>
+          <a:chExt cx="0" cy="0"/>
+        </a:xfrm>
       </p:grpSpPr>
       <p:sp>
         <p:nvSpPr>
-          <p:cNvPr id="13" name="">
-            <a:extLst xmlns:a="http://schemas.openxmlformats.org/drawingml/2006/main">
+          <p:cNvPr id="13" name="矩形 12">
+            <a:extLst>
               <a:ext uri="{FF2B5EF4-FFF2-40B4-BE49-F238E27FC236}">
                 <a16:creationId xmlns:a16="http://schemas.microsoft.com/office/drawing/2014/main" id="{79E3C4D6-5324-4CD8-BC50-221EE7EEA9D5}"/>
               </a:ext>
             </a:extLst>
           </p:cNvPr>
           <p:cNvSpPr>
-            <a:spLocks xmlns:a="http://schemas.openxmlformats.org/drawingml/2006/main" noGrp="1"/>
-          </p:cNvSpPr>
-          <p:nvPr/>
-        </p:nvSpPr>
-        <p:spPr>
-          <a:xfrm xmlns:a="http://schemas.openxmlformats.org/drawingml/2006/main">
+            <a:spLocks noGrp="1"/>
+          </p:cNvSpPr>
+          <p:nvPr/>
+        </p:nvSpPr>
+        <p:spPr>
+          <a:xfrm>
             <a:off x="571500" y="495300"/>
             <a:ext cx="11049000" cy="571500"/>
           </a:xfrm>
-          <a:prstGeom xmlns:a="http://schemas.openxmlformats.org/drawingml/2006/main" prst="rect">
-            <a:avLst/>
-          </a:prstGeom>
-          <a:noFill xmlns:a="http://schemas.openxmlformats.org/drawingml/2006/main"/>
-          <a:ln xmlns:a="http://schemas.openxmlformats.org/drawingml/2006/main" w="0">
+          <a:prstGeom prst="rect">
+            <a:avLst/>
+          </a:prstGeom>
+          <a:noFill/>
+          <a:ln w="0">
             <a:noFill/>
             <a:prstDash val="solid"/>
           </a:ln>
         </p:spPr>
         <p:txBody>
-          <a:bodyPr xmlns:a="http://schemas.openxmlformats.org/drawingml/2006/main" anchor="t"/>
-          <a:lstStyle xmlns:a="http://schemas.openxmlformats.org/drawingml/2006/main"/>
-          <a:p xmlns:a="http://schemas.openxmlformats.org/drawingml/2006/main">
+          <a:bodyPr anchor="t"/>
+          <a:lstStyle/>
+          <a:p>
             <a:pPr algn="l">
               <a:defRPr sz="3525" b="1" i="0">
                 <a:solidFill>
@@ -2582,36 +2450,36 @@
       </p:sp>
       <p:sp>
         <p:nvSpPr>
-          <p:cNvPr id="2" name="">
-            <a:extLst xmlns:a="http://schemas.openxmlformats.org/drawingml/2006/main">
+          <p:cNvPr id="2" name="矩形 1">
+            <a:extLst>
               <a:ext uri="{FF2B5EF4-FFF2-40B4-BE49-F238E27FC236}">
                 <a16:creationId xmlns:a16="http://schemas.microsoft.com/office/drawing/2014/main" id="{C89B3D84-3849-4805-A40B-2AE10F8B806E}"/>
               </a:ext>
             </a:extLst>
           </p:cNvPr>
           <p:cNvSpPr>
-            <a:spLocks xmlns:a="http://schemas.openxmlformats.org/drawingml/2006/main" noGrp="1"/>
-          </p:cNvSpPr>
-          <p:nvPr/>
-        </p:nvSpPr>
-        <p:spPr>
-          <a:xfrm xmlns:a="http://schemas.openxmlformats.org/drawingml/2006/main">
+            <a:spLocks noGrp="1"/>
+          </p:cNvSpPr>
+          <p:nvPr/>
+        </p:nvSpPr>
+        <p:spPr>
+          <a:xfrm>
             <a:off x="571500" y="1428750"/>
             <a:ext cx="5334000" cy="2857500"/>
           </a:xfrm>
-          <a:prstGeom xmlns:a="http://schemas.openxmlformats.org/drawingml/2006/main" prst="rect">
-            <a:avLst/>
-          </a:prstGeom>
-          <a:noFill xmlns:a="http://schemas.openxmlformats.org/drawingml/2006/main"/>
-          <a:ln xmlns:a="http://schemas.openxmlformats.org/drawingml/2006/main" w="0">
+          <a:prstGeom prst="rect">
+            <a:avLst/>
+          </a:prstGeom>
+          <a:noFill/>
+          <a:ln w="0">
             <a:noFill/>
             <a:prstDash val="solid"/>
           </a:ln>
         </p:spPr>
         <p:txBody>
-          <a:bodyPr xmlns:a="http://schemas.openxmlformats.org/drawingml/2006/main" anchor="t"/>
-          <a:lstStyle xmlns:a="http://schemas.openxmlformats.org/drawingml/2006/main"/>
-          <a:p xmlns:a="http://schemas.openxmlformats.org/drawingml/2006/main">
+          <a:bodyPr anchor="t"/>
+          <a:lstStyle/>
+          <a:p>
             <a:pPr algn="l">
               <a:defRPr sz="1650" b="0" i="0">
                 <a:solidFill>
@@ -2638,30 +2506,30 @@
       </p:sp>
       <p:sp>
         <p:nvSpPr>
-          <p:cNvPr id="3" name="">
-            <a:extLst xmlns:a="http://schemas.openxmlformats.org/drawingml/2006/main">
+          <p:cNvPr id="3" name="椭圆 2">
+            <a:extLst>
               <a:ext uri="{FF2B5EF4-FFF2-40B4-BE49-F238E27FC236}">
                 <a16:creationId xmlns:a16="http://schemas.microsoft.com/office/drawing/2014/main" id="{80E8DDDC-7840-4EA5-A6BC-A63EE1569A4D}"/>
               </a:ext>
             </a:extLst>
           </p:cNvPr>
           <p:cNvSpPr>
-            <a:spLocks xmlns:a="http://schemas.openxmlformats.org/drawingml/2006/main" noGrp="1"/>
-          </p:cNvSpPr>
-          <p:nvPr/>
-        </p:nvSpPr>
-        <p:spPr>
-          <a:xfrm xmlns:a="http://schemas.openxmlformats.org/drawingml/2006/main">
+            <a:spLocks noGrp="1"/>
+          </p:cNvSpPr>
+          <p:nvPr/>
+        </p:nvSpPr>
+        <p:spPr>
+          <a:xfrm>
             <a:off x="6667500" y="1638300"/>
             <a:ext cx="209550" cy="209550"/>
           </a:xfrm>
-          <a:prstGeom xmlns:a="http://schemas.openxmlformats.org/drawingml/2006/main" prst="ellipse">
-            <a:avLst/>
-          </a:prstGeom>
-          <a:solidFill xmlns:a="http://schemas.openxmlformats.org/drawingml/2006/main">
+          <a:prstGeom prst="ellipse">
+            <a:avLst/>
+          </a:prstGeom>
+          <a:solidFill>
             <a:srgbClr val="C96F2A"/>
           </a:solidFill>
-          <a:ln xmlns:a="http://schemas.openxmlformats.org/drawingml/2006/main" w="0">
+          <a:ln w="0">
             <a:noFill/>
             <a:prstDash val="solid"/>
           </a:ln>
@@ -2669,36 +2537,36 @@
       </p:sp>
       <p:sp>
         <p:nvSpPr>
-          <p:cNvPr id="4" name="">
-            <a:extLst xmlns:a="http://schemas.openxmlformats.org/drawingml/2006/main">
+          <p:cNvPr id="4" name="矩形 3">
+            <a:extLst>
               <a:ext uri="{FF2B5EF4-FFF2-40B4-BE49-F238E27FC236}">
                 <a16:creationId xmlns:a16="http://schemas.microsoft.com/office/drawing/2014/main" id="{16F04878-60BA-4E4E-9EEF-EDFFE1D79CB1}"/>
               </a:ext>
             </a:extLst>
           </p:cNvPr>
           <p:cNvSpPr>
-            <a:spLocks xmlns:a="http://schemas.openxmlformats.org/drawingml/2006/main" noGrp="1"/>
-          </p:cNvSpPr>
-          <p:nvPr/>
-        </p:nvSpPr>
-        <p:spPr>
-          <a:xfrm xmlns:a="http://schemas.openxmlformats.org/drawingml/2006/main">
+            <a:spLocks noGrp="1"/>
+          </p:cNvSpPr>
+          <p:nvPr/>
+        </p:nvSpPr>
+        <p:spPr>
+          <a:xfrm>
             <a:off x="7048500" y="1581150"/>
             <a:ext cx="4572000" cy="609600"/>
           </a:xfrm>
-          <a:prstGeom xmlns:a="http://schemas.openxmlformats.org/drawingml/2006/main" prst="rect">
-            <a:avLst/>
-          </a:prstGeom>
-          <a:noFill xmlns:a="http://schemas.openxmlformats.org/drawingml/2006/main"/>
-          <a:ln xmlns:a="http://schemas.openxmlformats.org/drawingml/2006/main" w="0">
+          <a:prstGeom prst="rect">
+            <a:avLst/>
+          </a:prstGeom>
+          <a:noFill/>
+          <a:ln w="0">
             <a:noFill/>
             <a:prstDash val="solid"/>
           </a:ln>
         </p:spPr>
         <p:txBody>
-          <a:bodyPr xmlns:a="http://schemas.openxmlformats.org/drawingml/2006/main" anchor="t"/>
-          <a:lstStyle xmlns:a="http://schemas.openxmlformats.org/drawingml/2006/main"/>
-          <a:p xmlns:a="http://schemas.openxmlformats.org/drawingml/2006/main">
+          <a:bodyPr anchor="t"/>
+          <a:lstStyle/>
+          <a:p>
             <a:pPr algn="l">
               <a:defRPr sz="1575" b="0" i="0">
                 <a:solidFill>
@@ -2725,30 +2593,30 @@
       </p:sp>
       <p:sp>
         <p:nvSpPr>
-          <p:cNvPr id="5" name="">
-            <a:extLst xmlns:a="http://schemas.openxmlformats.org/drawingml/2006/main">
+          <p:cNvPr id="5" name="椭圆 4">
+            <a:extLst>
               <a:ext uri="{FF2B5EF4-FFF2-40B4-BE49-F238E27FC236}">
                 <a16:creationId xmlns:a16="http://schemas.microsoft.com/office/drawing/2014/main" id="{FEE2BA24-977C-48CD-9900-BE76CC948911}"/>
               </a:ext>
             </a:extLst>
           </p:cNvPr>
           <p:cNvSpPr>
-            <a:spLocks xmlns:a="http://schemas.openxmlformats.org/drawingml/2006/main" noGrp="1"/>
-          </p:cNvSpPr>
-          <p:nvPr/>
-        </p:nvSpPr>
-        <p:spPr>
-          <a:xfrm xmlns:a="http://schemas.openxmlformats.org/drawingml/2006/main">
+            <a:spLocks noGrp="1"/>
+          </p:cNvSpPr>
+          <p:nvPr/>
+        </p:nvSpPr>
+        <p:spPr>
+          <a:xfrm>
             <a:off x="6667500" y="2343150"/>
             <a:ext cx="209550" cy="209550"/>
           </a:xfrm>
-          <a:prstGeom xmlns:a="http://schemas.openxmlformats.org/drawingml/2006/main" prst="ellipse">
-            <a:avLst/>
-          </a:prstGeom>
-          <a:solidFill xmlns:a="http://schemas.openxmlformats.org/drawingml/2006/main">
+          <a:prstGeom prst="ellipse">
+            <a:avLst/>
+          </a:prstGeom>
+          <a:solidFill>
             <a:srgbClr val="C96F2A"/>
           </a:solidFill>
-          <a:ln xmlns:a="http://schemas.openxmlformats.org/drawingml/2006/main" w="0">
+          <a:ln w="0">
             <a:noFill/>
             <a:prstDash val="solid"/>
           </a:ln>
@@ -2756,36 +2624,36 @@
       </p:sp>
       <p:sp>
         <p:nvSpPr>
-          <p:cNvPr id="6" name="">
-            <a:extLst xmlns:a="http://schemas.openxmlformats.org/drawingml/2006/main">
+          <p:cNvPr id="6" name="矩形 5">
+            <a:extLst>
               <a:ext uri="{FF2B5EF4-FFF2-40B4-BE49-F238E27FC236}">
                 <a16:creationId xmlns:a16="http://schemas.microsoft.com/office/drawing/2014/main" id="{014AFD15-F1D9-457A-A33B-B3ED5673EC92}"/>
               </a:ext>
             </a:extLst>
           </p:cNvPr>
           <p:cNvSpPr>
-            <a:spLocks xmlns:a="http://schemas.openxmlformats.org/drawingml/2006/main" noGrp="1"/>
-          </p:cNvSpPr>
-          <p:nvPr/>
-        </p:nvSpPr>
-        <p:spPr>
-          <a:xfrm xmlns:a="http://schemas.openxmlformats.org/drawingml/2006/main">
+            <a:spLocks noGrp="1"/>
+          </p:cNvSpPr>
+          <p:nvPr/>
+        </p:nvSpPr>
+        <p:spPr>
+          <a:xfrm>
             <a:off x="7048500" y="2286000"/>
             <a:ext cx="4572000" cy="609600"/>
           </a:xfrm>
-          <a:prstGeom xmlns:a="http://schemas.openxmlformats.org/drawingml/2006/main" prst="rect">
-            <a:avLst/>
-          </a:prstGeom>
-          <a:noFill xmlns:a="http://schemas.openxmlformats.org/drawingml/2006/main"/>
-          <a:ln xmlns:a="http://schemas.openxmlformats.org/drawingml/2006/main" w="0">
+          <a:prstGeom prst="rect">
+            <a:avLst/>
+          </a:prstGeom>
+          <a:noFill/>
+          <a:ln w="0">
             <a:noFill/>
             <a:prstDash val="solid"/>
           </a:ln>
         </p:spPr>
         <p:txBody>
-          <a:bodyPr xmlns:a="http://schemas.openxmlformats.org/drawingml/2006/main" anchor="t"/>
-          <a:lstStyle xmlns:a="http://schemas.openxmlformats.org/drawingml/2006/main"/>
-          <a:p xmlns:a="http://schemas.openxmlformats.org/drawingml/2006/main">
+          <a:bodyPr anchor="t"/>
+          <a:lstStyle/>
+          <a:p>
             <a:pPr algn="l">
               <a:defRPr sz="1575" b="0" i="0">
                 <a:solidFill>
@@ -2812,30 +2680,30 @@
       </p:sp>
       <p:sp>
         <p:nvSpPr>
-          <p:cNvPr id="7" name="">
-            <a:extLst xmlns:a="http://schemas.openxmlformats.org/drawingml/2006/main">
+          <p:cNvPr id="7" name="椭圆 6">
+            <a:extLst>
               <a:ext uri="{FF2B5EF4-FFF2-40B4-BE49-F238E27FC236}">
                 <a16:creationId xmlns:a16="http://schemas.microsoft.com/office/drawing/2014/main" id="{07C5AB94-33CE-45AB-9D2D-C0A2ECE692E1}"/>
               </a:ext>
             </a:extLst>
           </p:cNvPr>
           <p:cNvSpPr>
-            <a:spLocks xmlns:a="http://schemas.openxmlformats.org/drawingml/2006/main" noGrp="1"/>
-          </p:cNvSpPr>
-          <p:nvPr/>
-        </p:nvSpPr>
-        <p:spPr>
-          <a:xfrm xmlns:a="http://schemas.openxmlformats.org/drawingml/2006/main">
+            <a:spLocks noGrp="1"/>
+          </p:cNvSpPr>
+          <p:nvPr/>
+        </p:nvSpPr>
+        <p:spPr>
+          <a:xfrm>
             <a:off x="6667500" y="3048000"/>
             <a:ext cx="209550" cy="209550"/>
           </a:xfrm>
-          <a:prstGeom xmlns:a="http://schemas.openxmlformats.org/drawingml/2006/main" prst="ellipse">
-            <a:avLst/>
-          </a:prstGeom>
-          <a:solidFill xmlns:a="http://schemas.openxmlformats.org/drawingml/2006/main">
+          <a:prstGeom prst="ellipse">
+            <a:avLst/>
+          </a:prstGeom>
+          <a:solidFill>
             <a:srgbClr val="C96F2A"/>
           </a:solidFill>
-          <a:ln xmlns:a="http://schemas.openxmlformats.org/drawingml/2006/main" w="0">
+          <a:ln w="0">
             <a:noFill/>
             <a:prstDash val="solid"/>
           </a:ln>
@@ -2843,36 +2711,36 @@
       </p:sp>
       <p:sp>
         <p:nvSpPr>
-          <p:cNvPr id="8" name="">
-            <a:extLst xmlns:a="http://schemas.openxmlformats.org/drawingml/2006/main">
+          <p:cNvPr id="8" name="矩形 7">
+            <a:extLst>
               <a:ext uri="{FF2B5EF4-FFF2-40B4-BE49-F238E27FC236}">
                 <a16:creationId xmlns:a16="http://schemas.microsoft.com/office/drawing/2014/main" id="{6A76FE65-2ACF-457D-B8F0-4ADD046CF7B6}"/>
               </a:ext>
             </a:extLst>
           </p:cNvPr>
           <p:cNvSpPr>
-            <a:spLocks xmlns:a="http://schemas.openxmlformats.org/drawingml/2006/main" noGrp="1"/>
-          </p:cNvSpPr>
-          <p:nvPr/>
-        </p:nvSpPr>
-        <p:spPr>
-          <a:xfrm xmlns:a="http://schemas.openxmlformats.org/drawingml/2006/main">
+            <a:spLocks noGrp="1"/>
+          </p:cNvSpPr>
+          <p:nvPr/>
+        </p:nvSpPr>
+        <p:spPr>
+          <a:xfrm>
             <a:off x="7048500" y="2990850"/>
             <a:ext cx="4572000" cy="609600"/>
           </a:xfrm>
-          <a:prstGeom xmlns:a="http://schemas.openxmlformats.org/drawingml/2006/main" prst="rect">
-            <a:avLst/>
-          </a:prstGeom>
-          <a:noFill xmlns:a="http://schemas.openxmlformats.org/drawingml/2006/main"/>
-          <a:ln xmlns:a="http://schemas.openxmlformats.org/drawingml/2006/main" w="0">
+          <a:prstGeom prst="rect">
+            <a:avLst/>
+          </a:prstGeom>
+          <a:noFill/>
+          <a:ln w="0">
             <a:noFill/>
             <a:prstDash val="solid"/>
           </a:ln>
         </p:spPr>
         <p:txBody>
-          <a:bodyPr xmlns:a="http://schemas.openxmlformats.org/drawingml/2006/main" anchor="t"/>
-          <a:lstStyle xmlns:a="http://schemas.openxmlformats.org/drawingml/2006/main"/>
-          <a:p xmlns:a="http://schemas.openxmlformats.org/drawingml/2006/main">
+          <a:bodyPr anchor="t"/>
+          <a:lstStyle/>
+          <a:p>
             <a:pPr algn="l">
               <a:defRPr sz="1575" b="0" i="0">
                 <a:solidFill>
@@ -2899,30 +2767,30 @@
       </p:sp>
       <p:sp>
         <p:nvSpPr>
-          <p:cNvPr id="9" name="">
-            <a:extLst xmlns:a="http://schemas.openxmlformats.org/drawingml/2006/main">
+          <p:cNvPr id="9" name="椭圆 8">
+            <a:extLst>
               <a:ext uri="{FF2B5EF4-FFF2-40B4-BE49-F238E27FC236}">
                 <a16:creationId xmlns:a16="http://schemas.microsoft.com/office/drawing/2014/main" id="{1204EE75-5F8C-4797-B408-96C2FFD64E59}"/>
               </a:ext>
             </a:extLst>
           </p:cNvPr>
           <p:cNvSpPr>
-            <a:spLocks xmlns:a="http://schemas.openxmlformats.org/drawingml/2006/main" noGrp="1"/>
-          </p:cNvSpPr>
-          <p:nvPr/>
-        </p:nvSpPr>
-        <p:spPr>
-          <a:xfrm xmlns:a="http://schemas.openxmlformats.org/drawingml/2006/main">
+            <a:spLocks noGrp="1"/>
+          </p:cNvSpPr>
+          <p:nvPr/>
+        </p:nvSpPr>
+        <p:spPr>
+          <a:xfrm>
             <a:off x="6667500" y="3752850"/>
             <a:ext cx="209550" cy="209550"/>
           </a:xfrm>
-          <a:prstGeom xmlns:a="http://schemas.openxmlformats.org/drawingml/2006/main" prst="ellipse">
-            <a:avLst/>
-          </a:prstGeom>
-          <a:solidFill xmlns:a="http://schemas.openxmlformats.org/drawingml/2006/main">
+          <a:prstGeom prst="ellipse">
+            <a:avLst/>
+          </a:prstGeom>
+          <a:solidFill>
             <a:srgbClr val="C96F2A"/>
           </a:solidFill>
-          <a:ln xmlns:a="http://schemas.openxmlformats.org/drawingml/2006/main" w="0">
+          <a:ln w="0">
             <a:noFill/>
             <a:prstDash val="solid"/>
           </a:ln>
@@ -2930,36 +2798,36 @@
       </p:sp>
       <p:sp>
         <p:nvSpPr>
-          <p:cNvPr id="10" name="">
-            <a:extLst xmlns:a="http://schemas.openxmlformats.org/drawingml/2006/main">
+          <p:cNvPr id="10" name="矩形 9">
+            <a:extLst>
               <a:ext uri="{FF2B5EF4-FFF2-40B4-BE49-F238E27FC236}">
                 <a16:creationId xmlns:a16="http://schemas.microsoft.com/office/drawing/2014/main" id="{7D46350E-E40C-4661-A778-7184BB74A55E}"/>
               </a:ext>
             </a:extLst>
           </p:cNvPr>
           <p:cNvSpPr>
-            <a:spLocks xmlns:a="http://schemas.openxmlformats.org/drawingml/2006/main" noGrp="1"/>
-          </p:cNvSpPr>
-          <p:nvPr/>
-        </p:nvSpPr>
-        <p:spPr>
-          <a:xfrm xmlns:a="http://schemas.openxmlformats.org/drawingml/2006/main">
+            <a:spLocks noGrp="1"/>
+          </p:cNvSpPr>
+          <p:nvPr/>
+        </p:nvSpPr>
+        <p:spPr>
+          <a:xfrm>
             <a:off x="7048500" y="3695700"/>
             <a:ext cx="4572000" cy="609600"/>
           </a:xfrm>
-          <a:prstGeom xmlns:a="http://schemas.openxmlformats.org/drawingml/2006/main" prst="rect">
-            <a:avLst/>
-          </a:prstGeom>
-          <a:noFill xmlns:a="http://schemas.openxmlformats.org/drawingml/2006/main"/>
-          <a:ln xmlns:a="http://schemas.openxmlformats.org/drawingml/2006/main" w="0">
+          <a:prstGeom prst="rect">
+            <a:avLst/>
+          </a:prstGeom>
+          <a:noFill/>
+          <a:ln w="0">
             <a:noFill/>
             <a:prstDash val="solid"/>
           </a:ln>
         </p:spPr>
         <p:txBody>
-          <a:bodyPr xmlns:a="http://schemas.openxmlformats.org/drawingml/2006/main" anchor="t"/>
-          <a:lstStyle xmlns:a="http://schemas.openxmlformats.org/drawingml/2006/main"/>
-          <a:p xmlns:a="http://schemas.openxmlformats.org/drawingml/2006/main">
+          <a:bodyPr anchor="t"/>
+          <a:lstStyle/>
+          <a:p>
             <a:pPr algn="l">
               <a:defRPr sz="1575" b="0" i="0">
                 <a:solidFill>
@@ -2986,36 +2854,36 @@
       </p:sp>
       <p:sp>
         <p:nvSpPr>
-          <p:cNvPr id="11" name="">
-            <a:extLst xmlns:a="http://schemas.openxmlformats.org/drawingml/2006/main">
+          <p:cNvPr id="11" name="矩形 10">
+            <a:extLst>
               <a:ext uri="{FF2B5EF4-FFF2-40B4-BE49-F238E27FC236}">
                 <a16:creationId xmlns:a16="http://schemas.microsoft.com/office/drawing/2014/main" id="{4104B780-E05F-4AE3-929D-0B9209FE9B0E}"/>
               </a:ext>
             </a:extLst>
           </p:cNvPr>
           <p:cNvSpPr>
-            <a:spLocks xmlns:a="http://schemas.openxmlformats.org/drawingml/2006/main" noGrp="1"/>
-          </p:cNvSpPr>
-          <p:nvPr/>
-        </p:nvSpPr>
-        <p:spPr>
-          <a:xfrm xmlns:a="http://schemas.openxmlformats.org/drawingml/2006/main">
+            <a:spLocks noGrp="1"/>
+          </p:cNvSpPr>
+          <p:nvPr/>
+        </p:nvSpPr>
+        <p:spPr>
+          <a:xfrm>
             <a:off x="11334750" y="6362700"/>
             <a:ext cx="571500" cy="266700"/>
           </a:xfrm>
-          <a:prstGeom xmlns:a="http://schemas.openxmlformats.org/drawingml/2006/main" prst="rect">
-            <a:avLst/>
-          </a:prstGeom>
-          <a:noFill xmlns:a="http://schemas.openxmlformats.org/drawingml/2006/main"/>
-          <a:ln xmlns:a="http://schemas.openxmlformats.org/drawingml/2006/main" w="0">
+          <a:prstGeom prst="rect">
+            <a:avLst/>
+          </a:prstGeom>
+          <a:noFill/>
+          <a:ln w="0">
             <a:noFill/>
             <a:prstDash val="solid"/>
           </a:ln>
         </p:spPr>
         <p:txBody>
-          <a:bodyPr xmlns:a="http://schemas.openxmlformats.org/drawingml/2006/main" anchor="t"/>
-          <a:lstStyle xmlns:a="http://schemas.openxmlformats.org/drawingml/2006/main"/>
-          <a:p xmlns:a="http://schemas.openxmlformats.org/drawingml/2006/main">
+          <a:bodyPr anchor="t"/>
+          <a:lstStyle/>
+          <a:p>
             <a:pPr algn="r">
               <a:defRPr sz="1050" b="0" i="0">
                 <a:solidFill>
@@ -3042,36 +2910,36 @@
       </p:sp>
       <p:sp>
         <p:nvSpPr>
-          <p:cNvPr id="12" name="">
-            <a:extLst xmlns:a="http://schemas.openxmlformats.org/drawingml/2006/main">
+          <p:cNvPr id="12" name="矩形 11">
+            <a:extLst>
               <a:ext uri="{FF2B5EF4-FFF2-40B4-BE49-F238E27FC236}">
                 <a16:creationId xmlns:a16="http://schemas.microsoft.com/office/drawing/2014/main" id="{7DA410D9-C318-4EDC-BB44-85F15D439D20}"/>
               </a:ext>
             </a:extLst>
           </p:cNvPr>
           <p:cNvSpPr>
-            <a:spLocks xmlns:a="http://schemas.openxmlformats.org/drawingml/2006/main" noGrp="1"/>
-          </p:cNvSpPr>
-          <p:nvPr/>
-        </p:nvSpPr>
-        <p:spPr>
-          <a:xfrm xmlns:a="http://schemas.openxmlformats.org/drawingml/2006/main">
+            <a:spLocks noGrp="1"/>
+          </p:cNvSpPr>
+          <p:nvPr/>
+        </p:nvSpPr>
+        <p:spPr>
+          <a:xfrm>
             <a:off x="571500" y="6362700"/>
             <a:ext cx="4762500" cy="266700"/>
           </a:xfrm>
-          <a:prstGeom xmlns:a="http://schemas.openxmlformats.org/drawingml/2006/main" prst="rect">
-            <a:avLst/>
-          </a:prstGeom>
-          <a:noFill xmlns:a="http://schemas.openxmlformats.org/drawingml/2006/main"/>
-          <a:ln xmlns:a="http://schemas.openxmlformats.org/drawingml/2006/main" w="0">
+          <a:prstGeom prst="rect">
+            <a:avLst/>
+          </a:prstGeom>
+          <a:noFill/>
+          <a:ln w="0">
             <a:noFill/>
             <a:prstDash val="solid"/>
           </a:ln>
         </p:spPr>
         <p:txBody>
-          <a:bodyPr xmlns:a="http://schemas.openxmlformats.org/drawingml/2006/main" anchor="t"/>
-          <a:lstStyle xmlns:a="http://schemas.openxmlformats.org/drawingml/2006/main"/>
-          <a:p xmlns:a="http://schemas.openxmlformats.org/drawingml/2006/main">
+          <a:bodyPr anchor="t"/>
+          <a:lstStyle/>
+          <a:p>
             <a:pPr algn="l">
               <a:defRPr sz="1050" b="0" i="0">
                 <a:solidFill>
@@ -3103,11 +2971,14 @@
       </p:ext>
     </p:extLst>
   </p:cSld>
+  <p:clrMapOvr>
+    <a:masterClrMapping/>
+  </p:clrMapOvr>
 </p:sld>
 </file>
 
 <file path=ppt/slides/slide4.xml><?xml version="1.0" encoding="utf-8"?>
-<p:sld xmlns:p="http://schemas.openxmlformats.org/presentationml/2006/main">
+<p:sld xmlns:a="http://schemas.openxmlformats.org/drawingml/2006/main" xmlns:r="http://schemas.openxmlformats.org/officeDocument/2006/relationships" xmlns:p="http://schemas.openxmlformats.org/presentationml/2006/main">
   <p:cSld>
     <p:spTree>
       <p:nvGrpSpPr>
@@ -3116,40 +2987,45 @@
         <p:nvPr/>
       </p:nvGrpSpPr>
       <p:grpSpPr>
-        <a:xfrm xmlns:a="http://schemas.openxmlformats.org/drawingml/2006/main"/>
+        <a:xfrm>
+          <a:off x="0" y="0"/>
+          <a:ext cx="0" cy="0"/>
+          <a:chOff x="0" y="0"/>
+          <a:chExt cx="0" cy="0"/>
+        </a:xfrm>
       </p:grpSpPr>
       <p:sp>
         <p:nvSpPr>
-          <p:cNvPr id="5" name="">
-            <a:extLst xmlns:a="http://schemas.openxmlformats.org/drawingml/2006/main">
+          <p:cNvPr id="5" name="矩形 4">
+            <a:extLst>
               <a:ext uri="{FF2B5EF4-FFF2-40B4-BE49-F238E27FC236}">
                 <a16:creationId xmlns:a16="http://schemas.microsoft.com/office/drawing/2014/main" id="{1A628918-CFBE-4572-989B-2AF365CE4889}"/>
               </a:ext>
             </a:extLst>
           </p:cNvPr>
           <p:cNvSpPr>
-            <a:spLocks xmlns:a="http://schemas.openxmlformats.org/drawingml/2006/main" noGrp="1"/>
-          </p:cNvSpPr>
-          <p:nvPr/>
-        </p:nvSpPr>
-        <p:spPr>
-          <a:xfrm xmlns:a="http://schemas.openxmlformats.org/drawingml/2006/main">
+            <a:spLocks noGrp="1"/>
+          </p:cNvSpPr>
+          <p:nvPr/>
+        </p:nvSpPr>
+        <p:spPr>
+          <a:xfrm>
             <a:off x="571500" y="495300"/>
             <a:ext cx="11049000" cy="571500"/>
           </a:xfrm>
-          <a:prstGeom xmlns:a="http://schemas.openxmlformats.org/drawingml/2006/main" prst="rect">
-            <a:avLst/>
-          </a:prstGeom>
-          <a:noFill xmlns:a="http://schemas.openxmlformats.org/drawingml/2006/main"/>
-          <a:ln xmlns:a="http://schemas.openxmlformats.org/drawingml/2006/main" w="0">
+          <a:prstGeom prst="rect">
+            <a:avLst/>
+          </a:prstGeom>
+          <a:noFill/>
+          <a:ln w="0">
             <a:noFill/>
             <a:prstDash val="solid"/>
           </a:ln>
         </p:spPr>
         <p:txBody>
-          <a:bodyPr xmlns:a="http://schemas.openxmlformats.org/drawingml/2006/main" anchor="t"/>
-          <a:lstStyle xmlns:a="http://schemas.openxmlformats.org/drawingml/2006/main"/>
-          <a:p xmlns:a="http://schemas.openxmlformats.org/drawingml/2006/main">
+          <a:bodyPr anchor="t"/>
+          <a:lstStyle/>
+          <a:p>
             <a:pPr algn="l">
               <a:defRPr sz="3525" b="1" i="0">
                 <a:solidFill>
@@ -3176,22 +3052,40 @@
       </p:sp>
       <p:graphicFrame>
         <p:nvGraphicFramePr>
-          <p:cNvPr id="6" name=""/>
+          <p:cNvPr id="6" name="表格 5"/>
           <p:cNvGraphicFramePr/>
           <p:nvPr/>
         </p:nvGraphicFramePr>
         <p:xfrm>
-          <a:off xmlns:a="http://schemas.openxmlformats.org/drawingml/2006/main" x="571500" y="1524000"/>
-          <a:ext xmlns:a="http://schemas.openxmlformats.org/drawingml/2006/main" cx="11049000" cy="3619500"/>
+          <a:off x="571500" y="1524000"/>
+          <a:ext cx="11049000" cy="3619500"/>
         </p:xfrm>
-        <a:graphic xmlns:a="http://schemas.openxmlformats.org/drawingml/2006/main">
+        <a:graphic>
           <a:graphicData uri="http://schemas.openxmlformats.org/drawingml/2006/table">
             <a:tbl>
               <a:tblPr/>
               <a:tblGrid>
-                <a:gridCol w="2209800"/>
-                <a:gridCol w="4419600"/>
-                <a:gridCol w="4419600"/>
+                <a:gridCol w="2209800">
+                  <a:extLst>
+                    <a:ext uri="{9D8B030D-6E8A-4147-A177-3AD203B41FA5}">
+                      <a16:colId xmlns:a16="http://schemas.microsoft.com/office/drawing/2014/main" val="20000"/>
+                    </a:ext>
+                  </a:extLst>
+                </a:gridCol>
+                <a:gridCol w="4419600">
+                  <a:extLst>
+                    <a:ext uri="{9D8B030D-6E8A-4147-A177-3AD203B41FA5}">
+                      <a16:colId xmlns:a16="http://schemas.microsoft.com/office/drawing/2014/main" val="20001"/>
+                    </a:ext>
+                  </a:extLst>
+                </a:gridCol>
+                <a:gridCol w="4419600">
+                  <a:extLst>
+                    <a:ext uri="{9D8B030D-6E8A-4147-A177-3AD203B41FA5}">
+                      <a16:colId xmlns:a16="http://schemas.microsoft.com/office/drawing/2014/main" val="20002"/>
+                    </a:ext>
+                  </a:extLst>
+                </a:gridCol>
               </a:tblGrid>
               <a:tr h="723900">
                 <a:tc>
@@ -3213,7 +3107,7 @@
                       </a:r>
                     </a:p>
                   </a:txBody>
-                  <a:tcPr marL="91440" marR="91440" marT="45720" marB="45720" anchor="ctr">
+                  <a:tcPr anchor="ctr">
                     <a:solidFill>
                       <a:srgbClr val="1C2735"/>
                     </a:solidFill>
@@ -3238,7 +3132,7 @@
                       </a:r>
                     </a:p>
                   </a:txBody>
-                  <a:tcPr marL="91440" marR="91440" marT="45720" marB="45720" anchor="ctr">
+                  <a:tcPr anchor="ctr">
                     <a:solidFill>
                       <a:srgbClr val="1C2735"/>
                     </a:solidFill>
@@ -3263,12 +3157,17 @@
                       </a:r>
                     </a:p>
                   </a:txBody>
-                  <a:tcPr marL="91440" marR="91440" marT="45720" marB="45720" anchor="ctr">
+                  <a:tcPr anchor="ctr">
                     <a:solidFill>
                       <a:srgbClr val="1C2735"/>
                     </a:solidFill>
                   </a:tcPr>
                 </a:tc>
+                <a:extLst>
+                  <a:ext uri="{0D108BD9-81ED-4DB2-BD59-A6C34878D82A}">
+                    <a16:rowId xmlns:a16="http://schemas.microsoft.com/office/drawing/2014/main" val="10000"/>
+                  </a:ext>
+                </a:extLst>
               </a:tr>
               <a:tr h="723900">
                 <a:tc>
@@ -3290,7 +3189,7 @@
                       </a:r>
                     </a:p>
                   </a:txBody>
-                  <a:tcPr marL="91440" marR="91440" marT="45720" marB="45720" anchor="ctr"/>
+                  <a:tcPr anchor="ctr"/>
                 </a:tc>
                 <a:tc>
                   <a:txBody>
@@ -3325,7 +3224,7 @@
                       </a:r>
                     </a:p>
                   </a:txBody>
-                  <a:tcPr marL="91440" marR="91440" marT="45720" marB="45720" anchor="ctr"/>
+                  <a:tcPr anchor="ctr"/>
                 </a:tc>
                 <a:tc>
                   <a:txBody>
@@ -3360,8 +3259,13 @@
                       </a:r>
                     </a:p>
                   </a:txBody>
-                  <a:tcPr marL="91440" marR="91440" marT="45720" marB="45720" anchor="ctr"/>
+                  <a:tcPr anchor="ctr"/>
                 </a:tc>
+                <a:extLst>
+                  <a:ext uri="{0D108BD9-81ED-4DB2-BD59-A6C34878D82A}">
+                    <a16:rowId xmlns:a16="http://schemas.microsoft.com/office/drawing/2014/main" val="10001"/>
+                  </a:ext>
+                </a:extLst>
               </a:tr>
               <a:tr h="723900">
                 <a:tc>
@@ -3383,7 +3287,7 @@
                       </a:r>
                     </a:p>
                   </a:txBody>
-                  <a:tcPr marL="91440" marR="91440" marT="45720" marB="45720" anchor="ctr"/>
+                  <a:tcPr anchor="ctr"/>
                 </a:tc>
                 <a:tc>
                   <a:txBody>
@@ -3418,7 +3322,7 @@
                       </a:r>
                     </a:p>
                   </a:txBody>
-                  <a:tcPr marL="91440" marR="91440" marT="45720" marB="45720" anchor="ctr"/>
+                  <a:tcPr anchor="ctr"/>
                 </a:tc>
                 <a:tc>
                   <a:txBody>
@@ -3453,8 +3357,13 @@
                       </a:r>
                     </a:p>
                   </a:txBody>
-                  <a:tcPr marL="91440" marR="91440" marT="45720" marB="45720" anchor="ctr"/>
+                  <a:tcPr anchor="ctr"/>
                 </a:tc>
+                <a:extLst>
+                  <a:ext uri="{0D108BD9-81ED-4DB2-BD59-A6C34878D82A}">
+                    <a16:rowId xmlns:a16="http://schemas.microsoft.com/office/drawing/2014/main" val="10002"/>
+                  </a:ext>
+                </a:extLst>
               </a:tr>
               <a:tr h="723900">
                 <a:tc>
@@ -3476,7 +3385,7 @@
                       </a:r>
                     </a:p>
                   </a:txBody>
-                  <a:tcPr marL="91440" marR="91440" marT="45720" marB="45720" anchor="ctr"/>
+                  <a:tcPr anchor="ctr"/>
                 </a:tc>
                 <a:tc>
                   <a:txBody>
@@ -3497,7 +3406,7 @@
                       </a:r>
                     </a:p>
                   </a:txBody>
-                  <a:tcPr marL="91440" marR="91440" marT="45720" marB="45720" anchor="ctr"/>
+                  <a:tcPr anchor="ctr"/>
                 </a:tc>
                 <a:tc>
                   <a:txBody>
@@ -3518,8 +3427,13 @@
                       </a:r>
                     </a:p>
                   </a:txBody>
-                  <a:tcPr marL="91440" marR="91440" marT="45720" marB="45720" anchor="ctr"/>
+                  <a:tcPr anchor="ctr"/>
                 </a:tc>
+                <a:extLst>
+                  <a:ext uri="{0D108BD9-81ED-4DB2-BD59-A6C34878D82A}">
+                    <a16:rowId xmlns:a16="http://schemas.microsoft.com/office/drawing/2014/main" val="10003"/>
+                  </a:ext>
+                </a:extLst>
               </a:tr>
               <a:tr h="723900">
                 <a:tc>
@@ -3541,7 +3455,7 @@
                       </a:r>
                     </a:p>
                   </a:txBody>
-                  <a:tcPr marL="91440" marR="91440" marT="45720" marB="45720" anchor="ctr"/>
+                  <a:tcPr anchor="ctr"/>
                 </a:tc>
                 <a:tc>
                   <a:txBody>
@@ -3562,7 +3476,7 @@
                       </a:r>
                     </a:p>
                   </a:txBody>
-                  <a:tcPr marL="91440" marR="91440" marT="45720" marB="45720" anchor="ctr"/>
+                  <a:tcPr anchor="ctr"/>
                 </a:tc>
                 <a:tc>
                   <a:txBody>
@@ -3583,8 +3497,13 @@
                       </a:r>
                     </a:p>
                   </a:txBody>
-                  <a:tcPr marL="91440" marR="91440" marT="45720" marB="45720" anchor="ctr"/>
+                  <a:tcPr anchor="ctr"/>
                 </a:tc>
+                <a:extLst>
+                  <a:ext uri="{0D108BD9-81ED-4DB2-BD59-A6C34878D82A}">
+                    <a16:rowId xmlns:a16="http://schemas.microsoft.com/office/drawing/2014/main" val="10004"/>
+                  </a:ext>
+                </a:extLst>
               </a:tr>
             </a:tbl>
           </a:graphicData>
@@ -3592,36 +3511,36 @@
       </p:graphicFrame>
       <p:sp>
         <p:nvSpPr>
-          <p:cNvPr id="3" name="">
-            <a:extLst xmlns:a="http://schemas.openxmlformats.org/drawingml/2006/main">
+          <p:cNvPr id="3" name="矩形 2">
+            <a:extLst>
               <a:ext uri="{FF2B5EF4-FFF2-40B4-BE49-F238E27FC236}">
                 <a16:creationId xmlns:a16="http://schemas.microsoft.com/office/drawing/2014/main" id="{B70B1EBB-B279-45B5-8354-C2CE9A0F7EAC}"/>
               </a:ext>
             </a:extLst>
           </p:cNvPr>
           <p:cNvSpPr>
-            <a:spLocks xmlns:a="http://schemas.openxmlformats.org/drawingml/2006/main" noGrp="1"/>
-          </p:cNvSpPr>
-          <p:nvPr/>
-        </p:nvSpPr>
-        <p:spPr>
-          <a:xfrm xmlns:a="http://schemas.openxmlformats.org/drawingml/2006/main">
+            <a:spLocks noGrp="1"/>
+          </p:cNvSpPr>
+          <p:nvPr/>
+        </p:nvSpPr>
+        <p:spPr>
+          <a:xfrm>
             <a:off x="11334750" y="6362700"/>
             <a:ext cx="571500" cy="266700"/>
           </a:xfrm>
-          <a:prstGeom xmlns:a="http://schemas.openxmlformats.org/drawingml/2006/main" prst="rect">
-            <a:avLst/>
-          </a:prstGeom>
-          <a:noFill xmlns:a="http://schemas.openxmlformats.org/drawingml/2006/main"/>
-          <a:ln xmlns:a="http://schemas.openxmlformats.org/drawingml/2006/main" w="0">
+          <a:prstGeom prst="rect">
+            <a:avLst/>
+          </a:prstGeom>
+          <a:noFill/>
+          <a:ln w="0">
             <a:noFill/>
             <a:prstDash val="solid"/>
           </a:ln>
         </p:spPr>
         <p:txBody>
-          <a:bodyPr xmlns:a="http://schemas.openxmlformats.org/drawingml/2006/main" anchor="t"/>
-          <a:lstStyle xmlns:a="http://schemas.openxmlformats.org/drawingml/2006/main"/>
-          <a:p xmlns:a="http://schemas.openxmlformats.org/drawingml/2006/main">
+          <a:bodyPr anchor="t"/>
+          <a:lstStyle/>
+          <a:p>
             <a:pPr algn="r">
               <a:defRPr sz="1050" b="0" i="0">
                 <a:solidFill>
@@ -3648,36 +3567,36 @@
       </p:sp>
       <p:sp>
         <p:nvSpPr>
-          <p:cNvPr id="4" name="">
-            <a:extLst xmlns:a="http://schemas.openxmlformats.org/drawingml/2006/main">
+          <p:cNvPr id="4" name="矩形 3">
+            <a:extLst>
               <a:ext uri="{FF2B5EF4-FFF2-40B4-BE49-F238E27FC236}">
                 <a16:creationId xmlns:a16="http://schemas.microsoft.com/office/drawing/2014/main" id="{18EB5E6B-99E9-4864-B4F7-7028768D7B8B}"/>
               </a:ext>
             </a:extLst>
           </p:cNvPr>
           <p:cNvSpPr>
-            <a:spLocks xmlns:a="http://schemas.openxmlformats.org/drawingml/2006/main" noGrp="1"/>
-          </p:cNvSpPr>
-          <p:nvPr/>
-        </p:nvSpPr>
-        <p:spPr>
-          <a:xfrm xmlns:a="http://schemas.openxmlformats.org/drawingml/2006/main">
+            <a:spLocks noGrp="1"/>
+          </p:cNvSpPr>
+          <p:nvPr/>
+        </p:nvSpPr>
+        <p:spPr>
+          <a:xfrm>
             <a:off x="571500" y="6362700"/>
             <a:ext cx="4762500" cy="266700"/>
           </a:xfrm>
-          <a:prstGeom xmlns:a="http://schemas.openxmlformats.org/drawingml/2006/main" prst="rect">
-            <a:avLst/>
-          </a:prstGeom>
-          <a:noFill xmlns:a="http://schemas.openxmlformats.org/drawingml/2006/main"/>
-          <a:ln xmlns:a="http://schemas.openxmlformats.org/drawingml/2006/main" w="0">
+          <a:prstGeom prst="rect">
+            <a:avLst/>
+          </a:prstGeom>
+          <a:noFill/>
+          <a:ln w="0">
             <a:noFill/>
             <a:prstDash val="solid"/>
           </a:ln>
         </p:spPr>
         <p:txBody>
-          <a:bodyPr xmlns:a="http://schemas.openxmlformats.org/drawingml/2006/main" anchor="t"/>
-          <a:lstStyle xmlns:a="http://schemas.openxmlformats.org/drawingml/2006/main"/>
-          <a:p xmlns:a="http://schemas.openxmlformats.org/drawingml/2006/main">
+          <a:bodyPr anchor="t"/>
+          <a:lstStyle/>
+          <a:p>
             <a:pPr algn="l">
               <a:defRPr sz="1050" b="0" i="0">
                 <a:solidFill>
@@ -3709,11 +3628,14 @@
       </p:ext>
     </p:extLst>
   </p:cSld>
+  <p:clrMapOvr>
+    <a:masterClrMapping/>
+  </p:clrMapOvr>
 </p:sld>
 </file>
 
 <file path=ppt/slides/slide5.xml><?xml version="1.0" encoding="utf-8"?>
-<p:sld xmlns:p="http://schemas.openxmlformats.org/presentationml/2006/main">
+<p:sld xmlns:a="http://schemas.openxmlformats.org/drawingml/2006/main" xmlns:r="http://schemas.openxmlformats.org/officeDocument/2006/relationships" xmlns:p="http://schemas.openxmlformats.org/presentationml/2006/main">
   <p:cSld>
     <p:spTree>
       <p:nvGrpSpPr>
@@ -3722,40 +3644,45 @@
         <p:nvPr/>
       </p:nvGrpSpPr>
       <p:grpSpPr>
-        <a:xfrm xmlns:a="http://schemas.openxmlformats.org/drawingml/2006/main"/>
+        <a:xfrm>
+          <a:off x="0" y="0"/>
+          <a:ext cx="0" cy="0"/>
+          <a:chOff x="0" y="0"/>
+          <a:chExt cx="0" cy="0"/>
+        </a:xfrm>
       </p:grpSpPr>
       <p:sp>
         <p:nvSpPr>
-          <p:cNvPr id="17" name="">
-            <a:extLst xmlns:a="http://schemas.openxmlformats.org/drawingml/2006/main">
+          <p:cNvPr id="17" name="矩形 16">
+            <a:extLst>
               <a:ext uri="{FF2B5EF4-FFF2-40B4-BE49-F238E27FC236}">
                 <a16:creationId xmlns:a16="http://schemas.microsoft.com/office/drawing/2014/main" id="{811E43AA-FCA4-4867-9AE7-6AFAF4580D8F}"/>
               </a:ext>
             </a:extLst>
           </p:cNvPr>
           <p:cNvSpPr>
-            <a:spLocks xmlns:a="http://schemas.openxmlformats.org/drawingml/2006/main" noGrp="1"/>
-          </p:cNvSpPr>
-          <p:nvPr/>
-        </p:nvSpPr>
-        <p:spPr>
-          <a:xfrm xmlns:a="http://schemas.openxmlformats.org/drawingml/2006/main">
+            <a:spLocks noGrp="1"/>
+          </p:cNvSpPr>
+          <p:nvPr/>
+        </p:nvSpPr>
+        <p:spPr>
+          <a:xfrm>
             <a:off x="571500" y="495300"/>
             <a:ext cx="11049000" cy="571500"/>
           </a:xfrm>
-          <a:prstGeom xmlns:a="http://schemas.openxmlformats.org/drawingml/2006/main" prst="rect">
-            <a:avLst/>
-          </a:prstGeom>
-          <a:noFill xmlns:a="http://schemas.openxmlformats.org/drawingml/2006/main"/>
-          <a:ln xmlns:a="http://schemas.openxmlformats.org/drawingml/2006/main" w="0">
+          <a:prstGeom prst="rect">
+            <a:avLst/>
+          </a:prstGeom>
+          <a:noFill/>
+          <a:ln w="0">
             <a:noFill/>
             <a:prstDash val="solid"/>
           </a:ln>
         </p:spPr>
         <p:txBody>
-          <a:bodyPr xmlns:a="http://schemas.openxmlformats.org/drawingml/2006/main" anchor="t"/>
-          <a:lstStyle xmlns:a="http://schemas.openxmlformats.org/drawingml/2006/main"/>
-          <a:p xmlns:a="http://schemas.openxmlformats.org/drawingml/2006/main">
+          <a:bodyPr anchor="t"/>
+          <a:lstStyle/>
+          <a:p>
             <a:pPr algn="l">
               <a:defRPr sz="3525" b="1" i="0">
                 <a:solidFill>
@@ -3782,32 +3709,32 @@
       </p:sp>
       <p:sp>
         <p:nvSpPr>
-          <p:cNvPr id="2" name="">
-            <a:extLst xmlns:a="http://schemas.openxmlformats.org/drawingml/2006/main">
+          <p:cNvPr id="2" name="矩形: 圆角 1">
+            <a:extLst>
               <a:ext uri="{FF2B5EF4-FFF2-40B4-BE49-F238E27FC236}">
                 <a16:creationId xmlns:a16="http://schemas.microsoft.com/office/drawing/2014/main" id="{E67E651E-A8E4-466B-A433-422881A49268}"/>
               </a:ext>
             </a:extLst>
           </p:cNvPr>
           <p:cNvSpPr>
-            <a:spLocks xmlns:a="http://schemas.openxmlformats.org/drawingml/2006/main" noGrp="1"/>
-          </p:cNvSpPr>
-          <p:nvPr/>
-        </p:nvSpPr>
-        <p:spPr>
-          <a:xfrm xmlns:a="http://schemas.openxmlformats.org/drawingml/2006/main">
+            <a:spLocks noGrp="1"/>
+          </p:cNvSpPr>
+          <p:nvPr/>
+        </p:nvSpPr>
+        <p:spPr>
+          <a:xfrm>
             <a:off x="571500" y="1619250"/>
             <a:ext cx="3429000" cy="3619500"/>
           </a:xfrm>
-          <a:prstGeom xmlns:a="http://schemas.openxmlformats.org/drawingml/2006/main" prst="roundRect">
+          <a:prstGeom prst="roundRect">
             <a:avLst>
               <a:gd name="adj" fmla="val 6667"/>
             </a:avLst>
           </a:prstGeom>
-          <a:solidFill xmlns:a="http://schemas.openxmlformats.org/drawingml/2006/main">
+          <a:solidFill>
             <a:srgbClr val="EDEDED"/>
           </a:solidFill>
-          <a:ln xmlns:a="http://schemas.openxmlformats.org/drawingml/2006/main" w="9525">
+          <a:ln w="9525">
             <a:solidFill>
               <a:srgbClr val="B8BCC4"/>
             </a:solidFill>
@@ -3817,36 +3744,36 @@
       </p:sp>
       <p:sp>
         <p:nvSpPr>
-          <p:cNvPr id="3" name="">
-            <a:extLst xmlns:a="http://schemas.openxmlformats.org/drawingml/2006/main">
+          <p:cNvPr id="3" name="矩形 2">
+            <a:extLst>
               <a:ext uri="{FF2B5EF4-FFF2-40B4-BE49-F238E27FC236}">
                 <a16:creationId xmlns:a16="http://schemas.microsoft.com/office/drawing/2014/main" id="{E18C7FFB-946F-4E4F-9E4E-7351D7836038}"/>
               </a:ext>
             </a:extLst>
           </p:cNvPr>
           <p:cNvSpPr>
-            <a:spLocks xmlns:a="http://schemas.openxmlformats.org/drawingml/2006/main" noGrp="1"/>
-          </p:cNvSpPr>
-          <p:nvPr/>
-        </p:nvSpPr>
-        <p:spPr>
-          <a:xfrm xmlns:a="http://schemas.openxmlformats.org/drawingml/2006/main">
+            <a:spLocks noGrp="1"/>
+          </p:cNvSpPr>
+          <p:nvPr/>
+        </p:nvSpPr>
+        <p:spPr>
+          <a:xfrm>
             <a:off x="876300" y="1905000"/>
             <a:ext cx="1143000" cy="666750"/>
           </a:xfrm>
-          <a:prstGeom xmlns:a="http://schemas.openxmlformats.org/drawingml/2006/main" prst="rect">
-            <a:avLst/>
-          </a:prstGeom>
-          <a:noFill xmlns:a="http://schemas.openxmlformats.org/drawingml/2006/main"/>
-          <a:ln xmlns:a="http://schemas.openxmlformats.org/drawingml/2006/main" w="0">
+          <a:prstGeom prst="rect">
+            <a:avLst/>
+          </a:prstGeom>
+          <a:noFill/>
+          <a:ln w="0">
             <a:noFill/>
             <a:prstDash val="solid"/>
           </a:ln>
         </p:spPr>
         <p:txBody>
-          <a:bodyPr xmlns:a="http://schemas.openxmlformats.org/drawingml/2006/main" anchor="t"/>
-          <a:lstStyle xmlns:a="http://schemas.openxmlformats.org/drawingml/2006/main"/>
-          <a:p xmlns:a="http://schemas.openxmlformats.org/drawingml/2006/main">
+          <a:bodyPr anchor="t"/>
+          <a:lstStyle/>
+          <a:p>
             <a:pPr algn="l">
               <a:defRPr sz="3900" b="1" i="0">
                 <a:solidFill>
@@ -3873,36 +3800,36 @@
       </p:sp>
       <p:sp>
         <p:nvSpPr>
-          <p:cNvPr id="4" name="">
-            <a:extLst xmlns:a="http://schemas.openxmlformats.org/drawingml/2006/main">
+          <p:cNvPr id="4" name="矩形 3">
+            <a:extLst>
               <a:ext uri="{FF2B5EF4-FFF2-40B4-BE49-F238E27FC236}">
                 <a16:creationId xmlns:a16="http://schemas.microsoft.com/office/drawing/2014/main" id="{7A76B0FF-C336-447B-8B95-742EF4311A20}"/>
               </a:ext>
             </a:extLst>
           </p:cNvPr>
           <p:cNvSpPr>
-            <a:spLocks xmlns:a="http://schemas.openxmlformats.org/drawingml/2006/main" noGrp="1"/>
-          </p:cNvSpPr>
-          <p:nvPr/>
-        </p:nvSpPr>
-        <p:spPr>
-          <a:xfrm xmlns:a="http://schemas.openxmlformats.org/drawingml/2006/main">
+            <a:spLocks noGrp="1"/>
+          </p:cNvSpPr>
+          <p:nvPr/>
+        </p:nvSpPr>
+        <p:spPr>
+          <a:xfrm>
             <a:off x="876300" y="2857500"/>
             <a:ext cx="2857500" cy="419100"/>
           </a:xfrm>
-          <a:prstGeom xmlns:a="http://schemas.openxmlformats.org/drawingml/2006/main" prst="rect">
-            <a:avLst/>
-          </a:prstGeom>
-          <a:noFill xmlns:a="http://schemas.openxmlformats.org/drawingml/2006/main"/>
-          <a:ln xmlns:a="http://schemas.openxmlformats.org/drawingml/2006/main" w="0">
+          <a:prstGeom prst="rect">
+            <a:avLst/>
+          </a:prstGeom>
+          <a:noFill/>
+          <a:ln w="0">
             <a:noFill/>
             <a:prstDash val="solid"/>
           </a:ln>
         </p:spPr>
         <p:txBody>
-          <a:bodyPr xmlns:a="http://schemas.openxmlformats.org/drawingml/2006/main" anchor="t"/>
-          <a:lstStyle xmlns:a="http://schemas.openxmlformats.org/drawingml/2006/main"/>
-          <a:p xmlns:a="http://schemas.openxmlformats.org/drawingml/2006/main">
+          <a:bodyPr anchor="t"/>
+          <a:lstStyle/>
+          <a:p>
             <a:pPr algn="l">
               <a:defRPr sz="2250" b="1" i="0">
                 <a:solidFill>
@@ -3929,36 +3856,36 @@
       </p:sp>
       <p:sp>
         <p:nvSpPr>
-          <p:cNvPr id="5" name="">
-            <a:extLst xmlns:a="http://schemas.openxmlformats.org/drawingml/2006/main">
+          <p:cNvPr id="5" name="矩形 4">
+            <a:extLst>
               <a:ext uri="{FF2B5EF4-FFF2-40B4-BE49-F238E27FC236}">
                 <a16:creationId xmlns:a16="http://schemas.microsoft.com/office/drawing/2014/main" id="{0F0B77CF-9A17-4FB2-83A5-505ED841AFBD}"/>
               </a:ext>
             </a:extLst>
           </p:cNvPr>
           <p:cNvSpPr>
-            <a:spLocks xmlns:a="http://schemas.openxmlformats.org/drawingml/2006/main" noGrp="1"/>
-          </p:cNvSpPr>
-          <p:nvPr/>
-        </p:nvSpPr>
-        <p:spPr>
-          <a:xfrm xmlns:a="http://schemas.openxmlformats.org/drawingml/2006/main">
+            <a:spLocks noGrp="1"/>
+          </p:cNvSpPr>
+          <p:nvPr/>
+        </p:nvSpPr>
+        <p:spPr>
+          <a:xfrm>
             <a:off x="876300" y="3409950"/>
             <a:ext cx="2857500" cy="1428750"/>
           </a:xfrm>
-          <a:prstGeom xmlns:a="http://schemas.openxmlformats.org/drawingml/2006/main" prst="rect">
-            <a:avLst/>
-          </a:prstGeom>
-          <a:noFill xmlns:a="http://schemas.openxmlformats.org/drawingml/2006/main"/>
-          <a:ln xmlns:a="http://schemas.openxmlformats.org/drawingml/2006/main" w="0">
+          <a:prstGeom prst="rect">
+            <a:avLst/>
+          </a:prstGeom>
+          <a:noFill/>
+          <a:ln w="0">
             <a:noFill/>
             <a:prstDash val="solid"/>
           </a:ln>
         </p:spPr>
         <p:txBody>
-          <a:bodyPr xmlns:a="http://schemas.openxmlformats.org/drawingml/2006/main" anchor="t"/>
-          <a:lstStyle xmlns:a="http://schemas.openxmlformats.org/drawingml/2006/main"/>
-          <a:p xmlns:a="http://schemas.openxmlformats.org/drawingml/2006/main">
+          <a:bodyPr anchor="t"/>
+          <a:lstStyle/>
+          <a:p>
             <a:pPr algn="l">
               <a:defRPr sz="1350" b="0" i="0">
                 <a:solidFill>
@@ -3985,32 +3912,32 @@
       </p:sp>
       <p:sp>
         <p:nvSpPr>
-          <p:cNvPr id="6" name="">
-            <a:extLst xmlns:a="http://schemas.openxmlformats.org/drawingml/2006/main">
+          <p:cNvPr id="6" name="矩形: 圆角 5">
+            <a:extLst>
               <a:ext uri="{FF2B5EF4-FFF2-40B4-BE49-F238E27FC236}">
                 <a16:creationId xmlns:a16="http://schemas.microsoft.com/office/drawing/2014/main" id="{E91DB62B-F8E1-449D-95D6-E2ACE84FE387}"/>
               </a:ext>
             </a:extLst>
           </p:cNvPr>
           <p:cNvSpPr>
-            <a:spLocks xmlns:a="http://schemas.openxmlformats.org/drawingml/2006/main" noGrp="1"/>
-          </p:cNvSpPr>
-          <p:nvPr/>
-        </p:nvSpPr>
-        <p:spPr>
-          <a:xfrm xmlns:a="http://schemas.openxmlformats.org/drawingml/2006/main">
+            <a:spLocks noGrp="1"/>
+          </p:cNvSpPr>
+          <p:nvPr/>
+        </p:nvSpPr>
+        <p:spPr>
+          <a:xfrm>
             <a:off x="4381500" y="1619250"/>
             <a:ext cx="3429000" cy="3619500"/>
           </a:xfrm>
-          <a:prstGeom xmlns:a="http://schemas.openxmlformats.org/drawingml/2006/main" prst="roundRect">
+          <a:prstGeom prst="roundRect">
             <a:avLst>
               <a:gd name="adj" fmla="val 6667"/>
             </a:avLst>
           </a:prstGeom>
-          <a:solidFill xmlns:a="http://schemas.openxmlformats.org/drawingml/2006/main">
+          <a:solidFill>
             <a:srgbClr val="EDEDED"/>
           </a:solidFill>
-          <a:ln xmlns:a="http://schemas.openxmlformats.org/drawingml/2006/main" w="9525">
+          <a:ln w="9525">
             <a:solidFill>
               <a:srgbClr val="B8BCC4"/>
             </a:solidFill>
@@ -4020,36 +3947,36 @@
       </p:sp>
       <p:sp>
         <p:nvSpPr>
-          <p:cNvPr id="7" name="">
-            <a:extLst xmlns:a="http://schemas.openxmlformats.org/drawingml/2006/main">
+          <p:cNvPr id="7" name="矩形 6">
+            <a:extLst>
               <a:ext uri="{FF2B5EF4-FFF2-40B4-BE49-F238E27FC236}">
                 <a16:creationId xmlns:a16="http://schemas.microsoft.com/office/drawing/2014/main" id="{DB50DD65-BD40-4674-9858-C9E8D4B3ECF0}"/>
               </a:ext>
             </a:extLst>
           </p:cNvPr>
           <p:cNvSpPr>
-            <a:spLocks xmlns:a="http://schemas.openxmlformats.org/drawingml/2006/main" noGrp="1"/>
-          </p:cNvSpPr>
-          <p:nvPr/>
-        </p:nvSpPr>
-        <p:spPr>
-          <a:xfrm xmlns:a="http://schemas.openxmlformats.org/drawingml/2006/main">
+            <a:spLocks noGrp="1"/>
+          </p:cNvSpPr>
+          <p:nvPr/>
+        </p:nvSpPr>
+        <p:spPr>
+          <a:xfrm>
             <a:off x="4686300" y="1905000"/>
             <a:ext cx="1143000" cy="666750"/>
           </a:xfrm>
-          <a:prstGeom xmlns:a="http://schemas.openxmlformats.org/drawingml/2006/main" prst="rect">
-            <a:avLst/>
-          </a:prstGeom>
-          <a:noFill xmlns:a="http://schemas.openxmlformats.org/drawingml/2006/main"/>
-          <a:ln xmlns:a="http://schemas.openxmlformats.org/drawingml/2006/main" w="0">
+          <a:prstGeom prst="rect">
+            <a:avLst/>
+          </a:prstGeom>
+          <a:noFill/>
+          <a:ln w="0">
             <a:noFill/>
             <a:prstDash val="solid"/>
           </a:ln>
         </p:spPr>
         <p:txBody>
-          <a:bodyPr xmlns:a="http://schemas.openxmlformats.org/drawingml/2006/main" anchor="t"/>
-          <a:lstStyle xmlns:a="http://schemas.openxmlformats.org/drawingml/2006/main"/>
-          <a:p xmlns:a="http://schemas.openxmlformats.org/drawingml/2006/main">
+          <a:bodyPr anchor="t"/>
+          <a:lstStyle/>
+          <a:p>
             <a:pPr algn="l">
               <a:defRPr sz="3900" b="1" i="0">
                 <a:solidFill>
@@ -4076,36 +4003,36 @@
       </p:sp>
       <p:sp>
         <p:nvSpPr>
-          <p:cNvPr id="8" name="">
-            <a:extLst xmlns:a="http://schemas.openxmlformats.org/drawingml/2006/main">
+          <p:cNvPr id="8" name="矩形 7">
+            <a:extLst>
               <a:ext uri="{FF2B5EF4-FFF2-40B4-BE49-F238E27FC236}">
                 <a16:creationId xmlns:a16="http://schemas.microsoft.com/office/drawing/2014/main" id="{E500BBB1-5428-45FA-8976-04243E78B4B2}"/>
               </a:ext>
             </a:extLst>
           </p:cNvPr>
           <p:cNvSpPr>
-            <a:spLocks xmlns:a="http://schemas.openxmlformats.org/drawingml/2006/main" noGrp="1"/>
-          </p:cNvSpPr>
-          <p:nvPr/>
-        </p:nvSpPr>
-        <p:spPr>
-          <a:xfrm xmlns:a="http://schemas.openxmlformats.org/drawingml/2006/main">
+            <a:spLocks noGrp="1"/>
+          </p:cNvSpPr>
+          <p:nvPr/>
+        </p:nvSpPr>
+        <p:spPr>
+          <a:xfrm>
             <a:off x="4686300" y="2857500"/>
             <a:ext cx="2857500" cy="419100"/>
           </a:xfrm>
-          <a:prstGeom xmlns:a="http://schemas.openxmlformats.org/drawingml/2006/main" prst="rect">
-            <a:avLst/>
-          </a:prstGeom>
-          <a:noFill xmlns:a="http://schemas.openxmlformats.org/drawingml/2006/main"/>
-          <a:ln xmlns:a="http://schemas.openxmlformats.org/drawingml/2006/main" w="0">
+          <a:prstGeom prst="rect">
+            <a:avLst/>
+          </a:prstGeom>
+          <a:noFill/>
+          <a:ln w="0">
             <a:noFill/>
             <a:prstDash val="solid"/>
           </a:ln>
         </p:spPr>
         <p:txBody>
-          <a:bodyPr xmlns:a="http://schemas.openxmlformats.org/drawingml/2006/main" anchor="t"/>
-          <a:lstStyle xmlns:a="http://schemas.openxmlformats.org/drawingml/2006/main"/>
-          <a:p xmlns:a="http://schemas.openxmlformats.org/drawingml/2006/main">
+          <a:bodyPr anchor="t"/>
+          <a:lstStyle/>
+          <a:p>
             <a:pPr algn="l">
               <a:defRPr sz="2250" b="1" i="0">
                 <a:solidFill>
@@ -4132,36 +4059,36 @@
       </p:sp>
       <p:sp>
         <p:nvSpPr>
-          <p:cNvPr id="9" name="">
-            <a:extLst xmlns:a="http://schemas.openxmlformats.org/drawingml/2006/main">
+          <p:cNvPr id="9" name="矩形 8">
+            <a:extLst>
               <a:ext uri="{FF2B5EF4-FFF2-40B4-BE49-F238E27FC236}">
                 <a16:creationId xmlns:a16="http://schemas.microsoft.com/office/drawing/2014/main" id="{DE748C8E-8CCA-4CCB-B8B4-CDA80D0FE808}"/>
               </a:ext>
             </a:extLst>
           </p:cNvPr>
           <p:cNvSpPr>
-            <a:spLocks xmlns:a="http://schemas.openxmlformats.org/drawingml/2006/main" noGrp="1"/>
-          </p:cNvSpPr>
-          <p:nvPr/>
-        </p:nvSpPr>
-        <p:spPr>
-          <a:xfrm xmlns:a="http://schemas.openxmlformats.org/drawingml/2006/main">
+            <a:spLocks noGrp="1"/>
+          </p:cNvSpPr>
+          <p:nvPr/>
+        </p:nvSpPr>
+        <p:spPr>
+          <a:xfrm>
             <a:off x="4686300" y="3409950"/>
             <a:ext cx="2857500" cy="1428750"/>
           </a:xfrm>
-          <a:prstGeom xmlns:a="http://schemas.openxmlformats.org/drawingml/2006/main" prst="rect">
-            <a:avLst/>
-          </a:prstGeom>
-          <a:noFill xmlns:a="http://schemas.openxmlformats.org/drawingml/2006/main"/>
-          <a:ln xmlns:a="http://schemas.openxmlformats.org/drawingml/2006/main" w="0">
+          <a:prstGeom prst="rect">
+            <a:avLst/>
+          </a:prstGeom>
+          <a:noFill/>
+          <a:ln w="0">
             <a:noFill/>
             <a:prstDash val="solid"/>
           </a:ln>
         </p:spPr>
         <p:txBody>
-          <a:bodyPr xmlns:a="http://schemas.openxmlformats.org/drawingml/2006/main" anchor="t"/>
-          <a:lstStyle xmlns:a="http://schemas.openxmlformats.org/drawingml/2006/main"/>
-          <a:p xmlns:a="http://schemas.openxmlformats.org/drawingml/2006/main">
+          <a:bodyPr anchor="t"/>
+          <a:lstStyle/>
+          <a:p>
             <a:pPr algn="l">
               <a:defRPr sz="1350" b="0" i="0">
                 <a:solidFill>
@@ -4188,32 +4115,32 @@
       </p:sp>
       <p:sp>
         <p:nvSpPr>
-          <p:cNvPr id="10" name="">
-            <a:extLst xmlns:a="http://schemas.openxmlformats.org/drawingml/2006/main">
+          <p:cNvPr id="10" name="矩形: 圆角 9">
+            <a:extLst>
               <a:ext uri="{FF2B5EF4-FFF2-40B4-BE49-F238E27FC236}">
                 <a16:creationId xmlns:a16="http://schemas.microsoft.com/office/drawing/2014/main" id="{E59EF082-CAA3-47F9-A01C-F1BAEC56C043}"/>
               </a:ext>
             </a:extLst>
           </p:cNvPr>
           <p:cNvSpPr>
-            <a:spLocks xmlns:a="http://schemas.openxmlformats.org/drawingml/2006/main" noGrp="1"/>
-          </p:cNvSpPr>
-          <p:nvPr/>
-        </p:nvSpPr>
-        <p:spPr>
-          <a:xfrm xmlns:a="http://schemas.openxmlformats.org/drawingml/2006/main">
+            <a:spLocks noGrp="1"/>
+          </p:cNvSpPr>
+          <p:nvPr/>
+        </p:nvSpPr>
+        <p:spPr>
+          <a:xfrm>
             <a:off x="8191500" y="1619250"/>
             <a:ext cx="3429000" cy="3619500"/>
           </a:xfrm>
-          <a:prstGeom xmlns:a="http://schemas.openxmlformats.org/drawingml/2006/main" prst="roundRect">
+          <a:prstGeom prst="roundRect">
             <a:avLst>
               <a:gd name="adj" fmla="val 6667"/>
             </a:avLst>
           </a:prstGeom>
-          <a:solidFill xmlns:a="http://schemas.openxmlformats.org/drawingml/2006/main">
+          <a:solidFill>
             <a:srgbClr val="EDEDED"/>
           </a:solidFill>
-          <a:ln xmlns:a="http://schemas.openxmlformats.org/drawingml/2006/main" w="9525">
+          <a:ln w="9525">
             <a:solidFill>
               <a:srgbClr val="B8BCC4"/>
             </a:solidFill>
@@ -4223,36 +4150,36 @@
       </p:sp>
       <p:sp>
         <p:nvSpPr>
-          <p:cNvPr id="11" name="">
-            <a:extLst xmlns:a="http://schemas.openxmlformats.org/drawingml/2006/main">
+          <p:cNvPr id="11" name="矩形 10">
+            <a:extLst>
               <a:ext uri="{FF2B5EF4-FFF2-40B4-BE49-F238E27FC236}">
                 <a16:creationId xmlns:a16="http://schemas.microsoft.com/office/drawing/2014/main" id="{C6DF90CA-0433-45B9-912D-40BEC37547AC}"/>
               </a:ext>
             </a:extLst>
           </p:cNvPr>
           <p:cNvSpPr>
-            <a:spLocks xmlns:a="http://schemas.openxmlformats.org/drawingml/2006/main" noGrp="1"/>
-          </p:cNvSpPr>
-          <p:nvPr/>
-        </p:nvSpPr>
-        <p:spPr>
-          <a:xfrm xmlns:a="http://schemas.openxmlformats.org/drawingml/2006/main">
+            <a:spLocks noGrp="1"/>
+          </p:cNvSpPr>
+          <p:nvPr/>
+        </p:nvSpPr>
+        <p:spPr>
+          <a:xfrm>
             <a:off x="8496300" y="1905000"/>
             <a:ext cx="1143000" cy="666750"/>
           </a:xfrm>
-          <a:prstGeom xmlns:a="http://schemas.openxmlformats.org/drawingml/2006/main" prst="rect">
-            <a:avLst/>
-          </a:prstGeom>
-          <a:noFill xmlns:a="http://schemas.openxmlformats.org/drawingml/2006/main"/>
-          <a:ln xmlns:a="http://schemas.openxmlformats.org/drawingml/2006/main" w="0">
+          <a:prstGeom prst="rect">
+            <a:avLst/>
+          </a:prstGeom>
+          <a:noFill/>
+          <a:ln w="0">
             <a:noFill/>
             <a:prstDash val="solid"/>
           </a:ln>
         </p:spPr>
         <p:txBody>
-          <a:bodyPr xmlns:a="http://schemas.openxmlformats.org/drawingml/2006/main" anchor="t"/>
-          <a:lstStyle xmlns:a="http://schemas.openxmlformats.org/drawingml/2006/main"/>
-          <a:p xmlns:a="http://schemas.openxmlformats.org/drawingml/2006/main">
+          <a:bodyPr anchor="t"/>
+          <a:lstStyle/>
+          <a:p>
             <a:pPr algn="l">
               <a:defRPr sz="3900" b="1" i="0">
                 <a:solidFill>
@@ -4279,36 +4206,36 @@
       </p:sp>
       <p:sp>
         <p:nvSpPr>
-          <p:cNvPr id="12" name="">
-            <a:extLst xmlns:a="http://schemas.openxmlformats.org/drawingml/2006/main">
+          <p:cNvPr id="12" name="矩形 11">
+            <a:extLst>
               <a:ext uri="{FF2B5EF4-FFF2-40B4-BE49-F238E27FC236}">
                 <a16:creationId xmlns:a16="http://schemas.microsoft.com/office/drawing/2014/main" id="{015A5D13-E5C4-4D37-B7AF-0581764DD1C2}"/>
               </a:ext>
             </a:extLst>
           </p:cNvPr>
           <p:cNvSpPr>
-            <a:spLocks xmlns:a="http://schemas.openxmlformats.org/drawingml/2006/main" noGrp="1"/>
-          </p:cNvSpPr>
-          <p:nvPr/>
-        </p:nvSpPr>
-        <p:spPr>
-          <a:xfrm xmlns:a="http://schemas.openxmlformats.org/drawingml/2006/main">
+            <a:spLocks noGrp="1"/>
+          </p:cNvSpPr>
+          <p:nvPr/>
+        </p:nvSpPr>
+        <p:spPr>
+          <a:xfrm>
             <a:off x="8496300" y="2857500"/>
             <a:ext cx="2857500" cy="419100"/>
           </a:xfrm>
-          <a:prstGeom xmlns:a="http://schemas.openxmlformats.org/drawingml/2006/main" prst="rect">
-            <a:avLst/>
-          </a:prstGeom>
-          <a:noFill xmlns:a="http://schemas.openxmlformats.org/drawingml/2006/main"/>
-          <a:ln xmlns:a="http://schemas.openxmlformats.org/drawingml/2006/main" w="0">
+          <a:prstGeom prst="rect">
+            <a:avLst/>
+          </a:prstGeom>
+          <a:noFill/>
+          <a:ln w="0">
             <a:noFill/>
             <a:prstDash val="solid"/>
           </a:ln>
         </p:spPr>
         <p:txBody>
-          <a:bodyPr xmlns:a="http://schemas.openxmlformats.org/drawingml/2006/main" anchor="t"/>
-          <a:lstStyle xmlns:a="http://schemas.openxmlformats.org/drawingml/2006/main"/>
-          <a:p xmlns:a="http://schemas.openxmlformats.org/drawingml/2006/main">
+          <a:bodyPr anchor="t"/>
+          <a:lstStyle/>
+          <a:p>
             <a:pPr algn="l">
               <a:defRPr sz="2250" b="1" i="0">
                 <a:solidFill>
@@ -4335,36 +4262,36 @@
       </p:sp>
       <p:sp>
         <p:nvSpPr>
-          <p:cNvPr id="13" name="">
-            <a:extLst xmlns:a="http://schemas.openxmlformats.org/drawingml/2006/main">
+          <p:cNvPr id="13" name="矩形 12">
+            <a:extLst>
               <a:ext uri="{FF2B5EF4-FFF2-40B4-BE49-F238E27FC236}">
                 <a16:creationId xmlns:a16="http://schemas.microsoft.com/office/drawing/2014/main" id="{132D89FF-8C90-4F60-92E5-0B5D5D849EAA}"/>
               </a:ext>
             </a:extLst>
           </p:cNvPr>
           <p:cNvSpPr>
-            <a:spLocks xmlns:a="http://schemas.openxmlformats.org/drawingml/2006/main" noGrp="1"/>
-          </p:cNvSpPr>
-          <p:nvPr/>
-        </p:nvSpPr>
-        <p:spPr>
-          <a:xfrm xmlns:a="http://schemas.openxmlformats.org/drawingml/2006/main">
+            <a:spLocks noGrp="1"/>
+          </p:cNvSpPr>
+          <p:nvPr/>
+        </p:nvSpPr>
+        <p:spPr>
+          <a:xfrm>
             <a:off x="8496300" y="3409950"/>
             <a:ext cx="2857500" cy="1428750"/>
           </a:xfrm>
-          <a:prstGeom xmlns:a="http://schemas.openxmlformats.org/drawingml/2006/main" prst="rect">
-            <a:avLst/>
-          </a:prstGeom>
-          <a:noFill xmlns:a="http://schemas.openxmlformats.org/drawingml/2006/main"/>
-          <a:ln xmlns:a="http://schemas.openxmlformats.org/drawingml/2006/main" w="0">
+          <a:prstGeom prst="rect">
+            <a:avLst/>
+          </a:prstGeom>
+          <a:noFill/>
+          <a:ln w="0">
             <a:noFill/>
             <a:prstDash val="solid"/>
           </a:ln>
         </p:spPr>
         <p:txBody>
-          <a:bodyPr xmlns:a="http://schemas.openxmlformats.org/drawingml/2006/main" anchor="t"/>
-          <a:lstStyle xmlns:a="http://schemas.openxmlformats.org/drawingml/2006/main"/>
-          <a:p xmlns:a="http://schemas.openxmlformats.org/drawingml/2006/main">
+          <a:bodyPr anchor="t"/>
+          <a:lstStyle/>
+          <a:p>
             <a:pPr algn="l">
               <a:defRPr sz="1350" b="0" i="0">
                 <a:solidFill>
@@ -4391,36 +4318,36 @@
       </p:sp>
       <p:sp>
         <p:nvSpPr>
-          <p:cNvPr id="14" name="">
-            <a:extLst xmlns:a="http://schemas.openxmlformats.org/drawingml/2006/main">
+          <p:cNvPr id="14" name="矩形 13">
+            <a:extLst>
               <a:ext uri="{FF2B5EF4-FFF2-40B4-BE49-F238E27FC236}">
                 <a16:creationId xmlns:a16="http://schemas.microsoft.com/office/drawing/2014/main" id="{B65FB52C-ECBD-44DB-AB6F-65255970564B}"/>
               </a:ext>
             </a:extLst>
           </p:cNvPr>
           <p:cNvSpPr>
-            <a:spLocks xmlns:a="http://schemas.openxmlformats.org/drawingml/2006/main" noGrp="1"/>
-          </p:cNvSpPr>
-          <p:nvPr/>
-        </p:nvSpPr>
-        <p:spPr>
-          <a:xfrm xmlns:a="http://schemas.openxmlformats.org/drawingml/2006/main">
+            <a:spLocks noGrp="1"/>
+          </p:cNvSpPr>
+          <p:nvPr/>
+        </p:nvSpPr>
+        <p:spPr>
+          <a:xfrm>
             <a:off x="571500" y="5619750"/>
             <a:ext cx="11049000" cy="381000"/>
           </a:xfrm>
-          <a:prstGeom xmlns:a="http://schemas.openxmlformats.org/drawingml/2006/main" prst="rect">
-            <a:avLst/>
-          </a:prstGeom>
-          <a:noFill xmlns:a="http://schemas.openxmlformats.org/drawingml/2006/main"/>
-          <a:ln xmlns:a="http://schemas.openxmlformats.org/drawingml/2006/main" w="0">
+          <a:prstGeom prst="rect">
+            <a:avLst/>
+          </a:prstGeom>
+          <a:noFill/>
+          <a:ln w="0">
             <a:noFill/>
             <a:prstDash val="solid"/>
           </a:ln>
         </p:spPr>
         <p:txBody>
-          <a:bodyPr xmlns:a="http://schemas.openxmlformats.org/drawingml/2006/main" anchor="t"/>
-          <a:lstStyle xmlns:a="http://schemas.openxmlformats.org/drawingml/2006/main"/>
-          <a:p xmlns:a="http://schemas.openxmlformats.org/drawingml/2006/main">
+          <a:bodyPr anchor="t"/>
+          <a:lstStyle/>
+          <a:p>
             <a:pPr algn="ctr">
               <a:defRPr sz="1350" b="1" i="0">
                 <a:solidFill>
@@ -4447,36 +4374,36 @@
       </p:sp>
       <p:sp>
         <p:nvSpPr>
-          <p:cNvPr id="15" name="">
-            <a:extLst xmlns:a="http://schemas.openxmlformats.org/drawingml/2006/main">
+          <p:cNvPr id="15" name="矩形 14">
+            <a:extLst>
               <a:ext uri="{FF2B5EF4-FFF2-40B4-BE49-F238E27FC236}">
                 <a16:creationId xmlns:a16="http://schemas.microsoft.com/office/drawing/2014/main" id="{A6533143-B6ED-4BBC-8198-8E1B33F547E0}"/>
               </a:ext>
             </a:extLst>
           </p:cNvPr>
           <p:cNvSpPr>
-            <a:spLocks xmlns:a="http://schemas.openxmlformats.org/drawingml/2006/main" noGrp="1"/>
-          </p:cNvSpPr>
-          <p:nvPr/>
-        </p:nvSpPr>
-        <p:spPr>
-          <a:xfrm xmlns:a="http://schemas.openxmlformats.org/drawingml/2006/main">
+            <a:spLocks noGrp="1"/>
+          </p:cNvSpPr>
+          <p:nvPr/>
+        </p:nvSpPr>
+        <p:spPr>
+          <a:xfrm>
             <a:off x="11334750" y="6362700"/>
             <a:ext cx="571500" cy="266700"/>
           </a:xfrm>
-          <a:prstGeom xmlns:a="http://schemas.openxmlformats.org/drawingml/2006/main" prst="rect">
-            <a:avLst/>
-          </a:prstGeom>
-          <a:noFill xmlns:a="http://schemas.openxmlformats.org/drawingml/2006/main"/>
-          <a:ln xmlns:a="http://schemas.openxmlformats.org/drawingml/2006/main" w="0">
+          <a:prstGeom prst="rect">
+            <a:avLst/>
+          </a:prstGeom>
+          <a:noFill/>
+          <a:ln w="0">
             <a:noFill/>
             <a:prstDash val="solid"/>
           </a:ln>
         </p:spPr>
         <p:txBody>
-          <a:bodyPr xmlns:a="http://schemas.openxmlformats.org/drawingml/2006/main" anchor="t"/>
-          <a:lstStyle xmlns:a="http://schemas.openxmlformats.org/drawingml/2006/main"/>
-          <a:p xmlns:a="http://schemas.openxmlformats.org/drawingml/2006/main">
+          <a:bodyPr anchor="t"/>
+          <a:lstStyle/>
+          <a:p>
             <a:pPr algn="r">
               <a:defRPr sz="1050" b="0" i="0">
                 <a:solidFill>
@@ -4503,36 +4430,36 @@
       </p:sp>
       <p:sp>
         <p:nvSpPr>
-          <p:cNvPr id="16" name="">
-            <a:extLst xmlns:a="http://schemas.openxmlformats.org/drawingml/2006/main">
+          <p:cNvPr id="16" name="矩形 15">
+            <a:extLst>
               <a:ext uri="{FF2B5EF4-FFF2-40B4-BE49-F238E27FC236}">
                 <a16:creationId xmlns:a16="http://schemas.microsoft.com/office/drawing/2014/main" id="{3AF33DF7-2047-458C-AF10-3586C4CB4704}"/>
               </a:ext>
             </a:extLst>
           </p:cNvPr>
           <p:cNvSpPr>
-            <a:spLocks xmlns:a="http://schemas.openxmlformats.org/drawingml/2006/main" noGrp="1"/>
-          </p:cNvSpPr>
-          <p:nvPr/>
-        </p:nvSpPr>
-        <p:spPr>
-          <a:xfrm xmlns:a="http://schemas.openxmlformats.org/drawingml/2006/main">
+            <a:spLocks noGrp="1"/>
+          </p:cNvSpPr>
+          <p:nvPr/>
+        </p:nvSpPr>
+        <p:spPr>
+          <a:xfrm>
             <a:off x="571500" y="6362700"/>
             <a:ext cx="4762500" cy="266700"/>
           </a:xfrm>
-          <a:prstGeom xmlns:a="http://schemas.openxmlformats.org/drawingml/2006/main" prst="rect">
-            <a:avLst/>
-          </a:prstGeom>
-          <a:noFill xmlns:a="http://schemas.openxmlformats.org/drawingml/2006/main"/>
-          <a:ln xmlns:a="http://schemas.openxmlformats.org/drawingml/2006/main" w="0">
+          <a:prstGeom prst="rect">
+            <a:avLst/>
+          </a:prstGeom>
+          <a:noFill/>
+          <a:ln w="0">
             <a:noFill/>
             <a:prstDash val="solid"/>
           </a:ln>
         </p:spPr>
         <p:txBody>
-          <a:bodyPr xmlns:a="http://schemas.openxmlformats.org/drawingml/2006/main" anchor="t"/>
-          <a:lstStyle xmlns:a="http://schemas.openxmlformats.org/drawingml/2006/main"/>
-          <a:p xmlns:a="http://schemas.openxmlformats.org/drawingml/2006/main">
+          <a:bodyPr anchor="t"/>
+          <a:lstStyle/>
+          <a:p>
             <a:pPr algn="l">
               <a:defRPr sz="1050" b="0" i="0">
                 <a:solidFill>
@@ -4564,11 +4491,14 @@
       </p:ext>
     </p:extLst>
   </p:cSld>
+  <p:clrMapOvr>
+    <a:masterClrMapping/>
+  </p:clrMapOvr>
 </p:sld>
 </file>
 
 <file path=ppt/slides/slide6.xml><?xml version="1.0" encoding="utf-8"?>
-<p:sld xmlns:p="http://schemas.openxmlformats.org/presentationml/2006/main">
+<p:sld xmlns:a="http://schemas.openxmlformats.org/drawingml/2006/main" xmlns:r="http://schemas.openxmlformats.org/officeDocument/2006/relationships" xmlns:p="http://schemas.openxmlformats.org/presentationml/2006/main">
   <p:cSld>
     <p:spTree>
       <p:nvGrpSpPr>
@@ -4577,40 +4507,45 @@
         <p:nvPr/>
       </p:nvGrpSpPr>
       <p:grpSpPr>
-        <a:xfrm xmlns:a="http://schemas.openxmlformats.org/drawingml/2006/main"/>
+        <a:xfrm>
+          <a:off x="0" y="0"/>
+          <a:ext cx="0" cy="0"/>
+          <a:chOff x="0" y="0"/>
+          <a:chExt cx="0" cy="0"/>
+        </a:xfrm>
       </p:grpSpPr>
       <p:sp>
         <p:nvSpPr>
-          <p:cNvPr id="8" name="">
-            <a:extLst xmlns:a="http://schemas.openxmlformats.org/drawingml/2006/main">
+          <p:cNvPr id="8" name="矩形 7">
+            <a:extLst>
               <a:ext uri="{FF2B5EF4-FFF2-40B4-BE49-F238E27FC236}">
                 <a16:creationId xmlns:a16="http://schemas.microsoft.com/office/drawing/2014/main" id="{B8CF605B-5D91-4E6C-BDCE-477B67BECD8F}"/>
               </a:ext>
             </a:extLst>
           </p:cNvPr>
           <p:cNvSpPr>
-            <a:spLocks xmlns:a="http://schemas.openxmlformats.org/drawingml/2006/main" noGrp="1"/>
-          </p:cNvSpPr>
-          <p:nvPr/>
-        </p:nvSpPr>
-        <p:spPr>
-          <a:xfrm xmlns:a="http://schemas.openxmlformats.org/drawingml/2006/main">
+            <a:spLocks noGrp="1"/>
+          </p:cNvSpPr>
+          <p:nvPr/>
+        </p:nvSpPr>
+        <p:spPr>
+          <a:xfrm>
             <a:off x="571500" y="495300"/>
             <a:ext cx="11049000" cy="571500"/>
           </a:xfrm>
-          <a:prstGeom xmlns:a="http://schemas.openxmlformats.org/drawingml/2006/main" prst="rect">
-            <a:avLst/>
-          </a:prstGeom>
-          <a:noFill xmlns:a="http://schemas.openxmlformats.org/drawingml/2006/main"/>
-          <a:ln xmlns:a="http://schemas.openxmlformats.org/drawingml/2006/main" w="0">
+          <a:prstGeom prst="rect">
+            <a:avLst/>
+          </a:prstGeom>
+          <a:noFill/>
+          <a:ln w="0">
             <a:noFill/>
             <a:prstDash val="solid"/>
           </a:ln>
         </p:spPr>
         <p:txBody>
-          <a:bodyPr xmlns:a="http://schemas.openxmlformats.org/drawingml/2006/main" anchor="t"/>
-          <a:lstStyle xmlns:a="http://schemas.openxmlformats.org/drawingml/2006/main"/>
-          <a:p xmlns:a="http://schemas.openxmlformats.org/drawingml/2006/main">
+          <a:bodyPr anchor="t"/>
+          <a:lstStyle/>
+          <a:p>
             <a:pPr algn="l">
               <a:defRPr sz="3525" b="1" i="0">
                 <a:solidFill>
@@ -4637,36 +4572,36 @@
       </p:sp>
       <p:sp>
         <p:nvSpPr>
-          <p:cNvPr id="2" name="">
-            <a:extLst xmlns:a="http://schemas.openxmlformats.org/drawingml/2006/main">
+          <p:cNvPr id="2" name="矩形 1">
+            <a:extLst>
               <a:ext uri="{FF2B5EF4-FFF2-40B4-BE49-F238E27FC236}">
                 <a16:creationId xmlns:a16="http://schemas.microsoft.com/office/drawing/2014/main" id="{5D56B513-9E37-4821-BF68-027575D89B41}"/>
               </a:ext>
             </a:extLst>
           </p:cNvPr>
           <p:cNvSpPr>
-            <a:spLocks xmlns:a="http://schemas.openxmlformats.org/drawingml/2006/main" noGrp="1"/>
-          </p:cNvSpPr>
-          <p:nvPr/>
-        </p:nvSpPr>
-        <p:spPr>
-          <a:xfrm xmlns:a="http://schemas.openxmlformats.org/drawingml/2006/main">
+            <a:spLocks noGrp="1"/>
+          </p:cNvSpPr>
+          <p:nvPr/>
+        </p:nvSpPr>
+        <p:spPr>
+          <a:xfrm>
             <a:off x="571500" y="1524000"/>
             <a:ext cx="5143500" cy="419100"/>
           </a:xfrm>
-          <a:prstGeom xmlns:a="http://schemas.openxmlformats.org/drawingml/2006/main" prst="rect">
-            <a:avLst/>
-          </a:prstGeom>
-          <a:noFill xmlns:a="http://schemas.openxmlformats.org/drawingml/2006/main"/>
-          <a:ln xmlns:a="http://schemas.openxmlformats.org/drawingml/2006/main" w="0">
+          <a:prstGeom prst="rect">
+            <a:avLst/>
+          </a:prstGeom>
+          <a:noFill/>
+          <a:ln w="0">
             <a:noFill/>
             <a:prstDash val="solid"/>
           </a:ln>
         </p:spPr>
         <p:txBody>
-          <a:bodyPr xmlns:a="http://schemas.openxmlformats.org/drawingml/2006/main" anchor="t"/>
-          <a:lstStyle xmlns:a="http://schemas.openxmlformats.org/drawingml/2006/main"/>
-          <a:p xmlns:a="http://schemas.openxmlformats.org/drawingml/2006/main">
+          <a:bodyPr anchor="t"/>
+          <a:lstStyle/>
+          <a:p>
             <a:pPr algn="l">
               <a:defRPr sz="2100" b="1" i="0">
                 <a:solidFill>
@@ -4693,36 +4628,36 @@
       </p:sp>
       <p:sp>
         <p:nvSpPr>
-          <p:cNvPr id="3" name="">
-            <a:extLst xmlns:a="http://schemas.openxmlformats.org/drawingml/2006/main">
+          <p:cNvPr id="3" name="矩形 2">
+            <a:extLst>
               <a:ext uri="{FF2B5EF4-FFF2-40B4-BE49-F238E27FC236}">
                 <a16:creationId xmlns:a16="http://schemas.microsoft.com/office/drawing/2014/main" id="{3D6C57A3-225F-4CA9-9B2D-A0E7728C6FF6}"/>
               </a:ext>
             </a:extLst>
           </p:cNvPr>
           <p:cNvSpPr>
-            <a:spLocks xmlns:a="http://schemas.openxmlformats.org/drawingml/2006/main" noGrp="1"/>
-          </p:cNvSpPr>
-          <p:nvPr/>
-        </p:nvSpPr>
-        <p:spPr>
-          <a:xfrm xmlns:a="http://schemas.openxmlformats.org/drawingml/2006/main">
+            <a:spLocks noGrp="1"/>
+          </p:cNvSpPr>
+          <p:nvPr/>
+        </p:nvSpPr>
+        <p:spPr>
+          <a:xfrm>
             <a:off x="571500" y="2133600"/>
             <a:ext cx="5143500" cy="3048000"/>
           </a:xfrm>
-          <a:prstGeom xmlns:a="http://schemas.openxmlformats.org/drawingml/2006/main" prst="rect">
-            <a:avLst/>
-          </a:prstGeom>
-          <a:noFill xmlns:a="http://schemas.openxmlformats.org/drawingml/2006/main"/>
-          <a:ln xmlns:a="http://schemas.openxmlformats.org/drawingml/2006/main" w="0">
+          <a:prstGeom prst="rect">
+            <a:avLst/>
+          </a:prstGeom>
+          <a:noFill/>
+          <a:ln w="0">
             <a:noFill/>
             <a:prstDash val="solid"/>
           </a:ln>
         </p:spPr>
         <p:txBody>
-          <a:bodyPr xmlns:a="http://schemas.openxmlformats.org/drawingml/2006/main" anchor="t"/>
-          <a:lstStyle xmlns:a="http://schemas.openxmlformats.org/drawingml/2006/main"/>
-          <a:p xmlns:a="http://schemas.openxmlformats.org/drawingml/2006/main">
+          <a:bodyPr anchor="t"/>
+          <a:lstStyle/>
+          <a:p>
             <a:pPr algn="l">
               <a:defRPr sz="1575" b="0" i="0">
                 <a:solidFill>
@@ -4745,7 +4680,7 @@
               <a:t>OpenDroneMap（AGPL-3.0）三维重建引擎</a:t>
             </a:r>
           </a:p>
-          <a:p xmlns:a="http://schemas.openxmlformats.org/drawingml/2006/main">
+          <a:p>
             <a:pPr algn="l">
               <a:defRPr sz="1575" b="0" i="0">
                 <a:solidFill>
@@ -4768,7 +4703,7 @@
               <a:t>OpenSfM / OpenMVS / PDAL / GDAL 等</a:t>
             </a:r>
           </a:p>
-          <a:p xmlns:a="http://schemas.openxmlformats.org/drawingml/2006/main">
+          <a:p>
             <a:pPr algn="l">
               <a:defRPr sz="1575" b="0" i="0">
                 <a:solidFill>
@@ -4791,12 +4726,17 @@
               <a:t>Python · pywebview · PyInstaller · Pillow</a:t>
             </a:r>
           </a:p>
-          <a:p xmlns:a="http://schemas.openxmlformats.org/drawingml/2006/main">
-            <a:r>
-              <a:t/>
-            </a:r>
-          </a:p>
-          <a:p xmlns:a="http://schemas.openxmlformats.org/drawingml/2006/main">
+          <a:p>
+            <a:endParaRPr sz="1575" b="0" i="0">
+              <a:solidFill>
+                <a:srgbClr val="46525F"/>
+              </a:solidFill>
+              <a:latin typeface="Microsoft YaHei"/>
+              <a:ea typeface="Microsoft YaHei"/>
+              <a:cs typeface="Microsoft YaHei"/>
+            </a:endParaRPr>
+          </a:p>
+          <a:p>
             <a:pPr algn="l">
               <a:defRPr sz="1575" b="0" i="0">
                 <a:solidFill>
@@ -4823,36 +4763,36 @@
       </p:sp>
       <p:sp>
         <p:nvSpPr>
-          <p:cNvPr id="4" name="">
-            <a:extLst xmlns:a="http://schemas.openxmlformats.org/drawingml/2006/main">
+          <p:cNvPr id="4" name="矩形 3">
+            <a:extLst>
               <a:ext uri="{FF2B5EF4-FFF2-40B4-BE49-F238E27FC236}">
                 <a16:creationId xmlns:a16="http://schemas.microsoft.com/office/drawing/2014/main" id="{5FC2D7BA-B4D0-480D-9D28-830984E8B754}"/>
               </a:ext>
             </a:extLst>
           </p:cNvPr>
           <p:cNvSpPr>
-            <a:spLocks xmlns:a="http://schemas.openxmlformats.org/drawingml/2006/main" noGrp="1"/>
-          </p:cNvSpPr>
-          <p:nvPr/>
-        </p:nvSpPr>
-        <p:spPr>
-          <a:xfrm xmlns:a="http://schemas.openxmlformats.org/drawingml/2006/main">
+            <a:spLocks noGrp="1"/>
+          </p:cNvSpPr>
+          <p:nvPr/>
+        </p:nvSpPr>
+        <p:spPr>
+          <a:xfrm>
             <a:off x="6286500" y="1524000"/>
             <a:ext cx="5143500" cy="419100"/>
           </a:xfrm>
-          <a:prstGeom xmlns:a="http://schemas.openxmlformats.org/drawingml/2006/main" prst="rect">
-            <a:avLst/>
-          </a:prstGeom>
-          <a:noFill xmlns:a="http://schemas.openxmlformats.org/drawingml/2006/main"/>
-          <a:ln xmlns:a="http://schemas.openxmlformats.org/drawingml/2006/main" w="0">
+          <a:prstGeom prst="rect">
+            <a:avLst/>
+          </a:prstGeom>
+          <a:noFill/>
+          <a:ln w="0">
             <a:noFill/>
             <a:prstDash val="solid"/>
           </a:ln>
         </p:spPr>
         <p:txBody>
-          <a:bodyPr xmlns:a="http://schemas.openxmlformats.org/drawingml/2006/main" anchor="t"/>
-          <a:lstStyle xmlns:a="http://schemas.openxmlformats.org/drawingml/2006/main"/>
-          <a:p xmlns:a="http://schemas.openxmlformats.org/drawingml/2006/main">
+          <a:bodyPr anchor="t"/>
+          <a:lstStyle/>
+          <a:p>
             <a:pPr algn="l">
               <a:defRPr sz="2100" b="1" i="0">
                 <a:solidFill>
@@ -4879,36 +4819,36 @@
       </p:sp>
       <p:sp>
         <p:nvSpPr>
-          <p:cNvPr id="5" name="">
-            <a:extLst xmlns:a="http://schemas.openxmlformats.org/drawingml/2006/main">
+          <p:cNvPr id="5" name="矩形 4">
+            <a:extLst>
               <a:ext uri="{FF2B5EF4-FFF2-40B4-BE49-F238E27FC236}">
                 <a16:creationId xmlns:a16="http://schemas.microsoft.com/office/drawing/2014/main" id="{E34A52AE-723A-459E-BFDF-4F0DCAF82378}"/>
               </a:ext>
             </a:extLst>
           </p:cNvPr>
           <p:cNvSpPr>
-            <a:spLocks xmlns:a="http://schemas.openxmlformats.org/drawingml/2006/main" noGrp="1"/>
-          </p:cNvSpPr>
-          <p:nvPr/>
-        </p:nvSpPr>
-        <p:spPr>
-          <a:xfrm xmlns:a="http://schemas.openxmlformats.org/drawingml/2006/main">
+            <a:spLocks noGrp="1"/>
+          </p:cNvSpPr>
+          <p:nvPr/>
+        </p:nvSpPr>
+        <p:spPr>
+          <a:xfrm>
             <a:off x="6286500" y="2133600"/>
             <a:ext cx="5143500" cy="2476500"/>
           </a:xfrm>
-          <a:prstGeom xmlns:a="http://schemas.openxmlformats.org/drawingml/2006/main" prst="rect">
-            <a:avLst/>
-          </a:prstGeom>
-          <a:noFill xmlns:a="http://schemas.openxmlformats.org/drawingml/2006/main"/>
-          <a:ln xmlns:a="http://schemas.openxmlformats.org/drawingml/2006/main" w="0">
+          <a:prstGeom prst="rect">
+            <a:avLst/>
+          </a:prstGeom>
+          <a:noFill/>
+          <a:ln w="0">
             <a:noFill/>
             <a:prstDash val="solid"/>
           </a:ln>
         </p:spPr>
         <p:txBody>
-          <a:bodyPr xmlns:a="http://schemas.openxmlformats.org/drawingml/2006/main" anchor="t"/>
-          <a:lstStyle xmlns:a="http://schemas.openxmlformats.org/drawingml/2006/main"/>
-          <a:p xmlns:a="http://schemas.openxmlformats.org/drawingml/2006/main">
+          <a:bodyPr anchor="t"/>
+          <a:lstStyle/>
+          <a:p>
             <a:pPr algn="l">
               <a:defRPr sz="1575" b="0" i="0">
                 <a:solidFill>
@@ -4931,7 +4871,7 @@
               <a:t>GitHub：github.com/MuoNian/SiteSight</a:t>
             </a:r>
           </a:p>
-          <a:p xmlns:a="http://schemas.openxmlformats.org/drawingml/2006/main">
+          <a:p>
             <a:pPr algn="l">
               <a:defRPr sz="1575" b="0" i="0">
                 <a:solidFill>
@@ -4954,7 +4894,7 @@
               <a:t>测试素材：Releases 免费下载</a:t>
             </a:r>
           </a:p>
-          <a:p xmlns:a="http://schemas.openxmlformats.org/drawingml/2006/main">
+          <a:p>
             <a:pPr algn="l">
               <a:defRPr sz="1575" b="0" i="0">
                 <a:solidFill>
@@ -4977,12 +4917,17 @@
               <a:t>安装包：约 1 GB，含完整建模引擎</a:t>
             </a:r>
           </a:p>
-          <a:p xmlns:a="http://schemas.openxmlformats.org/drawingml/2006/main">
-            <a:r>
-              <a:t/>
-            </a:r>
-          </a:p>
-          <a:p xmlns:a="http://schemas.openxmlformats.org/drawingml/2006/main">
+          <a:p>
+            <a:endParaRPr sz="1575" b="0" i="0">
+              <a:solidFill>
+                <a:srgbClr val="46525F"/>
+              </a:solidFill>
+              <a:latin typeface="Microsoft YaHei"/>
+              <a:ea typeface="Microsoft YaHei"/>
+              <a:cs typeface="Microsoft YaHei"/>
+            </a:endParaRPr>
+          </a:p>
+          <a:p>
             <a:pPr algn="l">
               <a:defRPr sz="1575" b="0" i="0">
                 <a:solidFill>
@@ -5009,36 +4954,36 @@
       </p:sp>
       <p:sp>
         <p:nvSpPr>
-          <p:cNvPr id="6" name="">
-            <a:extLst xmlns:a="http://schemas.openxmlformats.org/drawingml/2006/main">
+          <p:cNvPr id="6" name="矩形 5">
+            <a:extLst>
               <a:ext uri="{FF2B5EF4-FFF2-40B4-BE49-F238E27FC236}">
                 <a16:creationId xmlns:a16="http://schemas.microsoft.com/office/drawing/2014/main" id="{65089E27-8BAC-4330-A889-503DBC5C6505}"/>
               </a:ext>
             </a:extLst>
           </p:cNvPr>
           <p:cNvSpPr>
-            <a:spLocks xmlns:a="http://schemas.openxmlformats.org/drawingml/2006/main" noGrp="1"/>
-          </p:cNvSpPr>
-          <p:nvPr/>
-        </p:nvSpPr>
-        <p:spPr>
-          <a:xfrm xmlns:a="http://schemas.openxmlformats.org/drawingml/2006/main">
+            <a:spLocks noGrp="1"/>
+          </p:cNvSpPr>
+          <p:nvPr/>
+        </p:nvSpPr>
+        <p:spPr>
+          <a:xfrm>
             <a:off x="11334750" y="6362700"/>
             <a:ext cx="571500" cy="266700"/>
           </a:xfrm>
-          <a:prstGeom xmlns:a="http://schemas.openxmlformats.org/drawingml/2006/main" prst="rect">
-            <a:avLst/>
-          </a:prstGeom>
-          <a:noFill xmlns:a="http://schemas.openxmlformats.org/drawingml/2006/main"/>
-          <a:ln xmlns:a="http://schemas.openxmlformats.org/drawingml/2006/main" w="0">
+          <a:prstGeom prst="rect">
+            <a:avLst/>
+          </a:prstGeom>
+          <a:noFill/>
+          <a:ln w="0">
             <a:noFill/>
             <a:prstDash val="solid"/>
           </a:ln>
         </p:spPr>
         <p:txBody>
-          <a:bodyPr xmlns:a="http://schemas.openxmlformats.org/drawingml/2006/main" anchor="t"/>
-          <a:lstStyle xmlns:a="http://schemas.openxmlformats.org/drawingml/2006/main"/>
-          <a:p xmlns:a="http://schemas.openxmlformats.org/drawingml/2006/main">
+          <a:bodyPr anchor="t"/>
+          <a:lstStyle/>
+          <a:p>
             <a:pPr algn="r">
               <a:defRPr sz="1050" b="0" i="0">
                 <a:solidFill>
@@ -5065,36 +5010,36 @@
       </p:sp>
       <p:sp>
         <p:nvSpPr>
-          <p:cNvPr id="7" name="">
-            <a:extLst xmlns:a="http://schemas.openxmlformats.org/drawingml/2006/main">
+          <p:cNvPr id="7" name="矩形 6">
+            <a:extLst>
               <a:ext uri="{FF2B5EF4-FFF2-40B4-BE49-F238E27FC236}">
                 <a16:creationId xmlns:a16="http://schemas.microsoft.com/office/drawing/2014/main" id="{DB228733-DD05-484C-A68C-779C69A1E8CD}"/>
               </a:ext>
             </a:extLst>
           </p:cNvPr>
           <p:cNvSpPr>
-            <a:spLocks xmlns:a="http://schemas.openxmlformats.org/drawingml/2006/main" noGrp="1"/>
-          </p:cNvSpPr>
-          <p:nvPr/>
-        </p:nvSpPr>
-        <p:spPr>
-          <a:xfrm xmlns:a="http://schemas.openxmlformats.org/drawingml/2006/main">
+            <a:spLocks noGrp="1"/>
+          </p:cNvSpPr>
+          <p:nvPr/>
+        </p:nvSpPr>
+        <p:spPr>
+          <a:xfrm>
             <a:off x="571500" y="6362700"/>
             <a:ext cx="4762500" cy="266700"/>
           </a:xfrm>
-          <a:prstGeom xmlns:a="http://schemas.openxmlformats.org/drawingml/2006/main" prst="rect">
-            <a:avLst/>
-          </a:prstGeom>
-          <a:noFill xmlns:a="http://schemas.openxmlformats.org/drawingml/2006/main"/>
-          <a:ln xmlns:a="http://schemas.openxmlformats.org/drawingml/2006/main" w="0">
+          <a:prstGeom prst="rect">
+            <a:avLst/>
+          </a:prstGeom>
+          <a:noFill/>
+          <a:ln w="0">
             <a:noFill/>
             <a:prstDash val="solid"/>
           </a:ln>
         </p:spPr>
         <p:txBody>
-          <a:bodyPr xmlns:a="http://schemas.openxmlformats.org/drawingml/2006/main" anchor="t"/>
-          <a:lstStyle xmlns:a="http://schemas.openxmlformats.org/drawingml/2006/main"/>
-          <a:p xmlns:a="http://schemas.openxmlformats.org/drawingml/2006/main">
+          <a:bodyPr anchor="t"/>
+          <a:lstStyle/>
+          <a:p>
             <a:pPr algn="l">
               <a:defRPr sz="1050" b="0" i="0">
                 <a:solidFill>
@@ -5126,6 +5071,9 @@
       </p:ext>
     </p:extLst>
   </p:cSld>
+  <p:clrMapOvr>
+    <a:masterClrMapping/>
+  </p:clrMapOvr>
 </p:sld>
 </file>
 
@@ -5371,5 +5319,254 @@
       </a:bgFillStyleLst>
     </a:fmtScheme>
   </a:themeElements>
+  <a:objectDefaults/>
+  <a:extraClrSchemeLst/>
+</a:theme>
+</file>
+
+<file path=ppt/theme/theme2.xml><?xml version="1.0" encoding="utf-8"?>
+<a:theme xmlns:a="http://schemas.openxmlformats.org/drawingml/2006/main" name="ChatGPT">
+  <a:themeElements>
+    <a:clrScheme name="ChatGPT">
+      <a:dk1>
+        <a:srgbClr val="000000"/>
+      </a:dk1>
+      <a:lt1>
+        <a:srgbClr val="FFFFFF"/>
+      </a:lt1>
+      <a:dk2>
+        <a:srgbClr val="0E2841"/>
+      </a:dk2>
+      <a:lt2>
+        <a:srgbClr val="E8E8E8"/>
+      </a:lt2>
+      <a:accent1>
+        <a:srgbClr val="156082"/>
+      </a:accent1>
+      <a:accent2>
+        <a:srgbClr val="E97132"/>
+      </a:accent2>
+      <a:accent3>
+        <a:srgbClr val="196B24"/>
+      </a:accent3>
+      <a:accent4>
+        <a:srgbClr val="0F9ED5"/>
+      </a:accent4>
+      <a:accent5>
+        <a:srgbClr val="A02B93"/>
+      </a:accent5>
+      <a:accent6>
+        <a:srgbClr val="4EA72E"/>
+      </a:accent6>
+      <a:hlink>
+        <a:srgbClr val="467886"/>
+      </a:hlink>
+      <a:folHlink>
+        <a:srgbClr val="96607D"/>
+      </a:folHlink>
+    </a:clrScheme>
+    <a:fontScheme name="Office">
+      <a:majorFont>
+        <a:latin typeface="Calibri Light"/>
+        <a:ea typeface="Calibri Light"/>
+        <a:cs typeface="Calibri Light"/>
+      </a:majorFont>
+      <a:minorFont>
+        <a:latin typeface="Calibri"/>
+        <a:ea typeface="Calibri"/>
+        <a:cs typeface="Calibri"/>
+      </a:minorFont>
+    </a:fontScheme>
+    <a:fmtScheme name="ChatGPT">
+      <a:fillStyleLst>
+        <a:solidFill>
+          <a:schemeClr val="phClr"/>
+        </a:solidFill>
+        <a:gradFill>
+          <a:gsLst>
+            <a:gs pos="0">
+              <a:schemeClr val="phClr">
+                <a:tint val="67000"/>
+                <a:lumMod val="110000"/>
+                <a:satMod val="105000"/>
+              </a:schemeClr>
+            </a:gs>
+            <a:gs pos="50000">
+              <a:schemeClr val="phClr">
+                <a:tint val="73000"/>
+                <a:lumMod val="105000"/>
+                <a:satMod val="103000"/>
+              </a:schemeClr>
+            </a:gs>
+            <a:gs pos="100000">
+              <a:schemeClr val="phClr">
+                <a:tint val="81000"/>
+                <a:lumMod val="105000"/>
+                <a:satMod val="109000"/>
+              </a:schemeClr>
+            </a:gs>
+          </a:gsLst>
+          <a:lin ang="5400000" scaled="0"/>
+        </a:gradFill>
+        <a:gradFill>
+          <a:gsLst>
+            <a:gs pos="0">
+              <a:schemeClr val="phClr">
+                <a:tint val="94000"/>
+                <a:lumMod val="102000"/>
+                <a:satMod val="103000"/>
+              </a:schemeClr>
+            </a:gs>
+            <a:gs pos="50000">
+              <a:schemeClr val="phClr">
+                <a:shade val="100000"/>
+                <a:lumMod val="100000"/>
+                <a:satMod val="110000"/>
+              </a:schemeClr>
+            </a:gs>
+            <a:gs pos="100000">
+              <a:schemeClr val="phClr">
+                <a:shade val="78000"/>
+                <a:lumMod val="99000"/>
+                <a:satMod val="120000"/>
+              </a:schemeClr>
+            </a:gs>
+          </a:gsLst>
+          <a:lin ang="5400000" scaled="0"/>
+        </a:gradFill>
+      </a:fillStyleLst>
+      <a:lnStyleLst>
+        <a:ln w="12700">
+          <a:solidFill>
+            <a:schemeClr val="phClr"/>
+          </a:solidFill>
+          <a:prstDash val="solid"/>
+        </a:ln>
+        <a:ln w="19050">
+          <a:solidFill>
+            <a:schemeClr val="phClr"/>
+          </a:solidFill>
+          <a:prstDash val="solid"/>
+        </a:ln>
+        <a:ln w="25400">
+          <a:solidFill>
+            <a:schemeClr val="phClr"/>
+          </a:solidFill>
+          <a:prstDash val="solid"/>
+        </a:ln>
+      </a:lnStyleLst>
+      <a:effectStyleLst>
+        <a:effectStyle>
+          <a:effectLst/>
+        </a:effectStyle>
+        <a:effectStyle>
+          <a:effectLst/>
+        </a:effectStyle>
+        <a:effectStyle>
+          <a:effectLst>
+            <a:outerShdw blurRad="57150" dist="19050" dir="5400000">
+              <a:srgbClr val="000000">
+                <a:alpha val="16000"/>
+              </a:srgbClr>
+            </a:outerShdw>
+          </a:effectLst>
+        </a:effectStyle>
+        <a:effectStyle>
+          <a:effectLst>
+            <a:outerShdw blurRad="19050" dist="9525" dir="5400000">
+              <a:srgbClr val="000000">
+                <a:alpha val="6000"/>
+              </a:srgbClr>
+            </a:outerShdw>
+          </a:effectLst>
+        </a:effectStyle>
+        <a:effectStyle>
+          <a:effectLst>
+            <a:outerShdw blurRad="28575" dist="9525" dir="5400000">
+              <a:srgbClr val="000000">
+                <a:alpha val="8000"/>
+              </a:srgbClr>
+            </a:outerShdw>
+          </a:effectLst>
+        </a:effectStyle>
+        <a:effectStyle>
+          <a:effectLst>
+            <a:outerShdw blurRad="57150" dist="19050" dir="5400000">
+              <a:srgbClr val="000000">
+                <a:alpha val="10000"/>
+              </a:srgbClr>
+            </a:outerShdw>
+          </a:effectLst>
+        </a:effectStyle>
+        <a:effectStyle>
+          <a:effectLst>
+            <a:outerShdw blurRad="114300" dist="38100" dir="5400000">
+              <a:srgbClr val="000000">
+                <a:alpha val="12000"/>
+              </a:srgbClr>
+            </a:outerShdw>
+          </a:effectLst>
+        </a:effectStyle>
+        <a:effectStyle>
+          <a:effectLst>
+            <a:outerShdw blurRad="171450" dist="57150" dir="5400000">
+              <a:srgbClr val="000000">
+                <a:alpha val="16000"/>
+              </a:srgbClr>
+            </a:outerShdw>
+          </a:effectLst>
+        </a:effectStyle>
+        <a:effectStyle>
+          <a:effectLst>
+            <a:outerShdw blurRad="266700" dist="95250" dir="5400000">
+              <a:srgbClr val="000000">
+                <a:alpha val="24000"/>
+              </a:srgbClr>
+            </a:outerShdw>
+          </a:effectLst>
+        </a:effectStyle>
+      </a:effectStyleLst>
+      <a:bgFillStyleLst>
+        <a:solidFill>
+          <a:schemeClr val="phClr"/>
+        </a:solidFill>
+        <a:solidFill>
+          <a:schemeClr val="phClr">
+            <a:tint val="95000"/>
+            <a:satMod val="170000"/>
+          </a:schemeClr>
+        </a:solidFill>
+        <a:gradFill>
+          <a:gsLst>
+            <a:gs pos="0">
+              <a:schemeClr val="phClr">
+                <a:tint val="93000"/>
+                <a:shade val="98000"/>
+                <a:lumMod val="102000"/>
+                <a:satMod val="150000"/>
+              </a:schemeClr>
+            </a:gs>
+            <a:gs pos="50000">
+              <a:schemeClr val="phClr">
+                <a:tint val="98000"/>
+                <a:shade val="90000"/>
+                <a:lumMod val="103000"/>
+                <a:satMod val="130000"/>
+              </a:schemeClr>
+            </a:gs>
+            <a:gs pos="100000">
+              <a:schemeClr val="phClr">
+                <a:shade val="63000"/>
+                <a:satMod val="120000"/>
+              </a:schemeClr>
+            </a:gs>
+          </a:gsLst>
+          <a:lin ang="5400000" scaled="0"/>
+        </a:gradFill>
+      </a:bgFillStyleLst>
+    </a:fmtScheme>
+  </a:themeElements>
+  <a:objectDefaults/>
+  <a:extraClrSchemeLst/>
 </a:theme>
 </file>